--- a/instructors/Web Scraping with Python.pptx
+++ b/instructors/Web Scraping with Python.pptx
@@ -3,16 +3,18 @@
 <p:presentation xmlns:a="http://schemas.openxmlformats.org/drawingml/2006/main" xmlns:r="http://schemas.openxmlformats.org/officeDocument/2006/relationships" xmlns:p="http://schemas.openxmlformats.org/presentationml/2006/main" saveSubsetFonts="1">
   <p:sldMasterIdLst>
     <p:sldMasterId id="2147483648" r:id="rId1"/>
+    <p:sldMasterId id="2147483660" r:id="rId2"/>
   </p:sldMasterIdLst>
   <p:sldIdLst>
-    <p:sldId id="258" r:id="rId2"/>
-    <p:sldId id="261" r:id="rId3"/>
-    <p:sldId id="262" r:id="rId4"/>
-    <p:sldId id="263" r:id="rId5"/>
-    <p:sldId id="265" r:id="rId6"/>
-    <p:sldId id="266" r:id="rId7"/>
-    <p:sldId id="267" r:id="rId8"/>
-    <p:sldId id="264" r:id="rId9"/>
+    <p:sldId id="258" r:id="rId3"/>
+    <p:sldId id="261" r:id="rId4"/>
+    <p:sldId id="262" r:id="rId5"/>
+    <p:sldId id="263" r:id="rId6"/>
+    <p:sldId id="265" r:id="rId7"/>
+    <p:sldId id="266" r:id="rId8"/>
+    <p:sldId id="267" r:id="rId9"/>
+    <p:sldId id="264" r:id="rId10"/>
+    <p:sldId id="257" r:id="rId11"/>
   </p:sldIdLst>
   <p:sldSz cx="12192000" cy="6858000"/>
   <p:notesSz cx="6858000" cy="9144000"/>
@@ -518,7 +520,7 @@
           <a:p>
             <a:fld id="{CEEBFD85-82E7-47E4-885E-AE80971B230E}" type="datetimeFigureOut">
               <a:rPr lang="en-GB" smtClean="0"/>
-              <a:t>29/01/2026</a:t>
+              <a:t>03/03/2026</a:t>
             </a:fld>
             <a:endParaRPr lang="en-GB"/>
           </a:p>
@@ -716,7 +718,7 @@
           <a:p>
             <a:fld id="{CEEBFD85-82E7-47E4-885E-AE80971B230E}" type="datetimeFigureOut">
               <a:rPr lang="en-GB" smtClean="0"/>
-              <a:t>29/01/2026</a:t>
+              <a:t>03/03/2026</a:t>
             </a:fld>
             <a:endParaRPr lang="en-GB"/>
           </a:p>
@@ -924,7 +926,7 @@
           <a:p>
             <a:fld id="{CEEBFD85-82E7-47E4-885E-AE80971B230E}" type="datetimeFigureOut">
               <a:rPr lang="en-GB" smtClean="0"/>
-              <a:t>29/01/2026</a:t>
+              <a:t>03/03/2026</a:t>
             </a:fld>
             <a:endParaRPr lang="en-GB"/>
           </a:p>
@@ -988,6 +990,2430 @@
     <p:extLst>
       <p:ext uri="{BB962C8B-B14F-4D97-AF65-F5344CB8AC3E}">
         <p14:creationId xmlns:p14="http://schemas.microsoft.com/office/powerpoint/2010/main" val="3081586272"/>
+      </p:ext>
+    </p:extLst>
+  </p:cSld>
+  <p:clrMapOvr>
+    <a:masterClrMapping/>
+  </p:clrMapOvr>
+</p:sldLayout>
+</file>
+
+<file path=ppt/slideLayouts/slideLayout12.xml><?xml version="1.0" encoding="utf-8"?>
+<p:sldLayout xmlns:a="http://schemas.openxmlformats.org/drawingml/2006/main" xmlns:r="http://schemas.openxmlformats.org/officeDocument/2006/relationships" xmlns:p="http://schemas.openxmlformats.org/presentationml/2006/main" preserve="1">
+  <p:cSld name="Light Title Slide">
+    <p:bg>
+      <p:bgPr>
+        <a:solidFill>
+          <a:srgbClr val="FAFAFA"/>
+        </a:solidFill>
+        <a:effectLst/>
+      </p:bgPr>
+    </p:bg>
+    <p:spTree>
+      <p:nvGrpSpPr>
+        <p:cNvPr id="1" name=""/>
+        <p:cNvGrpSpPr/>
+        <p:nvPr/>
+      </p:nvGrpSpPr>
+      <p:grpSpPr>
+        <a:xfrm>
+          <a:off x="0" y="0"/>
+          <a:ext cx="0" cy="0"/>
+          <a:chOff x="0" y="0"/>
+          <a:chExt cx="0" cy="0"/>
+        </a:xfrm>
+      </p:grpSpPr>
+      <p:pic>
+        <p:nvPicPr>
+          <p:cNvPr id="5" name="Picture 4">
+            <a:extLst>
+              <a:ext uri="{FF2B5EF4-FFF2-40B4-BE49-F238E27FC236}">
+                <a16:creationId xmlns:a16="http://schemas.microsoft.com/office/drawing/2014/main" id="{0ACE8E45-5B9F-C181-45C9-202694F15FF9}"/>
+              </a:ext>
+            </a:extLst>
+          </p:cNvPr>
+          <p:cNvPicPr>
+            <a:picLocks noChangeAspect="1"/>
+          </p:cNvPicPr>
+          <p:nvPr userDrawn="1"/>
+        </p:nvPicPr>
+        <p:blipFill>
+          <a:blip r:embed="rId2" cstate="hqprint">
+            <a:extLst>
+              <a:ext uri="{28A0092B-C50C-407E-A947-70E740481C1C}">
+                <a14:useLocalDpi xmlns:a14="http://schemas.microsoft.com/office/drawing/2010/main"/>
+              </a:ext>
+            </a:extLst>
+          </a:blip>
+          <a:srcRect/>
+          <a:stretch/>
+        </p:blipFill>
+        <p:spPr>
+          <a:xfrm>
+            <a:off x="0" y="0"/>
+            <a:ext cx="12192000" cy="6858000"/>
+          </a:xfrm>
+          <a:prstGeom prst="rect">
+            <a:avLst/>
+          </a:prstGeom>
+        </p:spPr>
+      </p:pic>
+      <p:sp>
+        <p:nvSpPr>
+          <p:cNvPr id="2" name="2. Title Placeholder">
+            <a:extLst>
+              <a:ext uri="{FF2B5EF4-FFF2-40B4-BE49-F238E27FC236}">
+                <a16:creationId xmlns:a16="http://schemas.microsoft.com/office/drawing/2014/main" id="{8CC78C08-B324-DDE3-8FA4-2E0FECB9847B}"/>
+              </a:ext>
+            </a:extLst>
+          </p:cNvPr>
+          <p:cNvSpPr>
+            <a:spLocks noGrp="1"/>
+          </p:cNvSpPr>
+          <p:nvPr>
+            <p:ph type="ctrTitle" hasCustomPrompt="1"/>
+          </p:nvPr>
+        </p:nvSpPr>
+        <p:spPr>
+          <a:xfrm>
+            <a:off x="406400" y="1320102"/>
+            <a:ext cx="6908800" cy="2387600"/>
+          </a:xfrm>
+          <a:prstGeom prst="rect">
+            <a:avLst/>
+          </a:prstGeom>
+        </p:spPr>
+        <p:txBody>
+          <a:bodyPr anchor="b"/>
+          <a:lstStyle>
+            <a:lvl1pPr algn="l">
+              <a:lnSpc>
+                <a:spcPts val="5400"/>
+              </a:lnSpc>
+              <a:defRPr sz="6000">
+                <a:solidFill>
+                  <a:srgbClr val="1B1B1B"/>
+                </a:solidFill>
+              </a:defRPr>
+            </a:lvl1pPr>
+          </a:lstStyle>
+          <a:p>
+            <a:r>
+              <a:rPr lang="en-GB"/>
+              <a:t>Insert headline here. </a:t>
+            </a:r>
+            <a:br>
+              <a:rPr lang="en-GB"/>
+            </a:br>
+            <a:r>
+              <a:rPr lang="en-GB"/>
+              <a:t>Should be between </a:t>
+            </a:r>
+            <a:br>
+              <a:rPr lang="en-GB"/>
+            </a:br>
+            <a:r>
+              <a:rPr lang="en-GB"/>
+              <a:t>1-3 lines max. </a:t>
+            </a:r>
+            <a:endParaRPr lang="en-US"/>
+          </a:p>
+        </p:txBody>
+      </p:sp>
+      <p:sp>
+        <p:nvSpPr>
+          <p:cNvPr id="15" name="3. Subtitle Placeholder">
+            <a:extLst>
+              <a:ext uri="{FF2B5EF4-FFF2-40B4-BE49-F238E27FC236}">
+                <a16:creationId xmlns:a16="http://schemas.microsoft.com/office/drawing/2014/main" id="{B933CDFE-7FC5-932E-CB7F-3B49EC1A0FCA}"/>
+              </a:ext>
+            </a:extLst>
+          </p:cNvPr>
+          <p:cNvSpPr>
+            <a:spLocks noGrp="1"/>
+          </p:cNvSpPr>
+          <p:nvPr>
+            <p:ph type="subTitle" idx="1" hasCustomPrompt="1"/>
+          </p:nvPr>
+        </p:nvSpPr>
+        <p:spPr>
+          <a:xfrm>
+            <a:off x="406400" y="3707702"/>
+            <a:ext cx="6671733" cy="1655762"/>
+          </a:xfrm>
+          <a:prstGeom prst="rect">
+            <a:avLst/>
+          </a:prstGeom>
+        </p:spPr>
+        <p:txBody>
+          <a:bodyPr>
+            <a:normAutofit/>
+          </a:bodyPr>
+          <a:lstStyle>
+            <a:lvl1pPr marL="0" indent="0" algn="l">
+              <a:lnSpc>
+                <a:spcPct val="100000"/>
+              </a:lnSpc>
+              <a:spcBef>
+                <a:spcPts val="0"/>
+              </a:spcBef>
+              <a:buNone/>
+              <a:defRPr sz="2000">
+                <a:solidFill>
+                  <a:srgbClr val="1B1B1B"/>
+                </a:solidFill>
+              </a:defRPr>
+            </a:lvl1pPr>
+            <a:lvl2pPr marL="457200" indent="0" algn="ctr">
+              <a:buNone/>
+              <a:defRPr sz="2000"/>
+            </a:lvl2pPr>
+            <a:lvl3pPr marL="914400" indent="0" algn="ctr">
+              <a:buNone/>
+              <a:defRPr sz="1800"/>
+            </a:lvl3pPr>
+            <a:lvl4pPr marL="1371600" indent="0" algn="ctr">
+              <a:buNone/>
+              <a:defRPr sz="1600"/>
+            </a:lvl4pPr>
+            <a:lvl5pPr marL="1828800" indent="0" algn="ctr">
+              <a:buNone/>
+              <a:defRPr sz="1600"/>
+            </a:lvl5pPr>
+            <a:lvl6pPr marL="2286000" indent="0" algn="ctr">
+              <a:buNone/>
+              <a:defRPr sz="1600"/>
+            </a:lvl6pPr>
+            <a:lvl7pPr marL="2743200" indent="0" algn="ctr">
+              <a:buNone/>
+              <a:defRPr sz="1600"/>
+            </a:lvl7pPr>
+            <a:lvl8pPr marL="3200400" indent="0" algn="ctr">
+              <a:buNone/>
+              <a:defRPr sz="1600"/>
+            </a:lvl8pPr>
+            <a:lvl9pPr marL="3657600" indent="0" algn="ctr">
+              <a:buNone/>
+              <a:defRPr sz="1600"/>
+            </a:lvl9pPr>
+          </a:lstStyle>
+          <a:p>
+            <a:r>
+              <a:rPr lang="en-GB"/>
+              <a:t>Insert sub copy here.</a:t>
+            </a:r>
+            <a:endParaRPr lang="en-US"/>
+          </a:p>
+        </p:txBody>
+      </p:sp>
+      <p:pic>
+        <p:nvPicPr>
+          <p:cNvPr id="4" name="Picture 3" descr="A black background with a black square&#10;&#10;Description automatically generated with medium confidence">
+            <a:extLst>
+              <a:ext uri="{FF2B5EF4-FFF2-40B4-BE49-F238E27FC236}">
+                <a16:creationId xmlns:a16="http://schemas.microsoft.com/office/drawing/2014/main" id="{82EF67E1-6EE4-3331-ABA4-9F069831BFF9}"/>
+              </a:ext>
+            </a:extLst>
+          </p:cNvPr>
+          <p:cNvPicPr>
+            <a:picLocks noChangeAspect="1"/>
+          </p:cNvPicPr>
+          <p:nvPr/>
+        </p:nvPicPr>
+        <p:blipFill>
+          <a:blip r:embed="rId3" cstate="hqprint">
+            <a:extLst>
+              <a:ext uri="{28A0092B-C50C-407E-A947-70E740481C1C}">
+                <a14:useLocalDpi xmlns:a14="http://schemas.microsoft.com/office/drawing/2010/main"/>
+              </a:ext>
+            </a:extLst>
+          </a:blip>
+          <a:stretch>
+            <a:fillRect/>
+          </a:stretch>
+        </p:blipFill>
+        <p:spPr>
+          <a:xfrm>
+            <a:off x="406400" y="5827395"/>
+            <a:ext cx="1954059" cy="487304"/>
+          </a:xfrm>
+          <a:prstGeom prst="rect">
+            <a:avLst/>
+          </a:prstGeom>
+        </p:spPr>
+      </p:pic>
+    </p:spTree>
+    <p:extLst>
+      <p:ext uri="{BB962C8B-B14F-4D97-AF65-F5344CB8AC3E}">
+        <p14:creationId xmlns:p14="http://schemas.microsoft.com/office/powerpoint/2010/main" val="962165324"/>
+      </p:ext>
+    </p:extLst>
+  </p:cSld>
+  <p:clrMapOvr>
+    <a:masterClrMapping/>
+  </p:clrMapOvr>
+</p:sldLayout>
+</file>
+
+<file path=ppt/slideLayouts/slideLayout13.xml><?xml version="1.0" encoding="utf-8"?>
+<p:sldLayout xmlns:a="http://schemas.openxmlformats.org/drawingml/2006/main" xmlns:r="http://schemas.openxmlformats.org/officeDocument/2006/relationships" xmlns:p="http://schemas.openxmlformats.org/presentationml/2006/main" preserve="1">
+  <p:cSld name="Light Title Slide_Image">
+    <p:bg>
+      <p:bgPr>
+        <a:solidFill>
+          <a:srgbClr val="1C1C1C"/>
+        </a:solidFill>
+        <a:effectLst/>
+      </p:bgPr>
+    </p:bg>
+    <p:spTree>
+      <p:nvGrpSpPr>
+        <p:cNvPr id="1" name=""/>
+        <p:cNvGrpSpPr/>
+        <p:nvPr/>
+      </p:nvGrpSpPr>
+      <p:grpSpPr>
+        <a:xfrm>
+          <a:off x="0" y="0"/>
+          <a:ext cx="0" cy="0"/>
+          <a:chOff x="0" y="0"/>
+          <a:chExt cx="0" cy="0"/>
+        </a:xfrm>
+      </p:grpSpPr>
+      <p:pic>
+        <p:nvPicPr>
+          <p:cNvPr id="5" name="Picture 4">
+            <a:extLst>
+              <a:ext uri="{FF2B5EF4-FFF2-40B4-BE49-F238E27FC236}">
+                <a16:creationId xmlns:a16="http://schemas.microsoft.com/office/drawing/2014/main" id="{D3A91C61-EA6A-A371-72BB-E53271771FF0}"/>
+              </a:ext>
+            </a:extLst>
+          </p:cNvPr>
+          <p:cNvPicPr>
+            <a:picLocks noChangeAspect="1"/>
+          </p:cNvPicPr>
+          <p:nvPr userDrawn="1"/>
+        </p:nvPicPr>
+        <p:blipFill>
+          <a:blip r:embed="rId2" cstate="hqprint">
+            <a:extLst>
+              <a:ext uri="{28A0092B-C50C-407E-A947-70E740481C1C}">
+                <a14:useLocalDpi xmlns:a14="http://schemas.microsoft.com/office/drawing/2010/main"/>
+              </a:ext>
+            </a:extLst>
+          </a:blip>
+          <a:srcRect/>
+          <a:stretch/>
+        </p:blipFill>
+        <p:spPr>
+          <a:xfrm>
+            <a:off x="0" y="0"/>
+            <a:ext cx="12192000" cy="6858000"/>
+          </a:xfrm>
+          <a:prstGeom prst="rect">
+            <a:avLst/>
+          </a:prstGeom>
+        </p:spPr>
+      </p:pic>
+      <p:sp>
+        <p:nvSpPr>
+          <p:cNvPr id="2" name="2. Title Placeholder">
+            <a:extLst>
+              <a:ext uri="{FF2B5EF4-FFF2-40B4-BE49-F238E27FC236}">
+                <a16:creationId xmlns:a16="http://schemas.microsoft.com/office/drawing/2014/main" id="{8CC78C08-B324-DDE3-8FA4-2E0FECB9847B}"/>
+              </a:ext>
+            </a:extLst>
+          </p:cNvPr>
+          <p:cNvSpPr>
+            <a:spLocks noGrp="1"/>
+          </p:cNvSpPr>
+          <p:nvPr>
+            <p:ph type="ctrTitle" hasCustomPrompt="1"/>
+          </p:nvPr>
+        </p:nvSpPr>
+        <p:spPr>
+          <a:xfrm>
+            <a:off x="406400" y="1274763"/>
+            <a:ext cx="6344356" cy="2387600"/>
+          </a:xfrm>
+          <a:prstGeom prst="rect">
+            <a:avLst/>
+          </a:prstGeom>
+        </p:spPr>
+        <p:txBody>
+          <a:bodyPr anchor="b"/>
+          <a:lstStyle>
+            <a:lvl1pPr algn="l">
+              <a:lnSpc>
+                <a:spcPts val="5400"/>
+              </a:lnSpc>
+              <a:defRPr sz="6000">
+                <a:solidFill>
+                  <a:srgbClr val="1B1B1B"/>
+                </a:solidFill>
+              </a:defRPr>
+            </a:lvl1pPr>
+          </a:lstStyle>
+          <a:p>
+            <a:r>
+              <a:rPr lang="en-GB" dirty="0"/>
+              <a:t>Insert headline here. </a:t>
+            </a:r>
+            <a:br>
+              <a:rPr lang="en-GB" dirty="0"/>
+            </a:br>
+            <a:r>
+              <a:rPr lang="en-GB" dirty="0"/>
+              <a:t>Should be between </a:t>
+            </a:r>
+            <a:br>
+              <a:rPr lang="en-GB" dirty="0"/>
+            </a:br>
+            <a:r>
+              <a:rPr lang="en-GB" dirty="0"/>
+              <a:t>1-3 lines max. </a:t>
+            </a:r>
+            <a:endParaRPr lang="en-US" dirty="0"/>
+          </a:p>
+        </p:txBody>
+      </p:sp>
+      <p:sp>
+        <p:nvSpPr>
+          <p:cNvPr id="15" name="3. Subtitle Placeholder">
+            <a:extLst>
+              <a:ext uri="{FF2B5EF4-FFF2-40B4-BE49-F238E27FC236}">
+                <a16:creationId xmlns:a16="http://schemas.microsoft.com/office/drawing/2014/main" id="{B933CDFE-7FC5-932E-CB7F-3B49EC1A0FCA}"/>
+              </a:ext>
+            </a:extLst>
+          </p:cNvPr>
+          <p:cNvSpPr>
+            <a:spLocks noGrp="1"/>
+          </p:cNvSpPr>
+          <p:nvPr>
+            <p:ph type="subTitle" idx="1" hasCustomPrompt="1"/>
+          </p:nvPr>
+        </p:nvSpPr>
+        <p:spPr>
+          <a:xfrm>
+            <a:off x="406400" y="3707702"/>
+            <a:ext cx="6344356" cy="1655762"/>
+          </a:xfrm>
+          <a:prstGeom prst="rect">
+            <a:avLst/>
+          </a:prstGeom>
+        </p:spPr>
+        <p:txBody>
+          <a:bodyPr>
+            <a:normAutofit/>
+          </a:bodyPr>
+          <a:lstStyle>
+            <a:lvl1pPr marL="0" indent="0" algn="l">
+              <a:lnSpc>
+                <a:spcPct val="100000"/>
+              </a:lnSpc>
+              <a:spcBef>
+                <a:spcPts val="0"/>
+              </a:spcBef>
+              <a:buNone/>
+              <a:defRPr sz="2000">
+                <a:solidFill>
+                  <a:srgbClr val="1B1B1B"/>
+                </a:solidFill>
+              </a:defRPr>
+            </a:lvl1pPr>
+            <a:lvl2pPr marL="457200" indent="0" algn="ctr">
+              <a:buNone/>
+              <a:defRPr sz="2000"/>
+            </a:lvl2pPr>
+            <a:lvl3pPr marL="914400" indent="0" algn="ctr">
+              <a:buNone/>
+              <a:defRPr sz="1800"/>
+            </a:lvl3pPr>
+            <a:lvl4pPr marL="1371600" indent="0" algn="ctr">
+              <a:buNone/>
+              <a:defRPr sz="1600"/>
+            </a:lvl4pPr>
+            <a:lvl5pPr marL="1828800" indent="0" algn="ctr">
+              <a:buNone/>
+              <a:defRPr sz="1600"/>
+            </a:lvl5pPr>
+            <a:lvl6pPr marL="2286000" indent="0" algn="ctr">
+              <a:buNone/>
+              <a:defRPr sz="1600"/>
+            </a:lvl6pPr>
+            <a:lvl7pPr marL="2743200" indent="0" algn="ctr">
+              <a:buNone/>
+              <a:defRPr sz="1600"/>
+            </a:lvl7pPr>
+            <a:lvl8pPr marL="3200400" indent="0" algn="ctr">
+              <a:buNone/>
+              <a:defRPr sz="1600"/>
+            </a:lvl8pPr>
+            <a:lvl9pPr marL="3657600" indent="0" algn="ctr">
+              <a:buNone/>
+              <a:defRPr sz="1600"/>
+            </a:lvl9pPr>
+          </a:lstStyle>
+          <a:p>
+            <a:r>
+              <a:rPr lang="en-GB" dirty="0"/>
+              <a:t>Insert sub copy here.</a:t>
+            </a:r>
+            <a:endParaRPr lang="en-US" dirty="0"/>
+          </a:p>
+        </p:txBody>
+      </p:sp>
+      <p:sp>
+        <p:nvSpPr>
+          <p:cNvPr id="10" name="4. Picture Placeholder">
+            <a:extLst>
+              <a:ext uri="{FF2B5EF4-FFF2-40B4-BE49-F238E27FC236}">
+                <a16:creationId xmlns:a16="http://schemas.microsoft.com/office/drawing/2014/main" id="{C992F3AA-2026-24C9-831B-F66B099808AB}"/>
+              </a:ext>
+            </a:extLst>
+          </p:cNvPr>
+          <p:cNvSpPr>
+            <a:spLocks noGrp="1"/>
+          </p:cNvSpPr>
+          <p:nvPr>
+            <p:ph type="pic" idx="11" hasCustomPrompt="1"/>
+          </p:nvPr>
+        </p:nvSpPr>
+        <p:spPr>
+          <a:xfrm>
+            <a:off x="7631362" y="0"/>
+            <a:ext cx="4556539" cy="6858000"/>
+          </a:xfrm>
+          <a:custGeom>
+            <a:avLst/>
+            <a:gdLst>
+              <a:gd name="connsiteX0" fmla="*/ 1896887 w 4542379"/>
+              <a:gd name="connsiteY0" fmla="*/ 0 h 6858000"/>
+              <a:gd name="connsiteX1" fmla="*/ 4542379 w 4542379"/>
+              <a:gd name="connsiteY1" fmla="*/ 0 h 6858000"/>
+              <a:gd name="connsiteX2" fmla="*/ 4542379 w 4542379"/>
+              <a:gd name="connsiteY2" fmla="*/ 6858000 h 6858000"/>
+              <a:gd name="connsiteX3" fmla="*/ 2609965 w 4542379"/>
+              <a:gd name="connsiteY3" fmla="*/ 6858000 h 6858000"/>
+              <a:gd name="connsiteX4" fmla="*/ 0 w 4542379"/>
+              <a:gd name="connsiteY4" fmla="*/ 1778000 h 6858000"/>
+            </a:gdLst>
+            <a:ahLst/>
+            <a:cxnLst>
+              <a:cxn ang="0">
+                <a:pos x="connsiteX0" y="connsiteY0"/>
+              </a:cxn>
+              <a:cxn ang="0">
+                <a:pos x="connsiteX1" y="connsiteY1"/>
+              </a:cxn>
+              <a:cxn ang="0">
+                <a:pos x="connsiteX2" y="connsiteY2"/>
+              </a:cxn>
+              <a:cxn ang="0">
+                <a:pos x="connsiteX3" y="connsiteY3"/>
+              </a:cxn>
+              <a:cxn ang="0">
+                <a:pos x="connsiteX4" y="connsiteY4"/>
+              </a:cxn>
+            </a:cxnLst>
+            <a:rect l="l" t="t" r="r" b="b"/>
+            <a:pathLst>
+              <a:path w="4542379" h="6858000">
+                <a:moveTo>
+                  <a:pt x="1896887" y="0"/>
+                </a:moveTo>
+                <a:lnTo>
+                  <a:pt x="4542379" y="0"/>
+                </a:lnTo>
+                <a:lnTo>
+                  <a:pt x="4542379" y="6858000"/>
+                </a:lnTo>
+                <a:lnTo>
+                  <a:pt x="2609965" y="6858000"/>
+                </a:lnTo>
+                <a:lnTo>
+                  <a:pt x="0" y="1778000"/>
+                </a:lnTo>
+                <a:close/>
+              </a:path>
+            </a:pathLst>
+          </a:custGeom>
+        </p:spPr>
+        <p:txBody>
+          <a:bodyPr wrap="square" anchor="ctr">
+            <a:noAutofit/>
+          </a:bodyPr>
+          <a:lstStyle>
+            <a:lvl1pPr marL="0" indent="0" algn="ctr">
+              <a:buNone/>
+              <a:defRPr sz="3200"/>
+            </a:lvl1pPr>
+            <a:lvl2pPr marL="457200" indent="0">
+              <a:buNone/>
+              <a:defRPr sz="2800"/>
+            </a:lvl2pPr>
+            <a:lvl3pPr marL="914400" indent="0">
+              <a:buNone/>
+              <a:defRPr sz="2400"/>
+            </a:lvl3pPr>
+            <a:lvl4pPr marL="1371600" indent="0">
+              <a:buNone/>
+              <a:defRPr sz="2000"/>
+            </a:lvl4pPr>
+            <a:lvl5pPr marL="1828800" indent="0">
+              <a:buNone/>
+              <a:defRPr sz="2000"/>
+            </a:lvl5pPr>
+            <a:lvl6pPr marL="2286000" indent="0">
+              <a:buNone/>
+              <a:defRPr sz="2000"/>
+            </a:lvl6pPr>
+            <a:lvl7pPr marL="2743200" indent="0">
+              <a:buNone/>
+              <a:defRPr sz="2000"/>
+            </a:lvl7pPr>
+            <a:lvl8pPr marL="3200400" indent="0">
+              <a:buNone/>
+              <a:defRPr sz="2000"/>
+            </a:lvl8pPr>
+            <a:lvl9pPr marL="3657600" indent="0">
+              <a:buNone/>
+              <a:defRPr sz="2000"/>
+            </a:lvl9pPr>
+          </a:lstStyle>
+          <a:p>
+            <a:r>
+              <a:rPr lang="en-US"/>
+              <a:t> </a:t>
+            </a:r>
+          </a:p>
+        </p:txBody>
+      </p:sp>
+      <p:pic>
+        <p:nvPicPr>
+          <p:cNvPr id="4" name="Picture 3" descr="A black background with a black square&#10;&#10;Description automatically generated with medium confidence">
+            <a:extLst>
+              <a:ext uri="{FF2B5EF4-FFF2-40B4-BE49-F238E27FC236}">
+                <a16:creationId xmlns:a16="http://schemas.microsoft.com/office/drawing/2014/main" id="{3373EF5D-89A1-E767-AC39-6A875CF1499A}"/>
+              </a:ext>
+            </a:extLst>
+          </p:cNvPr>
+          <p:cNvPicPr>
+            <a:picLocks noChangeAspect="1"/>
+          </p:cNvPicPr>
+          <p:nvPr/>
+        </p:nvPicPr>
+        <p:blipFill>
+          <a:blip r:embed="rId3" cstate="hqprint">
+            <a:extLst>
+              <a:ext uri="{28A0092B-C50C-407E-A947-70E740481C1C}">
+                <a14:useLocalDpi xmlns:a14="http://schemas.microsoft.com/office/drawing/2010/main"/>
+              </a:ext>
+            </a:extLst>
+          </a:blip>
+          <a:stretch>
+            <a:fillRect/>
+          </a:stretch>
+        </p:blipFill>
+        <p:spPr>
+          <a:xfrm>
+            <a:off x="406400" y="5827395"/>
+            <a:ext cx="1954059" cy="487304"/>
+          </a:xfrm>
+          <a:prstGeom prst="rect">
+            <a:avLst/>
+          </a:prstGeom>
+        </p:spPr>
+      </p:pic>
+    </p:spTree>
+    <p:extLst>
+      <p:ext uri="{BB962C8B-B14F-4D97-AF65-F5344CB8AC3E}">
+        <p14:creationId xmlns:p14="http://schemas.microsoft.com/office/powerpoint/2010/main" val="3335424693"/>
+      </p:ext>
+    </p:extLst>
+  </p:cSld>
+  <p:clrMapOvr>
+    <a:masterClrMapping/>
+  </p:clrMapOvr>
+  <p:extLst>
+    <p:ext uri="{DCECCB84-F9BA-43D5-87BE-67443E8EF086}">
+      <p15:sldGuideLst xmlns:p15="http://schemas.microsoft.com/office/powerpoint/2012/main">
+        <p15:guide id="1" orient="horz" pos="2160">
+          <p15:clr>
+            <a:srgbClr val="FBAE40"/>
+          </p15:clr>
+        </p15:guide>
+        <p15:guide id="2" pos="3840">
+          <p15:clr>
+            <a:srgbClr val="FBAE40"/>
+          </p15:clr>
+        </p15:guide>
+      </p15:sldGuideLst>
+    </p:ext>
+  </p:extLst>
+</p:sldLayout>
+</file>
+
+<file path=ppt/slideLayouts/slideLayout14.xml><?xml version="1.0" encoding="utf-8"?>
+<p:sldLayout xmlns:a="http://schemas.openxmlformats.org/drawingml/2006/main" xmlns:r="http://schemas.openxmlformats.org/officeDocument/2006/relationships" xmlns:p="http://schemas.openxmlformats.org/presentationml/2006/main" userDrawn="1">
+  <p:cSld name="Title Slide_Image">
+    <p:bg>
+      <p:bgPr>
+        <a:solidFill>
+          <a:srgbClr val="FAFAFA"/>
+        </a:solidFill>
+        <a:effectLst/>
+      </p:bgPr>
+    </p:bg>
+    <p:spTree>
+      <p:nvGrpSpPr>
+        <p:cNvPr id="1" name=""/>
+        <p:cNvGrpSpPr/>
+        <p:nvPr/>
+      </p:nvGrpSpPr>
+      <p:grpSpPr>
+        <a:xfrm>
+          <a:off x="0" y="0"/>
+          <a:ext cx="0" cy="0"/>
+          <a:chOff x="0" y="0"/>
+          <a:chExt cx="0" cy="0"/>
+        </a:xfrm>
+      </p:grpSpPr>
+      <p:pic>
+        <p:nvPicPr>
+          <p:cNvPr id="7" name="Picture 6">
+            <a:extLst>
+              <a:ext uri="{FF2B5EF4-FFF2-40B4-BE49-F238E27FC236}">
+                <a16:creationId xmlns:a16="http://schemas.microsoft.com/office/drawing/2014/main" id="{ED4904C7-AEC6-1771-1753-914C38E8E802}"/>
+              </a:ext>
+            </a:extLst>
+          </p:cNvPr>
+          <p:cNvPicPr>
+            <a:picLocks noChangeAspect="1"/>
+          </p:cNvPicPr>
+          <p:nvPr userDrawn="1"/>
+        </p:nvPicPr>
+        <p:blipFill>
+          <a:blip r:embed="rId2" cstate="hqprint">
+            <a:extLst>
+              <a:ext uri="{28A0092B-C50C-407E-A947-70E740481C1C}">
+                <a14:useLocalDpi xmlns:a14="http://schemas.microsoft.com/office/drawing/2010/main"/>
+              </a:ext>
+            </a:extLst>
+          </a:blip>
+          <a:srcRect/>
+          <a:stretch/>
+        </p:blipFill>
+        <p:spPr>
+          <a:xfrm>
+            <a:off x="0" y="0"/>
+            <a:ext cx="12192000" cy="6858000"/>
+          </a:xfrm>
+          <a:prstGeom prst="rect">
+            <a:avLst/>
+          </a:prstGeom>
+        </p:spPr>
+      </p:pic>
+      <p:sp>
+        <p:nvSpPr>
+          <p:cNvPr id="2" name="2. Title Placeholder">
+            <a:extLst>
+              <a:ext uri="{FF2B5EF4-FFF2-40B4-BE49-F238E27FC236}">
+                <a16:creationId xmlns:a16="http://schemas.microsoft.com/office/drawing/2014/main" id="{8CC78C08-B324-DDE3-8FA4-2E0FECB9847B}"/>
+              </a:ext>
+            </a:extLst>
+          </p:cNvPr>
+          <p:cNvSpPr>
+            <a:spLocks noGrp="1"/>
+          </p:cNvSpPr>
+          <p:nvPr>
+            <p:ph type="ctrTitle" hasCustomPrompt="1"/>
+          </p:nvPr>
+        </p:nvSpPr>
+        <p:spPr>
+          <a:xfrm>
+            <a:off x="406400" y="1274763"/>
+            <a:ext cx="6637867" cy="2387600"/>
+          </a:xfrm>
+          <a:prstGeom prst="rect">
+            <a:avLst/>
+          </a:prstGeom>
+        </p:spPr>
+        <p:txBody>
+          <a:bodyPr anchor="b"/>
+          <a:lstStyle>
+            <a:lvl1pPr algn="l">
+              <a:lnSpc>
+                <a:spcPts val="5400"/>
+              </a:lnSpc>
+              <a:defRPr sz="6000">
+                <a:solidFill>
+                  <a:srgbClr val="FAFAFA"/>
+                </a:solidFill>
+              </a:defRPr>
+            </a:lvl1pPr>
+          </a:lstStyle>
+          <a:p>
+            <a:r>
+              <a:rPr lang="en-GB" dirty="0"/>
+              <a:t>Insert headline here. </a:t>
+            </a:r>
+            <a:br>
+              <a:rPr lang="en-GB" dirty="0"/>
+            </a:br>
+            <a:r>
+              <a:rPr lang="en-GB" dirty="0"/>
+              <a:t>Should be between </a:t>
+            </a:r>
+            <a:br>
+              <a:rPr lang="en-GB" dirty="0"/>
+            </a:br>
+            <a:r>
+              <a:rPr lang="en-GB" dirty="0"/>
+              <a:t>1-3 lines max. </a:t>
+            </a:r>
+            <a:endParaRPr lang="en-US" dirty="0"/>
+          </a:p>
+        </p:txBody>
+      </p:sp>
+      <p:sp>
+        <p:nvSpPr>
+          <p:cNvPr id="17" name="4. Picture Box ">
+            <a:extLst>
+              <a:ext uri="{FF2B5EF4-FFF2-40B4-BE49-F238E27FC236}">
+                <a16:creationId xmlns:a16="http://schemas.microsoft.com/office/drawing/2014/main" id="{5BD1D972-DB48-9F79-3343-53455BAD1A3F}"/>
+              </a:ext>
+            </a:extLst>
+          </p:cNvPr>
+          <p:cNvSpPr>
+            <a:spLocks noGrp="1"/>
+          </p:cNvSpPr>
+          <p:nvPr>
+            <p:ph type="pic" idx="12" hasCustomPrompt="1"/>
+          </p:nvPr>
+        </p:nvSpPr>
+        <p:spPr>
+          <a:xfrm>
+            <a:off x="7650676" y="0"/>
+            <a:ext cx="4541325" cy="6854092"/>
+          </a:xfrm>
+          <a:custGeom>
+            <a:avLst/>
+            <a:gdLst>
+              <a:gd name="connsiteX0" fmla="*/ 1895608 w 4541325"/>
+              <a:gd name="connsiteY0" fmla="*/ 0 h 6854092"/>
+              <a:gd name="connsiteX1" fmla="*/ 4541325 w 4541325"/>
+              <a:gd name="connsiteY1" fmla="*/ 0 h 6854092"/>
+              <a:gd name="connsiteX2" fmla="*/ 4541325 w 4541325"/>
+              <a:gd name="connsiteY2" fmla="*/ 6854092 h 6854092"/>
+              <a:gd name="connsiteX3" fmla="*/ 2610437 w 4541325"/>
+              <a:gd name="connsiteY3" fmla="*/ 6854092 h 6854092"/>
+              <a:gd name="connsiteX4" fmla="*/ 0 w 4541325"/>
+              <a:gd name="connsiteY4" fmla="*/ 4568092 h 6854092"/>
+            </a:gdLst>
+            <a:ahLst/>
+            <a:cxnLst>
+              <a:cxn ang="0">
+                <a:pos x="connsiteX0" y="connsiteY0"/>
+              </a:cxn>
+              <a:cxn ang="0">
+                <a:pos x="connsiteX1" y="connsiteY1"/>
+              </a:cxn>
+              <a:cxn ang="0">
+                <a:pos x="connsiteX2" y="connsiteY2"/>
+              </a:cxn>
+              <a:cxn ang="0">
+                <a:pos x="connsiteX3" y="connsiteY3"/>
+              </a:cxn>
+              <a:cxn ang="0">
+                <a:pos x="connsiteX4" y="connsiteY4"/>
+              </a:cxn>
+            </a:cxnLst>
+            <a:rect l="l" t="t" r="r" b="b"/>
+            <a:pathLst>
+              <a:path w="4541325" h="6854092">
+                <a:moveTo>
+                  <a:pt x="1895608" y="0"/>
+                </a:moveTo>
+                <a:lnTo>
+                  <a:pt x="4541325" y="0"/>
+                </a:lnTo>
+                <a:lnTo>
+                  <a:pt x="4541325" y="6854092"/>
+                </a:lnTo>
+                <a:lnTo>
+                  <a:pt x="2610437" y="6854092"/>
+                </a:lnTo>
+                <a:lnTo>
+                  <a:pt x="0" y="4568092"/>
+                </a:lnTo>
+                <a:close/>
+              </a:path>
+            </a:pathLst>
+          </a:custGeom>
+        </p:spPr>
+        <p:txBody>
+          <a:bodyPr wrap="square" anchor="ctr">
+            <a:noAutofit/>
+          </a:bodyPr>
+          <a:lstStyle>
+            <a:lvl1pPr marL="0" indent="0" algn="ctr">
+              <a:buNone/>
+              <a:defRPr sz="3200"/>
+            </a:lvl1pPr>
+            <a:lvl2pPr marL="457200" indent="0">
+              <a:buNone/>
+              <a:defRPr sz="2800"/>
+            </a:lvl2pPr>
+            <a:lvl3pPr marL="914400" indent="0">
+              <a:buNone/>
+              <a:defRPr sz="2400"/>
+            </a:lvl3pPr>
+            <a:lvl4pPr marL="1371600" indent="0">
+              <a:buNone/>
+              <a:defRPr sz="2000"/>
+            </a:lvl4pPr>
+            <a:lvl5pPr marL="1828800" indent="0">
+              <a:buNone/>
+              <a:defRPr sz="2000"/>
+            </a:lvl5pPr>
+            <a:lvl6pPr marL="2286000" indent="0">
+              <a:buNone/>
+              <a:defRPr sz="2000"/>
+            </a:lvl6pPr>
+            <a:lvl7pPr marL="2743200" indent="0">
+              <a:buNone/>
+              <a:defRPr sz="2000"/>
+            </a:lvl7pPr>
+            <a:lvl8pPr marL="3200400" indent="0">
+              <a:buNone/>
+              <a:defRPr sz="2000"/>
+            </a:lvl8pPr>
+            <a:lvl9pPr marL="3657600" indent="0">
+              <a:buNone/>
+              <a:defRPr sz="2000"/>
+            </a:lvl9pPr>
+          </a:lstStyle>
+          <a:p>
+            <a:r>
+              <a:rPr lang="en-US"/>
+              <a:t> </a:t>
+            </a:r>
+          </a:p>
+        </p:txBody>
+      </p:sp>
+      <p:pic>
+        <p:nvPicPr>
+          <p:cNvPr id="3" name="Picture 2" descr="A black and white sign with white text&#10;&#10;Description automatically generated">
+            <a:extLst>
+              <a:ext uri="{FF2B5EF4-FFF2-40B4-BE49-F238E27FC236}">
+                <a16:creationId xmlns:a16="http://schemas.microsoft.com/office/drawing/2014/main" id="{6DFB1AD8-611C-E16C-A431-4125E5802149}"/>
+              </a:ext>
+            </a:extLst>
+          </p:cNvPr>
+          <p:cNvPicPr>
+            <a:picLocks noChangeAspect="1"/>
+          </p:cNvPicPr>
+          <p:nvPr/>
+        </p:nvPicPr>
+        <p:blipFill>
+          <a:blip r:embed="rId3" cstate="hqprint">
+            <a:extLst>
+              <a:ext uri="{28A0092B-C50C-407E-A947-70E740481C1C}">
+                <a14:useLocalDpi xmlns:a14="http://schemas.microsoft.com/office/drawing/2010/main"/>
+              </a:ext>
+            </a:extLst>
+          </a:blip>
+          <a:stretch>
+            <a:fillRect/>
+          </a:stretch>
+        </p:blipFill>
+        <p:spPr>
+          <a:xfrm>
+            <a:off x="406400" y="5822539"/>
+            <a:ext cx="1953808" cy="497017"/>
+          </a:xfrm>
+          <a:prstGeom prst="rect">
+            <a:avLst/>
+          </a:prstGeom>
+        </p:spPr>
+      </p:pic>
+      <p:sp>
+        <p:nvSpPr>
+          <p:cNvPr id="5" name="3. Subtitle Placeholder">
+            <a:extLst>
+              <a:ext uri="{FF2B5EF4-FFF2-40B4-BE49-F238E27FC236}">
+                <a16:creationId xmlns:a16="http://schemas.microsoft.com/office/drawing/2014/main" id="{D99E812D-9A36-EB66-C6AF-F7569F4271BC}"/>
+              </a:ext>
+            </a:extLst>
+          </p:cNvPr>
+          <p:cNvSpPr>
+            <a:spLocks noGrp="1"/>
+          </p:cNvSpPr>
+          <p:nvPr>
+            <p:ph type="subTitle" idx="1" hasCustomPrompt="1"/>
+          </p:nvPr>
+        </p:nvSpPr>
+        <p:spPr>
+          <a:xfrm>
+            <a:off x="406400" y="3707702"/>
+            <a:ext cx="6637867" cy="1022342"/>
+          </a:xfrm>
+          <a:prstGeom prst="rect">
+            <a:avLst/>
+          </a:prstGeom>
+        </p:spPr>
+        <p:txBody>
+          <a:bodyPr>
+            <a:normAutofit/>
+          </a:bodyPr>
+          <a:lstStyle>
+            <a:lvl1pPr marL="0" indent="0" algn="l">
+              <a:lnSpc>
+                <a:spcPct val="100000"/>
+              </a:lnSpc>
+              <a:spcBef>
+                <a:spcPts val="0"/>
+              </a:spcBef>
+              <a:buNone/>
+              <a:defRPr sz="2000">
+                <a:solidFill>
+                  <a:schemeClr val="bg1"/>
+                </a:solidFill>
+              </a:defRPr>
+            </a:lvl1pPr>
+            <a:lvl2pPr marL="457200" indent="0" algn="ctr">
+              <a:buNone/>
+              <a:defRPr sz="2000"/>
+            </a:lvl2pPr>
+            <a:lvl3pPr marL="914400" indent="0" algn="ctr">
+              <a:buNone/>
+              <a:defRPr sz="1800"/>
+            </a:lvl3pPr>
+            <a:lvl4pPr marL="1371600" indent="0" algn="ctr">
+              <a:buNone/>
+              <a:defRPr sz="1600"/>
+            </a:lvl4pPr>
+            <a:lvl5pPr marL="1828800" indent="0" algn="ctr">
+              <a:buNone/>
+              <a:defRPr sz="1600"/>
+            </a:lvl5pPr>
+            <a:lvl6pPr marL="2286000" indent="0" algn="ctr">
+              <a:buNone/>
+              <a:defRPr sz="1600"/>
+            </a:lvl6pPr>
+            <a:lvl7pPr marL="2743200" indent="0" algn="ctr">
+              <a:buNone/>
+              <a:defRPr sz="1600"/>
+            </a:lvl7pPr>
+            <a:lvl8pPr marL="3200400" indent="0" algn="ctr">
+              <a:buNone/>
+              <a:defRPr sz="1600"/>
+            </a:lvl8pPr>
+            <a:lvl9pPr marL="3657600" indent="0" algn="ctr">
+              <a:buNone/>
+              <a:defRPr sz="1600"/>
+            </a:lvl9pPr>
+          </a:lstStyle>
+          <a:p>
+            <a:r>
+              <a:rPr lang="en-GB" dirty="0"/>
+              <a:t>Insert sub copy here.</a:t>
+            </a:r>
+            <a:endParaRPr lang="en-US" dirty="0"/>
+          </a:p>
+        </p:txBody>
+      </p:sp>
+    </p:spTree>
+    <p:extLst>
+      <p:ext uri="{BB962C8B-B14F-4D97-AF65-F5344CB8AC3E}">
+        <p14:creationId xmlns:p14="http://schemas.microsoft.com/office/powerpoint/2010/main" val="3280522896"/>
+      </p:ext>
+    </p:extLst>
+  </p:cSld>
+  <p:clrMapOvr>
+    <a:masterClrMapping/>
+  </p:clrMapOvr>
+</p:sldLayout>
+</file>
+
+<file path=ppt/slideLayouts/slideLayout15.xml><?xml version="1.0" encoding="utf-8"?>
+<p:sldLayout xmlns:a="http://schemas.openxmlformats.org/drawingml/2006/main" xmlns:r="http://schemas.openxmlformats.org/officeDocument/2006/relationships" xmlns:p="http://schemas.openxmlformats.org/presentationml/2006/main" userDrawn="1">
+  <p:cSld name="Dark Title Slide">
+    <p:bg>
+      <p:bgPr>
+        <a:solidFill>
+          <a:srgbClr val="1B1B1B"/>
+        </a:solidFill>
+        <a:effectLst/>
+      </p:bgPr>
+    </p:bg>
+    <p:spTree>
+      <p:nvGrpSpPr>
+        <p:cNvPr id="1" name=""/>
+        <p:cNvGrpSpPr/>
+        <p:nvPr/>
+      </p:nvGrpSpPr>
+      <p:grpSpPr>
+        <a:xfrm>
+          <a:off x="0" y="0"/>
+          <a:ext cx="0" cy="0"/>
+          <a:chOff x="0" y="0"/>
+          <a:chExt cx="0" cy="0"/>
+        </a:xfrm>
+      </p:grpSpPr>
+      <p:pic>
+        <p:nvPicPr>
+          <p:cNvPr id="4" name="Picture 3">
+            <a:extLst>
+              <a:ext uri="{FF2B5EF4-FFF2-40B4-BE49-F238E27FC236}">
+                <a16:creationId xmlns:a16="http://schemas.microsoft.com/office/drawing/2014/main" id="{99956F4E-D43F-4BF7-F1A3-5555E421CFB2}"/>
+              </a:ext>
+            </a:extLst>
+          </p:cNvPr>
+          <p:cNvPicPr>
+            <a:picLocks noChangeAspect="1"/>
+          </p:cNvPicPr>
+          <p:nvPr userDrawn="1"/>
+        </p:nvPicPr>
+        <p:blipFill>
+          <a:blip r:embed="rId2" cstate="hqprint">
+            <a:extLst>
+              <a:ext uri="{28A0092B-C50C-407E-A947-70E740481C1C}">
+                <a14:useLocalDpi xmlns:a14="http://schemas.microsoft.com/office/drawing/2010/main"/>
+              </a:ext>
+            </a:extLst>
+          </a:blip>
+          <a:srcRect/>
+          <a:stretch/>
+        </p:blipFill>
+        <p:spPr>
+          <a:xfrm>
+            <a:off x="0" y="0"/>
+            <a:ext cx="12192000" cy="6858000"/>
+          </a:xfrm>
+          <a:prstGeom prst="rect">
+            <a:avLst/>
+          </a:prstGeom>
+        </p:spPr>
+      </p:pic>
+      <p:sp>
+        <p:nvSpPr>
+          <p:cNvPr id="2" name="2. Title Placeholder">
+            <a:extLst>
+              <a:ext uri="{FF2B5EF4-FFF2-40B4-BE49-F238E27FC236}">
+                <a16:creationId xmlns:a16="http://schemas.microsoft.com/office/drawing/2014/main" id="{8CC78C08-B324-DDE3-8FA4-2E0FECB9847B}"/>
+              </a:ext>
+            </a:extLst>
+          </p:cNvPr>
+          <p:cNvSpPr>
+            <a:spLocks noGrp="1"/>
+          </p:cNvSpPr>
+          <p:nvPr>
+            <p:ph type="ctrTitle" hasCustomPrompt="1"/>
+          </p:nvPr>
+        </p:nvSpPr>
+        <p:spPr>
+          <a:xfrm>
+            <a:off x="406400" y="1274763"/>
+            <a:ext cx="9144000" cy="2387600"/>
+          </a:xfrm>
+          <a:prstGeom prst="rect">
+            <a:avLst/>
+          </a:prstGeom>
+        </p:spPr>
+        <p:txBody>
+          <a:bodyPr anchor="b"/>
+          <a:lstStyle>
+            <a:lvl1pPr algn="l">
+              <a:lnSpc>
+                <a:spcPts val="5400"/>
+              </a:lnSpc>
+              <a:defRPr sz="6000">
+                <a:solidFill>
+                  <a:srgbClr val="FAFAFA"/>
+                </a:solidFill>
+              </a:defRPr>
+            </a:lvl1pPr>
+          </a:lstStyle>
+          <a:p>
+            <a:r>
+              <a:rPr lang="en-GB" dirty="0"/>
+              <a:t>Insert headline here. </a:t>
+            </a:r>
+            <a:br>
+              <a:rPr lang="en-GB" dirty="0"/>
+            </a:br>
+            <a:r>
+              <a:rPr lang="en-GB" dirty="0"/>
+              <a:t>Should be between </a:t>
+            </a:r>
+            <a:br>
+              <a:rPr lang="en-GB" dirty="0"/>
+            </a:br>
+            <a:r>
+              <a:rPr lang="en-GB" dirty="0"/>
+              <a:t>1-3 lines max. </a:t>
+            </a:r>
+            <a:endParaRPr lang="en-US" dirty="0"/>
+          </a:p>
+        </p:txBody>
+      </p:sp>
+      <p:pic>
+        <p:nvPicPr>
+          <p:cNvPr id="6" name="Picture 5" descr="A black and white sign with white text&#10;&#10;Description automatically generated">
+            <a:extLst>
+              <a:ext uri="{FF2B5EF4-FFF2-40B4-BE49-F238E27FC236}">
+                <a16:creationId xmlns:a16="http://schemas.microsoft.com/office/drawing/2014/main" id="{3513E173-CB28-611F-DD12-EAFD5ADD7ED9}"/>
+              </a:ext>
+            </a:extLst>
+          </p:cNvPr>
+          <p:cNvPicPr>
+            <a:picLocks noChangeAspect="1"/>
+          </p:cNvPicPr>
+          <p:nvPr/>
+        </p:nvPicPr>
+        <p:blipFill>
+          <a:blip r:embed="rId3" cstate="hqprint">
+            <a:extLst>
+              <a:ext uri="{28A0092B-C50C-407E-A947-70E740481C1C}">
+                <a14:useLocalDpi xmlns:a14="http://schemas.microsoft.com/office/drawing/2010/main"/>
+              </a:ext>
+            </a:extLst>
+          </a:blip>
+          <a:stretch>
+            <a:fillRect/>
+          </a:stretch>
+        </p:blipFill>
+        <p:spPr>
+          <a:xfrm>
+            <a:off x="406400" y="5822539"/>
+            <a:ext cx="1953808" cy="497017"/>
+          </a:xfrm>
+          <a:prstGeom prst="rect">
+            <a:avLst/>
+          </a:prstGeom>
+        </p:spPr>
+      </p:pic>
+      <p:sp>
+        <p:nvSpPr>
+          <p:cNvPr id="5" name="3. Subtitle Placeholder">
+            <a:extLst>
+              <a:ext uri="{FF2B5EF4-FFF2-40B4-BE49-F238E27FC236}">
+                <a16:creationId xmlns:a16="http://schemas.microsoft.com/office/drawing/2014/main" id="{A043951A-D3DB-4FFC-95EC-551578777232}"/>
+              </a:ext>
+            </a:extLst>
+          </p:cNvPr>
+          <p:cNvSpPr>
+            <a:spLocks noGrp="1"/>
+          </p:cNvSpPr>
+          <p:nvPr>
+            <p:ph type="subTitle" idx="1" hasCustomPrompt="1"/>
+          </p:nvPr>
+        </p:nvSpPr>
+        <p:spPr>
+          <a:xfrm>
+            <a:off x="406400" y="3707702"/>
+            <a:ext cx="9144000" cy="1655762"/>
+          </a:xfrm>
+          <a:prstGeom prst="rect">
+            <a:avLst/>
+          </a:prstGeom>
+        </p:spPr>
+        <p:txBody>
+          <a:bodyPr>
+            <a:normAutofit/>
+          </a:bodyPr>
+          <a:lstStyle>
+            <a:lvl1pPr marL="0" indent="0" algn="l">
+              <a:lnSpc>
+                <a:spcPct val="100000"/>
+              </a:lnSpc>
+              <a:spcBef>
+                <a:spcPts val="0"/>
+              </a:spcBef>
+              <a:buNone/>
+              <a:defRPr sz="2000">
+                <a:solidFill>
+                  <a:schemeClr val="bg1"/>
+                </a:solidFill>
+              </a:defRPr>
+            </a:lvl1pPr>
+            <a:lvl2pPr marL="457200" indent="0" algn="ctr">
+              <a:buNone/>
+              <a:defRPr sz="2000"/>
+            </a:lvl2pPr>
+            <a:lvl3pPr marL="914400" indent="0" algn="ctr">
+              <a:buNone/>
+              <a:defRPr sz="1800"/>
+            </a:lvl3pPr>
+            <a:lvl4pPr marL="1371600" indent="0" algn="ctr">
+              <a:buNone/>
+              <a:defRPr sz="1600"/>
+            </a:lvl4pPr>
+            <a:lvl5pPr marL="1828800" indent="0" algn="ctr">
+              <a:buNone/>
+              <a:defRPr sz="1600"/>
+            </a:lvl5pPr>
+            <a:lvl6pPr marL="2286000" indent="0" algn="ctr">
+              <a:buNone/>
+              <a:defRPr sz="1600"/>
+            </a:lvl6pPr>
+            <a:lvl7pPr marL="2743200" indent="0" algn="ctr">
+              <a:buNone/>
+              <a:defRPr sz="1600"/>
+            </a:lvl7pPr>
+            <a:lvl8pPr marL="3200400" indent="0" algn="ctr">
+              <a:buNone/>
+              <a:defRPr sz="1600"/>
+            </a:lvl8pPr>
+            <a:lvl9pPr marL="3657600" indent="0" algn="ctr">
+              <a:buNone/>
+              <a:defRPr sz="1600"/>
+            </a:lvl9pPr>
+          </a:lstStyle>
+          <a:p>
+            <a:r>
+              <a:rPr lang="en-GB" dirty="0"/>
+              <a:t>Insert sub copy here.</a:t>
+            </a:r>
+            <a:endParaRPr lang="en-US" dirty="0"/>
+          </a:p>
+        </p:txBody>
+      </p:sp>
+    </p:spTree>
+    <p:extLst>
+      <p:ext uri="{BB962C8B-B14F-4D97-AF65-F5344CB8AC3E}">
+        <p14:creationId xmlns:p14="http://schemas.microsoft.com/office/powerpoint/2010/main" val="2700157277"/>
+      </p:ext>
+    </p:extLst>
+  </p:cSld>
+  <p:clrMapOvr>
+    <a:masterClrMapping/>
+  </p:clrMapOvr>
+  <p:extLst>
+    <p:ext uri="{DCECCB84-F9BA-43D5-87BE-67443E8EF086}">
+      <p15:sldGuideLst xmlns:p15="http://schemas.microsoft.com/office/powerpoint/2012/main">
+        <p15:guide id="1" orient="horz" pos="2160">
+          <p15:clr>
+            <a:srgbClr val="FBAE40"/>
+          </p15:clr>
+        </p15:guide>
+        <p15:guide id="2" pos="3840">
+          <p15:clr>
+            <a:srgbClr val="FBAE40"/>
+          </p15:clr>
+        </p15:guide>
+      </p15:sldGuideLst>
+    </p:ext>
+  </p:extLst>
+</p:sldLayout>
+</file>
+
+<file path=ppt/slideLayouts/slideLayout16.xml><?xml version="1.0" encoding="utf-8"?>
+<p:sldLayout xmlns:a="http://schemas.openxmlformats.org/drawingml/2006/main" xmlns:r="http://schemas.openxmlformats.org/officeDocument/2006/relationships" xmlns:p="http://schemas.openxmlformats.org/presentationml/2006/main" preserve="1">
+  <p:cSld name="Title and Content">
+    <p:bg>
+      <p:bgPr>
+        <a:solidFill>
+          <a:srgbClr val="FAFAFA"/>
+        </a:solidFill>
+        <a:effectLst/>
+      </p:bgPr>
+    </p:bg>
+    <p:spTree>
+      <p:nvGrpSpPr>
+        <p:cNvPr id="1" name=""/>
+        <p:cNvGrpSpPr/>
+        <p:nvPr/>
+      </p:nvGrpSpPr>
+      <p:grpSpPr>
+        <a:xfrm>
+          <a:off x="0" y="0"/>
+          <a:ext cx="0" cy="0"/>
+          <a:chOff x="0" y="0"/>
+          <a:chExt cx="0" cy="0"/>
+        </a:xfrm>
+      </p:grpSpPr>
+      <p:sp>
+        <p:nvSpPr>
+          <p:cNvPr id="14" name="2. Title Placeholder">
+            <a:extLst>
+              <a:ext uri="{FF2B5EF4-FFF2-40B4-BE49-F238E27FC236}">
+                <a16:creationId xmlns:a16="http://schemas.microsoft.com/office/drawing/2014/main" id="{6D2C9649-E817-6113-49C1-5EBD81E09935}"/>
+              </a:ext>
+            </a:extLst>
+          </p:cNvPr>
+          <p:cNvSpPr>
+            <a:spLocks noGrp="1"/>
+          </p:cNvSpPr>
+          <p:nvPr>
+            <p:ph type="title" hasCustomPrompt="1"/>
+          </p:nvPr>
+        </p:nvSpPr>
+        <p:spPr>
+          <a:xfrm>
+            <a:off x="502920" y="437430"/>
+            <a:ext cx="9921240" cy="478155"/>
+          </a:xfrm>
+          <a:prstGeom prst="rect">
+            <a:avLst/>
+          </a:prstGeom>
+        </p:spPr>
+        <p:txBody>
+          <a:bodyPr vert="horz" lIns="91440" tIns="45720" rIns="91440" bIns="45720" rtlCol="0" anchor="ctr">
+            <a:noAutofit/>
+          </a:bodyPr>
+          <a:lstStyle>
+            <a:lvl1pPr>
+              <a:defRPr>
+                <a:solidFill>
+                  <a:srgbClr val="1B1B1B"/>
+                </a:solidFill>
+              </a:defRPr>
+            </a:lvl1pPr>
+          </a:lstStyle>
+          <a:p>
+            <a:r>
+              <a:rPr lang="en-GB" dirty="0"/>
+              <a:t>Insert headline here.</a:t>
+            </a:r>
+            <a:endParaRPr lang="en-US" dirty="0"/>
+          </a:p>
+        </p:txBody>
+      </p:sp>
+      <p:sp>
+        <p:nvSpPr>
+          <p:cNvPr id="9" name="3. Content Placeholder">
+            <a:extLst>
+              <a:ext uri="{FF2B5EF4-FFF2-40B4-BE49-F238E27FC236}">
+                <a16:creationId xmlns:a16="http://schemas.microsoft.com/office/drawing/2014/main" id="{B5A082DC-9190-CE12-A89B-DEAF24BD59FB}"/>
+              </a:ext>
+            </a:extLst>
+          </p:cNvPr>
+          <p:cNvSpPr>
+            <a:spLocks noGrp="1"/>
+          </p:cNvSpPr>
+          <p:nvPr>
+            <p:ph sz="half" idx="1"/>
+          </p:nvPr>
+        </p:nvSpPr>
+        <p:spPr>
+          <a:xfrm>
+            <a:off x="502920" y="1310641"/>
+            <a:ext cx="10515600" cy="4378960"/>
+          </a:xfrm>
+          <a:prstGeom prst="rect">
+            <a:avLst/>
+          </a:prstGeom>
+        </p:spPr>
+        <p:txBody>
+          <a:bodyPr/>
+          <a:lstStyle>
+            <a:lvl1pPr>
+              <a:defRPr>
+                <a:solidFill>
+                  <a:srgbClr val="1B1B1B"/>
+                </a:solidFill>
+              </a:defRPr>
+            </a:lvl1pPr>
+            <a:lvl2pPr>
+              <a:defRPr>
+                <a:solidFill>
+                  <a:srgbClr val="1B1B1B"/>
+                </a:solidFill>
+              </a:defRPr>
+            </a:lvl2pPr>
+            <a:lvl3pPr>
+              <a:defRPr>
+                <a:solidFill>
+                  <a:srgbClr val="1B1B1B"/>
+                </a:solidFill>
+              </a:defRPr>
+            </a:lvl3pPr>
+            <a:lvl4pPr>
+              <a:defRPr>
+                <a:solidFill>
+                  <a:srgbClr val="1B1B1B"/>
+                </a:solidFill>
+              </a:defRPr>
+            </a:lvl4pPr>
+            <a:lvl5pPr>
+              <a:defRPr>
+                <a:solidFill>
+                  <a:srgbClr val="1B1B1B"/>
+                </a:solidFill>
+              </a:defRPr>
+            </a:lvl5pPr>
+          </a:lstStyle>
+          <a:p>
+            <a:pPr lvl="0"/>
+            <a:r>
+              <a:rPr lang="en-GB"/>
+              <a:t>Click to edit Master text styles</a:t>
+            </a:r>
+          </a:p>
+          <a:p>
+            <a:pPr lvl="1"/>
+            <a:r>
+              <a:rPr lang="en-GB"/>
+              <a:t>Second level</a:t>
+            </a:r>
+          </a:p>
+          <a:p>
+            <a:pPr lvl="2"/>
+            <a:r>
+              <a:rPr lang="en-GB"/>
+              <a:t>Third level</a:t>
+            </a:r>
+          </a:p>
+          <a:p>
+            <a:pPr lvl="3"/>
+            <a:r>
+              <a:rPr lang="en-GB"/>
+              <a:t>Fourth level</a:t>
+            </a:r>
+          </a:p>
+          <a:p>
+            <a:pPr lvl="4"/>
+            <a:r>
+              <a:rPr lang="en-GB"/>
+              <a:t>Fifth level</a:t>
+            </a:r>
+            <a:endParaRPr lang="en-US" dirty="0"/>
+          </a:p>
+        </p:txBody>
+      </p:sp>
+      <p:pic>
+        <p:nvPicPr>
+          <p:cNvPr id="2" name="Picture 1" descr="A black background with a black square&#10;&#10;Description automatically generated with medium confidence">
+            <a:extLst>
+              <a:ext uri="{FF2B5EF4-FFF2-40B4-BE49-F238E27FC236}">
+                <a16:creationId xmlns:a16="http://schemas.microsoft.com/office/drawing/2014/main" id="{17229CF6-AAC7-DD2D-2383-FA5CC4CFB105}"/>
+              </a:ext>
+            </a:extLst>
+          </p:cNvPr>
+          <p:cNvPicPr>
+            <a:picLocks noChangeAspect="1"/>
+          </p:cNvPicPr>
+          <p:nvPr/>
+        </p:nvPicPr>
+        <p:blipFill>
+          <a:blip r:embed="rId2" cstate="hqprint">
+            <a:extLst>
+              <a:ext uri="{28A0092B-C50C-407E-A947-70E740481C1C}">
+                <a14:useLocalDpi xmlns:a14="http://schemas.microsoft.com/office/drawing/2010/main"/>
+              </a:ext>
+            </a:extLst>
+          </a:blip>
+          <a:stretch>
+            <a:fillRect/>
+          </a:stretch>
+        </p:blipFill>
+        <p:spPr>
+          <a:xfrm>
+            <a:off x="406400" y="5827395"/>
+            <a:ext cx="1954059" cy="487304"/>
+          </a:xfrm>
+          <a:prstGeom prst="rect">
+            <a:avLst/>
+          </a:prstGeom>
+        </p:spPr>
+      </p:pic>
+    </p:spTree>
+    <p:extLst>
+      <p:ext uri="{BB962C8B-B14F-4D97-AF65-F5344CB8AC3E}">
+        <p14:creationId xmlns:p14="http://schemas.microsoft.com/office/powerpoint/2010/main" val="2039737453"/>
+      </p:ext>
+    </p:extLst>
+  </p:cSld>
+  <p:clrMapOvr>
+    <a:masterClrMapping/>
+  </p:clrMapOvr>
+  <p:extLst>
+    <p:ext uri="{DCECCB84-F9BA-43D5-87BE-67443E8EF086}">
+      <p15:sldGuideLst xmlns:p15="http://schemas.microsoft.com/office/powerpoint/2012/main">
+        <p15:guide id="1" orient="horz" pos="2160">
+          <p15:clr>
+            <a:srgbClr val="FBAE40"/>
+          </p15:clr>
+        </p15:guide>
+        <p15:guide id="2" pos="3840">
+          <p15:clr>
+            <a:srgbClr val="FBAE40"/>
+          </p15:clr>
+        </p15:guide>
+      </p15:sldGuideLst>
+    </p:ext>
+  </p:extLst>
+</p:sldLayout>
+</file>
+
+<file path=ppt/slideLayouts/slideLayout17.xml><?xml version="1.0" encoding="utf-8"?>
+<p:sldLayout xmlns:a="http://schemas.openxmlformats.org/drawingml/2006/main" xmlns:r="http://schemas.openxmlformats.org/officeDocument/2006/relationships" xmlns:p="http://schemas.openxmlformats.org/presentationml/2006/main" preserve="1">
+  <p:cSld name="2_Title and Content">
+    <p:bg>
+      <p:bgPr>
+        <a:solidFill>
+          <a:srgbClr val="FAFAFA"/>
+        </a:solidFill>
+        <a:effectLst/>
+      </p:bgPr>
+    </p:bg>
+    <p:spTree>
+      <p:nvGrpSpPr>
+        <p:cNvPr id="1" name=""/>
+        <p:cNvGrpSpPr/>
+        <p:nvPr/>
+      </p:nvGrpSpPr>
+      <p:grpSpPr>
+        <a:xfrm>
+          <a:off x="0" y="0"/>
+          <a:ext cx="0" cy="0"/>
+          <a:chOff x="0" y="0"/>
+          <a:chExt cx="0" cy="0"/>
+        </a:xfrm>
+      </p:grpSpPr>
+      <p:sp>
+        <p:nvSpPr>
+          <p:cNvPr id="14" name="2. Title Placeholder">
+            <a:extLst>
+              <a:ext uri="{FF2B5EF4-FFF2-40B4-BE49-F238E27FC236}">
+                <a16:creationId xmlns:a16="http://schemas.microsoft.com/office/drawing/2014/main" id="{6D2C9649-E817-6113-49C1-5EBD81E09935}"/>
+              </a:ext>
+            </a:extLst>
+          </p:cNvPr>
+          <p:cNvSpPr>
+            <a:spLocks noGrp="1"/>
+          </p:cNvSpPr>
+          <p:nvPr>
+            <p:ph type="title" hasCustomPrompt="1"/>
+          </p:nvPr>
+        </p:nvSpPr>
+        <p:spPr>
+          <a:xfrm>
+            <a:off x="502920" y="437430"/>
+            <a:ext cx="9921240" cy="478155"/>
+          </a:xfrm>
+          <a:prstGeom prst="rect">
+            <a:avLst/>
+          </a:prstGeom>
+        </p:spPr>
+        <p:txBody>
+          <a:bodyPr vert="horz" lIns="91440" tIns="45720" rIns="91440" bIns="45720" rtlCol="0" anchor="ctr">
+            <a:noAutofit/>
+          </a:bodyPr>
+          <a:lstStyle>
+            <a:lvl1pPr>
+              <a:defRPr>
+                <a:solidFill>
+                  <a:srgbClr val="1B1B1B"/>
+                </a:solidFill>
+              </a:defRPr>
+            </a:lvl1pPr>
+          </a:lstStyle>
+          <a:p>
+            <a:r>
+              <a:rPr lang="en-GB" dirty="0"/>
+              <a:t>Insert headline here.</a:t>
+            </a:r>
+            <a:endParaRPr lang="en-US" dirty="0"/>
+          </a:p>
+        </p:txBody>
+      </p:sp>
+      <p:sp>
+        <p:nvSpPr>
+          <p:cNvPr id="9" name="3. Content Placeholder">
+            <a:extLst>
+              <a:ext uri="{FF2B5EF4-FFF2-40B4-BE49-F238E27FC236}">
+                <a16:creationId xmlns:a16="http://schemas.microsoft.com/office/drawing/2014/main" id="{B5A082DC-9190-CE12-A89B-DEAF24BD59FB}"/>
+              </a:ext>
+            </a:extLst>
+          </p:cNvPr>
+          <p:cNvSpPr>
+            <a:spLocks noGrp="1"/>
+          </p:cNvSpPr>
+          <p:nvPr>
+            <p:ph sz="half" idx="1"/>
+          </p:nvPr>
+        </p:nvSpPr>
+        <p:spPr>
+          <a:xfrm>
+            <a:off x="502920" y="1310641"/>
+            <a:ext cx="10515600" cy="4378960"/>
+          </a:xfrm>
+          <a:prstGeom prst="rect">
+            <a:avLst/>
+          </a:prstGeom>
+        </p:spPr>
+        <p:txBody>
+          <a:bodyPr/>
+          <a:lstStyle>
+            <a:lvl1pPr>
+              <a:defRPr>
+                <a:solidFill>
+                  <a:srgbClr val="1B1B1B"/>
+                </a:solidFill>
+              </a:defRPr>
+            </a:lvl1pPr>
+            <a:lvl2pPr>
+              <a:defRPr>
+                <a:solidFill>
+                  <a:srgbClr val="1B1B1B"/>
+                </a:solidFill>
+              </a:defRPr>
+            </a:lvl2pPr>
+            <a:lvl3pPr>
+              <a:defRPr>
+                <a:solidFill>
+                  <a:srgbClr val="1B1B1B"/>
+                </a:solidFill>
+              </a:defRPr>
+            </a:lvl3pPr>
+            <a:lvl4pPr>
+              <a:defRPr>
+                <a:solidFill>
+                  <a:srgbClr val="1B1B1B"/>
+                </a:solidFill>
+              </a:defRPr>
+            </a:lvl4pPr>
+            <a:lvl5pPr>
+              <a:defRPr>
+                <a:solidFill>
+                  <a:srgbClr val="1B1B1B"/>
+                </a:solidFill>
+              </a:defRPr>
+            </a:lvl5pPr>
+          </a:lstStyle>
+          <a:p>
+            <a:pPr lvl="0"/>
+            <a:r>
+              <a:rPr lang="en-GB"/>
+              <a:t>Click to edit Master text styles</a:t>
+            </a:r>
+          </a:p>
+          <a:p>
+            <a:pPr lvl="1"/>
+            <a:r>
+              <a:rPr lang="en-GB"/>
+              <a:t>Second level</a:t>
+            </a:r>
+          </a:p>
+          <a:p>
+            <a:pPr lvl="2"/>
+            <a:r>
+              <a:rPr lang="en-GB"/>
+              <a:t>Third level</a:t>
+            </a:r>
+          </a:p>
+          <a:p>
+            <a:pPr lvl="3"/>
+            <a:r>
+              <a:rPr lang="en-GB"/>
+              <a:t>Fourth level</a:t>
+            </a:r>
+          </a:p>
+          <a:p>
+            <a:pPr lvl="4"/>
+            <a:r>
+              <a:rPr lang="en-GB"/>
+              <a:t>Fifth level</a:t>
+            </a:r>
+            <a:endParaRPr lang="en-US" dirty="0"/>
+          </a:p>
+        </p:txBody>
+      </p:sp>
+      <p:pic>
+        <p:nvPicPr>
+          <p:cNvPr id="4" name="Picture 3" descr="A black background with a black square&#10;&#10;Description automatically generated with medium confidence">
+            <a:extLst>
+              <a:ext uri="{FF2B5EF4-FFF2-40B4-BE49-F238E27FC236}">
+                <a16:creationId xmlns:a16="http://schemas.microsoft.com/office/drawing/2014/main" id="{96DC3F04-8BBA-0785-458A-2A7116D5CC5D}"/>
+              </a:ext>
+            </a:extLst>
+          </p:cNvPr>
+          <p:cNvPicPr>
+            <a:picLocks noChangeAspect="1"/>
+          </p:cNvPicPr>
+          <p:nvPr/>
+        </p:nvPicPr>
+        <p:blipFill>
+          <a:blip r:embed="rId2" cstate="hqprint">
+            <a:extLst>
+              <a:ext uri="{28A0092B-C50C-407E-A947-70E740481C1C}">
+                <a14:useLocalDpi xmlns:a14="http://schemas.microsoft.com/office/drawing/2010/main"/>
+              </a:ext>
+            </a:extLst>
+          </a:blip>
+          <a:stretch>
+            <a:fillRect/>
+          </a:stretch>
+        </p:blipFill>
+        <p:spPr>
+          <a:xfrm>
+            <a:off x="9735021" y="5827395"/>
+            <a:ext cx="1954059" cy="487304"/>
+          </a:xfrm>
+          <a:prstGeom prst="rect">
+            <a:avLst/>
+          </a:prstGeom>
+        </p:spPr>
+      </p:pic>
+    </p:spTree>
+    <p:extLst>
+      <p:ext uri="{BB962C8B-B14F-4D97-AF65-F5344CB8AC3E}">
+        <p14:creationId xmlns:p14="http://schemas.microsoft.com/office/powerpoint/2010/main" val="3874227824"/>
+      </p:ext>
+    </p:extLst>
+  </p:cSld>
+  <p:clrMapOvr>
+    <a:masterClrMapping/>
+  </p:clrMapOvr>
+</p:sldLayout>
+</file>
+
+<file path=ppt/slideLayouts/slideLayout18.xml><?xml version="1.0" encoding="utf-8"?>
+<p:sldLayout xmlns:a="http://schemas.openxmlformats.org/drawingml/2006/main" xmlns:r="http://schemas.openxmlformats.org/officeDocument/2006/relationships" xmlns:p="http://schemas.openxmlformats.org/presentationml/2006/main" preserve="1">
+  <p:cSld name="1_Two Content">
+    <p:bg>
+      <p:bgPr>
+        <a:solidFill>
+          <a:srgbClr val="FAFAFA"/>
+        </a:solidFill>
+        <a:effectLst/>
+      </p:bgPr>
+    </p:bg>
+    <p:spTree>
+      <p:nvGrpSpPr>
+        <p:cNvPr id="1" name=""/>
+        <p:cNvGrpSpPr/>
+        <p:nvPr/>
+      </p:nvGrpSpPr>
+      <p:grpSpPr>
+        <a:xfrm>
+          <a:off x="0" y="0"/>
+          <a:ext cx="0" cy="0"/>
+          <a:chOff x="0" y="0"/>
+          <a:chExt cx="0" cy="0"/>
+        </a:xfrm>
+      </p:grpSpPr>
+      <p:sp>
+        <p:nvSpPr>
+          <p:cNvPr id="14" name="2. Title Placeholder">
+            <a:extLst>
+              <a:ext uri="{FF2B5EF4-FFF2-40B4-BE49-F238E27FC236}">
+                <a16:creationId xmlns:a16="http://schemas.microsoft.com/office/drawing/2014/main" id="{8053EF19-8D24-481D-0BDA-F79A2035DF33}"/>
+              </a:ext>
+            </a:extLst>
+          </p:cNvPr>
+          <p:cNvSpPr>
+            <a:spLocks noGrp="1"/>
+          </p:cNvSpPr>
+          <p:nvPr>
+            <p:ph type="title" hasCustomPrompt="1"/>
+          </p:nvPr>
+        </p:nvSpPr>
+        <p:spPr>
+          <a:xfrm>
+            <a:off x="502920" y="437430"/>
+            <a:ext cx="9921240" cy="478155"/>
+          </a:xfrm>
+          <a:prstGeom prst="rect">
+            <a:avLst/>
+          </a:prstGeom>
+        </p:spPr>
+        <p:txBody>
+          <a:bodyPr vert="horz" lIns="91440" tIns="45720" rIns="91440" bIns="45720" rtlCol="0" anchor="ctr">
+            <a:noAutofit/>
+          </a:bodyPr>
+          <a:lstStyle>
+            <a:lvl1pPr>
+              <a:defRPr>
+                <a:solidFill>
+                  <a:srgbClr val="1B1B1B"/>
+                </a:solidFill>
+              </a:defRPr>
+            </a:lvl1pPr>
+          </a:lstStyle>
+          <a:p>
+            <a:r>
+              <a:rPr lang="en-GB" dirty="0"/>
+              <a:t>Insert headline here.</a:t>
+            </a:r>
+            <a:endParaRPr lang="en-US" dirty="0"/>
+          </a:p>
+        </p:txBody>
+      </p:sp>
+      <p:sp>
+        <p:nvSpPr>
+          <p:cNvPr id="17" name="3. Content Placeholder (1)">
+            <a:extLst>
+              <a:ext uri="{FF2B5EF4-FFF2-40B4-BE49-F238E27FC236}">
+                <a16:creationId xmlns:a16="http://schemas.microsoft.com/office/drawing/2014/main" id="{11254375-EF80-738D-E998-C0B2F39CB8FE}"/>
+              </a:ext>
+            </a:extLst>
+          </p:cNvPr>
+          <p:cNvSpPr>
+            <a:spLocks noGrp="1"/>
+          </p:cNvSpPr>
+          <p:nvPr>
+            <p:ph sz="half" idx="1"/>
+          </p:nvPr>
+        </p:nvSpPr>
+        <p:spPr>
+          <a:xfrm>
+            <a:off x="502920" y="1310641"/>
+            <a:ext cx="5181600" cy="4378959"/>
+          </a:xfrm>
+          <a:prstGeom prst="rect">
+            <a:avLst/>
+          </a:prstGeom>
+        </p:spPr>
+        <p:txBody>
+          <a:bodyPr/>
+          <a:lstStyle>
+            <a:lvl1pPr>
+              <a:defRPr>
+                <a:solidFill>
+                  <a:srgbClr val="1B1B1B"/>
+                </a:solidFill>
+              </a:defRPr>
+            </a:lvl1pPr>
+            <a:lvl2pPr>
+              <a:defRPr>
+                <a:solidFill>
+                  <a:srgbClr val="1B1B1B"/>
+                </a:solidFill>
+              </a:defRPr>
+            </a:lvl2pPr>
+            <a:lvl3pPr>
+              <a:defRPr>
+                <a:solidFill>
+                  <a:srgbClr val="1B1B1B"/>
+                </a:solidFill>
+              </a:defRPr>
+            </a:lvl3pPr>
+            <a:lvl4pPr>
+              <a:defRPr>
+                <a:solidFill>
+                  <a:srgbClr val="1B1B1B"/>
+                </a:solidFill>
+              </a:defRPr>
+            </a:lvl4pPr>
+            <a:lvl5pPr>
+              <a:defRPr>
+                <a:solidFill>
+                  <a:srgbClr val="1B1B1B"/>
+                </a:solidFill>
+              </a:defRPr>
+            </a:lvl5pPr>
+          </a:lstStyle>
+          <a:p>
+            <a:pPr lvl="0"/>
+            <a:r>
+              <a:rPr lang="en-GB"/>
+              <a:t>Click to edit Master text styles</a:t>
+            </a:r>
+          </a:p>
+          <a:p>
+            <a:pPr lvl="1"/>
+            <a:r>
+              <a:rPr lang="en-GB"/>
+              <a:t>Second level</a:t>
+            </a:r>
+          </a:p>
+          <a:p>
+            <a:pPr lvl="2"/>
+            <a:r>
+              <a:rPr lang="en-GB"/>
+              <a:t>Third level</a:t>
+            </a:r>
+          </a:p>
+          <a:p>
+            <a:pPr lvl="3"/>
+            <a:r>
+              <a:rPr lang="en-GB"/>
+              <a:t>Fourth level</a:t>
+            </a:r>
+          </a:p>
+          <a:p>
+            <a:pPr lvl="4"/>
+            <a:r>
+              <a:rPr lang="en-GB"/>
+              <a:t>Fifth level</a:t>
+            </a:r>
+            <a:endParaRPr lang="en-US" dirty="0"/>
+          </a:p>
+        </p:txBody>
+      </p:sp>
+      <p:sp>
+        <p:nvSpPr>
+          <p:cNvPr id="18" name="4. Content Placeholder (2)">
+            <a:extLst>
+              <a:ext uri="{FF2B5EF4-FFF2-40B4-BE49-F238E27FC236}">
+                <a16:creationId xmlns:a16="http://schemas.microsoft.com/office/drawing/2014/main" id="{084CCB2F-26F1-E1B8-5561-263F115EB15F}"/>
+              </a:ext>
+            </a:extLst>
+          </p:cNvPr>
+          <p:cNvSpPr>
+            <a:spLocks noGrp="1"/>
+          </p:cNvSpPr>
+          <p:nvPr>
+            <p:ph sz="half" idx="2"/>
+          </p:nvPr>
+        </p:nvSpPr>
+        <p:spPr>
+          <a:xfrm>
+            <a:off x="5836920" y="1310641"/>
+            <a:ext cx="5181600" cy="4378959"/>
+          </a:xfrm>
+          <a:prstGeom prst="rect">
+            <a:avLst/>
+          </a:prstGeom>
+        </p:spPr>
+        <p:txBody>
+          <a:bodyPr/>
+          <a:lstStyle>
+            <a:lvl1pPr>
+              <a:defRPr>
+                <a:solidFill>
+                  <a:srgbClr val="1B1B1B"/>
+                </a:solidFill>
+              </a:defRPr>
+            </a:lvl1pPr>
+            <a:lvl2pPr>
+              <a:defRPr>
+                <a:solidFill>
+                  <a:srgbClr val="1B1B1B"/>
+                </a:solidFill>
+              </a:defRPr>
+            </a:lvl2pPr>
+            <a:lvl3pPr>
+              <a:defRPr>
+                <a:solidFill>
+                  <a:srgbClr val="1B1B1B"/>
+                </a:solidFill>
+              </a:defRPr>
+            </a:lvl3pPr>
+            <a:lvl4pPr>
+              <a:defRPr>
+                <a:solidFill>
+                  <a:srgbClr val="1B1B1B"/>
+                </a:solidFill>
+              </a:defRPr>
+            </a:lvl4pPr>
+            <a:lvl5pPr>
+              <a:defRPr>
+                <a:solidFill>
+                  <a:srgbClr val="1B1B1B"/>
+                </a:solidFill>
+              </a:defRPr>
+            </a:lvl5pPr>
+          </a:lstStyle>
+          <a:p>
+            <a:pPr lvl="0"/>
+            <a:r>
+              <a:rPr lang="en-GB"/>
+              <a:t>Click to edit Master text styles</a:t>
+            </a:r>
+          </a:p>
+          <a:p>
+            <a:pPr lvl="1"/>
+            <a:r>
+              <a:rPr lang="en-GB"/>
+              <a:t>Second level</a:t>
+            </a:r>
+          </a:p>
+          <a:p>
+            <a:pPr lvl="2"/>
+            <a:r>
+              <a:rPr lang="en-GB"/>
+              <a:t>Third level</a:t>
+            </a:r>
+          </a:p>
+          <a:p>
+            <a:pPr lvl="3"/>
+            <a:r>
+              <a:rPr lang="en-GB"/>
+              <a:t>Fourth level</a:t>
+            </a:r>
+          </a:p>
+          <a:p>
+            <a:pPr lvl="4"/>
+            <a:r>
+              <a:rPr lang="en-GB"/>
+              <a:t>Fifth level</a:t>
+            </a:r>
+            <a:endParaRPr lang="en-US" dirty="0"/>
+          </a:p>
+        </p:txBody>
+      </p:sp>
+      <p:pic>
+        <p:nvPicPr>
+          <p:cNvPr id="3" name="Picture 2" descr="A black background with a black square&#10;&#10;Description automatically generated with medium confidence">
+            <a:extLst>
+              <a:ext uri="{FF2B5EF4-FFF2-40B4-BE49-F238E27FC236}">
+                <a16:creationId xmlns:a16="http://schemas.microsoft.com/office/drawing/2014/main" id="{A517CE37-381F-3FD9-96CB-F3D35B32BD50}"/>
+              </a:ext>
+            </a:extLst>
+          </p:cNvPr>
+          <p:cNvPicPr>
+            <a:picLocks noChangeAspect="1"/>
+          </p:cNvPicPr>
+          <p:nvPr/>
+        </p:nvPicPr>
+        <p:blipFill>
+          <a:blip r:embed="rId2" cstate="hqprint">
+            <a:extLst>
+              <a:ext uri="{28A0092B-C50C-407E-A947-70E740481C1C}">
+                <a14:useLocalDpi xmlns:a14="http://schemas.microsoft.com/office/drawing/2010/main"/>
+              </a:ext>
+            </a:extLst>
+          </a:blip>
+          <a:stretch>
+            <a:fillRect/>
+          </a:stretch>
+        </p:blipFill>
+        <p:spPr>
+          <a:xfrm>
+            <a:off x="406400" y="5827395"/>
+            <a:ext cx="1954059" cy="487304"/>
+          </a:xfrm>
+          <a:prstGeom prst="rect">
+            <a:avLst/>
+          </a:prstGeom>
+        </p:spPr>
+      </p:pic>
+    </p:spTree>
+    <p:extLst>
+      <p:ext uri="{BB962C8B-B14F-4D97-AF65-F5344CB8AC3E}">
+        <p14:creationId xmlns:p14="http://schemas.microsoft.com/office/powerpoint/2010/main" val="1117967701"/>
+      </p:ext>
+    </p:extLst>
+  </p:cSld>
+  <p:clrMapOvr>
+    <a:masterClrMapping/>
+  </p:clrMapOvr>
+</p:sldLayout>
+</file>
+
+<file path=ppt/slideLayouts/slideLayout19.xml><?xml version="1.0" encoding="utf-8"?>
+<p:sldLayout xmlns:a="http://schemas.openxmlformats.org/drawingml/2006/main" xmlns:r="http://schemas.openxmlformats.org/officeDocument/2006/relationships" xmlns:p="http://schemas.openxmlformats.org/presentationml/2006/main" preserve="1">
+  <p:cSld name="2_Two Content">
+    <p:bg>
+      <p:bgPr>
+        <a:solidFill>
+          <a:srgbClr val="FAFAFA"/>
+        </a:solidFill>
+        <a:effectLst/>
+      </p:bgPr>
+    </p:bg>
+    <p:spTree>
+      <p:nvGrpSpPr>
+        <p:cNvPr id="1" name=""/>
+        <p:cNvGrpSpPr/>
+        <p:nvPr/>
+      </p:nvGrpSpPr>
+      <p:grpSpPr>
+        <a:xfrm>
+          <a:off x="0" y="0"/>
+          <a:ext cx="0" cy="0"/>
+          <a:chOff x="0" y="0"/>
+          <a:chExt cx="0" cy="0"/>
+        </a:xfrm>
+      </p:grpSpPr>
+      <p:sp>
+        <p:nvSpPr>
+          <p:cNvPr id="14" name="2. Title Placeholder">
+            <a:extLst>
+              <a:ext uri="{FF2B5EF4-FFF2-40B4-BE49-F238E27FC236}">
+                <a16:creationId xmlns:a16="http://schemas.microsoft.com/office/drawing/2014/main" id="{8053EF19-8D24-481D-0BDA-F79A2035DF33}"/>
+              </a:ext>
+            </a:extLst>
+          </p:cNvPr>
+          <p:cNvSpPr>
+            <a:spLocks noGrp="1"/>
+          </p:cNvSpPr>
+          <p:nvPr>
+            <p:ph type="title" hasCustomPrompt="1"/>
+          </p:nvPr>
+        </p:nvSpPr>
+        <p:spPr>
+          <a:xfrm>
+            <a:off x="502920" y="437430"/>
+            <a:ext cx="9921240" cy="478155"/>
+          </a:xfrm>
+          <a:prstGeom prst="rect">
+            <a:avLst/>
+          </a:prstGeom>
+        </p:spPr>
+        <p:txBody>
+          <a:bodyPr vert="horz" lIns="91440" tIns="45720" rIns="91440" bIns="45720" rtlCol="0" anchor="ctr">
+            <a:noAutofit/>
+          </a:bodyPr>
+          <a:lstStyle>
+            <a:lvl1pPr>
+              <a:defRPr>
+                <a:solidFill>
+                  <a:srgbClr val="1B1B1B"/>
+                </a:solidFill>
+              </a:defRPr>
+            </a:lvl1pPr>
+          </a:lstStyle>
+          <a:p>
+            <a:r>
+              <a:rPr lang="en-GB" dirty="0"/>
+              <a:t>Insert headline here.</a:t>
+            </a:r>
+            <a:endParaRPr lang="en-US" dirty="0"/>
+          </a:p>
+        </p:txBody>
+      </p:sp>
+      <p:sp>
+        <p:nvSpPr>
+          <p:cNvPr id="17" name="3. Content Placeholder (1)">
+            <a:extLst>
+              <a:ext uri="{FF2B5EF4-FFF2-40B4-BE49-F238E27FC236}">
+                <a16:creationId xmlns:a16="http://schemas.microsoft.com/office/drawing/2014/main" id="{11254375-EF80-738D-E998-C0B2F39CB8FE}"/>
+              </a:ext>
+            </a:extLst>
+          </p:cNvPr>
+          <p:cNvSpPr>
+            <a:spLocks noGrp="1"/>
+          </p:cNvSpPr>
+          <p:nvPr>
+            <p:ph sz="half" idx="1"/>
+          </p:nvPr>
+        </p:nvSpPr>
+        <p:spPr>
+          <a:xfrm>
+            <a:off x="502920" y="1310641"/>
+            <a:ext cx="5181600" cy="4378959"/>
+          </a:xfrm>
+          <a:prstGeom prst="rect">
+            <a:avLst/>
+          </a:prstGeom>
+        </p:spPr>
+        <p:txBody>
+          <a:bodyPr/>
+          <a:lstStyle>
+            <a:lvl1pPr>
+              <a:defRPr>
+                <a:solidFill>
+                  <a:srgbClr val="1B1B1B"/>
+                </a:solidFill>
+              </a:defRPr>
+            </a:lvl1pPr>
+            <a:lvl2pPr>
+              <a:defRPr>
+                <a:solidFill>
+                  <a:srgbClr val="1B1B1B"/>
+                </a:solidFill>
+              </a:defRPr>
+            </a:lvl2pPr>
+            <a:lvl3pPr>
+              <a:defRPr>
+                <a:solidFill>
+                  <a:srgbClr val="1B1B1B"/>
+                </a:solidFill>
+              </a:defRPr>
+            </a:lvl3pPr>
+            <a:lvl4pPr>
+              <a:defRPr>
+                <a:solidFill>
+                  <a:srgbClr val="1B1B1B"/>
+                </a:solidFill>
+              </a:defRPr>
+            </a:lvl4pPr>
+            <a:lvl5pPr>
+              <a:defRPr>
+                <a:solidFill>
+                  <a:srgbClr val="1B1B1B"/>
+                </a:solidFill>
+              </a:defRPr>
+            </a:lvl5pPr>
+          </a:lstStyle>
+          <a:p>
+            <a:pPr lvl="0"/>
+            <a:r>
+              <a:rPr lang="en-GB"/>
+              <a:t>Click to edit Master text styles</a:t>
+            </a:r>
+          </a:p>
+          <a:p>
+            <a:pPr lvl="1"/>
+            <a:r>
+              <a:rPr lang="en-GB"/>
+              <a:t>Second level</a:t>
+            </a:r>
+          </a:p>
+          <a:p>
+            <a:pPr lvl="2"/>
+            <a:r>
+              <a:rPr lang="en-GB"/>
+              <a:t>Third level</a:t>
+            </a:r>
+          </a:p>
+          <a:p>
+            <a:pPr lvl="3"/>
+            <a:r>
+              <a:rPr lang="en-GB"/>
+              <a:t>Fourth level</a:t>
+            </a:r>
+          </a:p>
+          <a:p>
+            <a:pPr lvl="4"/>
+            <a:r>
+              <a:rPr lang="en-GB"/>
+              <a:t>Fifth level</a:t>
+            </a:r>
+            <a:endParaRPr lang="en-US" dirty="0"/>
+          </a:p>
+        </p:txBody>
+      </p:sp>
+      <p:sp>
+        <p:nvSpPr>
+          <p:cNvPr id="18" name="4. Content Placeholder (2)">
+            <a:extLst>
+              <a:ext uri="{FF2B5EF4-FFF2-40B4-BE49-F238E27FC236}">
+                <a16:creationId xmlns:a16="http://schemas.microsoft.com/office/drawing/2014/main" id="{084CCB2F-26F1-E1B8-5561-263F115EB15F}"/>
+              </a:ext>
+            </a:extLst>
+          </p:cNvPr>
+          <p:cNvSpPr>
+            <a:spLocks noGrp="1"/>
+          </p:cNvSpPr>
+          <p:nvPr>
+            <p:ph sz="half" idx="2"/>
+          </p:nvPr>
+        </p:nvSpPr>
+        <p:spPr>
+          <a:xfrm>
+            <a:off x="5836920" y="1310641"/>
+            <a:ext cx="5181600" cy="4378959"/>
+          </a:xfrm>
+          <a:prstGeom prst="rect">
+            <a:avLst/>
+          </a:prstGeom>
+        </p:spPr>
+        <p:txBody>
+          <a:bodyPr/>
+          <a:lstStyle>
+            <a:lvl1pPr>
+              <a:defRPr>
+                <a:solidFill>
+                  <a:srgbClr val="1B1B1B"/>
+                </a:solidFill>
+              </a:defRPr>
+            </a:lvl1pPr>
+            <a:lvl2pPr>
+              <a:defRPr>
+                <a:solidFill>
+                  <a:srgbClr val="1B1B1B"/>
+                </a:solidFill>
+              </a:defRPr>
+            </a:lvl2pPr>
+            <a:lvl3pPr>
+              <a:defRPr>
+                <a:solidFill>
+                  <a:srgbClr val="1B1B1B"/>
+                </a:solidFill>
+              </a:defRPr>
+            </a:lvl3pPr>
+            <a:lvl4pPr>
+              <a:defRPr>
+                <a:solidFill>
+                  <a:srgbClr val="1B1B1B"/>
+                </a:solidFill>
+              </a:defRPr>
+            </a:lvl4pPr>
+            <a:lvl5pPr>
+              <a:defRPr>
+                <a:solidFill>
+                  <a:srgbClr val="1B1B1B"/>
+                </a:solidFill>
+              </a:defRPr>
+            </a:lvl5pPr>
+          </a:lstStyle>
+          <a:p>
+            <a:pPr lvl="0"/>
+            <a:r>
+              <a:rPr lang="en-GB"/>
+              <a:t>Click to edit Master text styles</a:t>
+            </a:r>
+          </a:p>
+          <a:p>
+            <a:pPr lvl="1"/>
+            <a:r>
+              <a:rPr lang="en-GB"/>
+              <a:t>Second level</a:t>
+            </a:r>
+          </a:p>
+          <a:p>
+            <a:pPr lvl="2"/>
+            <a:r>
+              <a:rPr lang="en-GB"/>
+              <a:t>Third level</a:t>
+            </a:r>
+          </a:p>
+          <a:p>
+            <a:pPr lvl="3"/>
+            <a:r>
+              <a:rPr lang="en-GB"/>
+              <a:t>Fourth level</a:t>
+            </a:r>
+          </a:p>
+          <a:p>
+            <a:pPr lvl="4"/>
+            <a:r>
+              <a:rPr lang="en-GB"/>
+              <a:t>Fifth level</a:t>
+            </a:r>
+            <a:endParaRPr lang="en-US" dirty="0"/>
+          </a:p>
+        </p:txBody>
+      </p:sp>
+      <p:pic>
+        <p:nvPicPr>
+          <p:cNvPr id="7" name="Picture 6" descr="A black background with a black square&#10;&#10;Description automatically generated with medium confidence">
+            <a:extLst>
+              <a:ext uri="{FF2B5EF4-FFF2-40B4-BE49-F238E27FC236}">
+                <a16:creationId xmlns:a16="http://schemas.microsoft.com/office/drawing/2014/main" id="{25A08B27-4FCD-D887-21E3-71B416AADE54}"/>
+              </a:ext>
+            </a:extLst>
+          </p:cNvPr>
+          <p:cNvPicPr>
+            <a:picLocks noChangeAspect="1"/>
+          </p:cNvPicPr>
+          <p:nvPr/>
+        </p:nvPicPr>
+        <p:blipFill>
+          <a:blip r:embed="rId2" cstate="hqprint">
+            <a:extLst>
+              <a:ext uri="{28A0092B-C50C-407E-A947-70E740481C1C}">
+                <a14:useLocalDpi xmlns:a14="http://schemas.microsoft.com/office/drawing/2010/main"/>
+              </a:ext>
+            </a:extLst>
+          </a:blip>
+          <a:stretch>
+            <a:fillRect/>
+          </a:stretch>
+        </p:blipFill>
+        <p:spPr>
+          <a:xfrm>
+            <a:off x="9735021" y="5827395"/>
+            <a:ext cx="1954059" cy="487304"/>
+          </a:xfrm>
+          <a:prstGeom prst="rect">
+            <a:avLst/>
+          </a:prstGeom>
+        </p:spPr>
+      </p:pic>
+    </p:spTree>
+    <p:extLst>
+      <p:ext uri="{BB962C8B-B14F-4D97-AF65-F5344CB8AC3E}">
+        <p14:creationId xmlns:p14="http://schemas.microsoft.com/office/powerpoint/2010/main" val="662556597"/>
       </p:ext>
     </p:extLst>
   </p:cSld>
@@ -1122,7 +3548,7 @@
           <a:p>
             <a:fld id="{CEEBFD85-82E7-47E4-885E-AE80971B230E}" type="datetimeFigureOut">
               <a:rPr lang="en-GB" smtClean="0"/>
-              <a:t>29/01/2026</a:t>
+              <a:t>03/03/2026</a:t>
             </a:fld>
             <a:endParaRPr lang="en-GB"/>
           </a:p>
@@ -1186,6 +3612,2608 @@
     <p:extLst>
       <p:ext uri="{BB962C8B-B14F-4D97-AF65-F5344CB8AC3E}">
         <p14:creationId xmlns:p14="http://schemas.microsoft.com/office/powerpoint/2010/main" val="3416598674"/>
+      </p:ext>
+    </p:extLst>
+  </p:cSld>
+  <p:clrMapOvr>
+    <a:masterClrMapping/>
+  </p:clrMapOvr>
+</p:sldLayout>
+</file>
+
+<file path=ppt/slideLayouts/slideLayout20.xml><?xml version="1.0" encoding="utf-8"?>
+<p:sldLayout xmlns:a="http://schemas.openxmlformats.org/drawingml/2006/main" xmlns:r="http://schemas.openxmlformats.org/officeDocument/2006/relationships" xmlns:p="http://schemas.openxmlformats.org/presentationml/2006/main" preserve="1">
+  <p:cSld name="3_Two Content">
+    <p:bg>
+      <p:bgPr>
+        <a:solidFill>
+          <a:srgbClr val="FAFAFA"/>
+        </a:solidFill>
+        <a:effectLst/>
+      </p:bgPr>
+    </p:bg>
+    <p:spTree>
+      <p:nvGrpSpPr>
+        <p:cNvPr id="1" name=""/>
+        <p:cNvGrpSpPr/>
+        <p:nvPr/>
+      </p:nvGrpSpPr>
+      <p:grpSpPr>
+        <a:xfrm>
+          <a:off x="0" y="0"/>
+          <a:ext cx="0" cy="0"/>
+          <a:chOff x="0" y="0"/>
+          <a:chExt cx="0" cy="0"/>
+        </a:xfrm>
+      </p:grpSpPr>
+      <p:sp>
+        <p:nvSpPr>
+          <p:cNvPr id="14" name="2. Title Placeholder">
+            <a:extLst>
+              <a:ext uri="{FF2B5EF4-FFF2-40B4-BE49-F238E27FC236}">
+                <a16:creationId xmlns:a16="http://schemas.microsoft.com/office/drawing/2014/main" id="{8053EF19-8D24-481D-0BDA-F79A2035DF33}"/>
+              </a:ext>
+            </a:extLst>
+          </p:cNvPr>
+          <p:cNvSpPr>
+            <a:spLocks noGrp="1"/>
+          </p:cNvSpPr>
+          <p:nvPr>
+            <p:ph type="title" hasCustomPrompt="1"/>
+          </p:nvPr>
+        </p:nvSpPr>
+        <p:spPr>
+          <a:xfrm>
+            <a:off x="502920" y="437430"/>
+            <a:ext cx="9921240" cy="478155"/>
+          </a:xfrm>
+          <a:prstGeom prst="rect">
+            <a:avLst/>
+          </a:prstGeom>
+        </p:spPr>
+        <p:txBody>
+          <a:bodyPr vert="horz" lIns="91440" tIns="45720" rIns="91440" bIns="45720" rtlCol="0" anchor="ctr">
+            <a:noAutofit/>
+          </a:bodyPr>
+          <a:lstStyle>
+            <a:lvl1pPr>
+              <a:defRPr>
+                <a:solidFill>
+                  <a:srgbClr val="1B1B1B"/>
+                </a:solidFill>
+              </a:defRPr>
+            </a:lvl1pPr>
+          </a:lstStyle>
+          <a:p>
+            <a:r>
+              <a:rPr lang="en-GB" dirty="0"/>
+              <a:t>Insert headline here.</a:t>
+            </a:r>
+            <a:endParaRPr lang="en-US" dirty="0"/>
+          </a:p>
+        </p:txBody>
+      </p:sp>
+      <p:sp>
+        <p:nvSpPr>
+          <p:cNvPr id="3" name="3. Content Placeholder (1)">
+            <a:extLst>
+              <a:ext uri="{FF2B5EF4-FFF2-40B4-BE49-F238E27FC236}">
+                <a16:creationId xmlns:a16="http://schemas.microsoft.com/office/drawing/2014/main" id="{A162B99D-4A4D-B778-5FD2-9F4A22B0B3AA}"/>
+              </a:ext>
+            </a:extLst>
+          </p:cNvPr>
+          <p:cNvSpPr>
+            <a:spLocks noGrp="1"/>
+          </p:cNvSpPr>
+          <p:nvPr>
+            <p:ph sz="half" idx="14"/>
+          </p:nvPr>
+        </p:nvSpPr>
+        <p:spPr>
+          <a:xfrm>
+            <a:off x="968019" y="1636464"/>
+            <a:ext cx="2520000" cy="2520000"/>
+          </a:xfrm>
+          <a:prstGeom prst="rect">
+            <a:avLst/>
+          </a:prstGeom>
+        </p:spPr>
+        <p:txBody>
+          <a:bodyPr>
+            <a:normAutofit/>
+          </a:bodyPr>
+          <a:lstStyle>
+            <a:lvl1pPr>
+              <a:defRPr sz="1600">
+                <a:solidFill>
+                  <a:srgbClr val="1B1B1B"/>
+                </a:solidFill>
+              </a:defRPr>
+            </a:lvl1pPr>
+          </a:lstStyle>
+          <a:p>
+            <a:pPr lvl="0"/>
+            <a:r>
+              <a:rPr lang="en-GB"/>
+              <a:t>Click to edit Master text styles</a:t>
+            </a:r>
+          </a:p>
+        </p:txBody>
+      </p:sp>
+      <p:sp>
+        <p:nvSpPr>
+          <p:cNvPr id="15" name="4. Text Box Placeholder (1)">
+            <a:extLst>
+              <a:ext uri="{FF2B5EF4-FFF2-40B4-BE49-F238E27FC236}">
+                <a16:creationId xmlns:a16="http://schemas.microsoft.com/office/drawing/2014/main" id="{6D6CB8B4-9C8E-A2FA-558C-30A5D0827004}"/>
+              </a:ext>
+            </a:extLst>
+          </p:cNvPr>
+          <p:cNvSpPr>
+            <a:spLocks noGrp="1"/>
+          </p:cNvSpPr>
+          <p:nvPr>
+            <p:ph type="body" sz="quarter" idx="20" hasCustomPrompt="1"/>
+          </p:nvPr>
+        </p:nvSpPr>
+        <p:spPr>
+          <a:xfrm>
+            <a:off x="967069" y="4351119"/>
+            <a:ext cx="2520950" cy="1014413"/>
+          </a:xfrm>
+        </p:spPr>
+        <p:txBody>
+          <a:bodyPr>
+            <a:noAutofit/>
+          </a:bodyPr>
+          <a:lstStyle>
+            <a:lvl1pPr>
+              <a:lnSpc>
+                <a:spcPct val="100000"/>
+              </a:lnSpc>
+              <a:defRPr sz="1400">
+                <a:solidFill>
+                  <a:srgbClr val="1B1B1B"/>
+                </a:solidFill>
+              </a:defRPr>
+            </a:lvl1pPr>
+          </a:lstStyle>
+          <a:p>
+            <a:r>
+              <a:rPr lang="en-GB" dirty="0"/>
+              <a:t>Insert sub copy here.</a:t>
+            </a:r>
+          </a:p>
+        </p:txBody>
+      </p:sp>
+      <p:sp>
+        <p:nvSpPr>
+          <p:cNvPr id="4" name="5. Content Placeholder (2)">
+            <a:extLst>
+              <a:ext uri="{FF2B5EF4-FFF2-40B4-BE49-F238E27FC236}">
+                <a16:creationId xmlns:a16="http://schemas.microsoft.com/office/drawing/2014/main" id="{A2B13861-080E-609A-01A7-5EDC25A0B0FF}"/>
+              </a:ext>
+            </a:extLst>
+          </p:cNvPr>
+          <p:cNvSpPr>
+            <a:spLocks noGrp="1"/>
+          </p:cNvSpPr>
+          <p:nvPr>
+            <p:ph sz="half" idx="15"/>
+          </p:nvPr>
+        </p:nvSpPr>
+        <p:spPr>
+          <a:xfrm>
+            <a:off x="4836000" y="1637090"/>
+            <a:ext cx="2520000" cy="2520000"/>
+          </a:xfrm>
+          <a:prstGeom prst="rect">
+            <a:avLst/>
+          </a:prstGeom>
+        </p:spPr>
+        <p:txBody>
+          <a:bodyPr>
+            <a:normAutofit/>
+          </a:bodyPr>
+          <a:lstStyle>
+            <a:lvl1pPr>
+              <a:defRPr sz="1600">
+                <a:solidFill>
+                  <a:srgbClr val="1B1B1B"/>
+                </a:solidFill>
+              </a:defRPr>
+            </a:lvl1pPr>
+          </a:lstStyle>
+          <a:p>
+            <a:pPr lvl="0"/>
+            <a:r>
+              <a:rPr lang="en-GB"/>
+              <a:t>Click to edit Master text styles</a:t>
+            </a:r>
+          </a:p>
+        </p:txBody>
+      </p:sp>
+      <p:sp>
+        <p:nvSpPr>
+          <p:cNvPr id="13" name="6. Text Box Placeholder (2)">
+            <a:extLst>
+              <a:ext uri="{FF2B5EF4-FFF2-40B4-BE49-F238E27FC236}">
+                <a16:creationId xmlns:a16="http://schemas.microsoft.com/office/drawing/2014/main" id="{005774E2-5CA0-1157-5F43-7B5C9996EFC0}"/>
+              </a:ext>
+            </a:extLst>
+          </p:cNvPr>
+          <p:cNvSpPr>
+            <a:spLocks noGrp="1"/>
+          </p:cNvSpPr>
+          <p:nvPr>
+            <p:ph type="body" sz="quarter" idx="19" hasCustomPrompt="1"/>
+          </p:nvPr>
+        </p:nvSpPr>
+        <p:spPr>
+          <a:xfrm>
+            <a:off x="4835525" y="4351119"/>
+            <a:ext cx="2520950" cy="1014413"/>
+          </a:xfrm>
+        </p:spPr>
+        <p:txBody>
+          <a:bodyPr>
+            <a:noAutofit/>
+          </a:bodyPr>
+          <a:lstStyle>
+            <a:lvl1pPr>
+              <a:lnSpc>
+                <a:spcPct val="100000"/>
+              </a:lnSpc>
+              <a:defRPr sz="1400">
+                <a:solidFill>
+                  <a:srgbClr val="1B1B1B"/>
+                </a:solidFill>
+              </a:defRPr>
+            </a:lvl1pPr>
+          </a:lstStyle>
+          <a:p>
+            <a:r>
+              <a:rPr lang="en-GB" dirty="0"/>
+              <a:t>Insert sub copy here.</a:t>
+            </a:r>
+          </a:p>
+        </p:txBody>
+      </p:sp>
+      <p:sp>
+        <p:nvSpPr>
+          <p:cNvPr id="9" name="7. Content Placeholder (3)">
+            <a:extLst>
+              <a:ext uri="{FF2B5EF4-FFF2-40B4-BE49-F238E27FC236}">
+                <a16:creationId xmlns:a16="http://schemas.microsoft.com/office/drawing/2014/main" id="{5565E762-8883-AB43-D811-12B759024A9D}"/>
+              </a:ext>
+            </a:extLst>
+          </p:cNvPr>
+          <p:cNvSpPr>
+            <a:spLocks noGrp="1"/>
+          </p:cNvSpPr>
+          <p:nvPr>
+            <p:ph sz="half" idx="16"/>
+          </p:nvPr>
+        </p:nvSpPr>
+        <p:spPr>
+          <a:xfrm>
+            <a:off x="8714257" y="1637090"/>
+            <a:ext cx="2520000" cy="2520000"/>
+          </a:xfrm>
+          <a:prstGeom prst="rect">
+            <a:avLst/>
+          </a:prstGeom>
+        </p:spPr>
+        <p:txBody>
+          <a:bodyPr>
+            <a:normAutofit/>
+          </a:bodyPr>
+          <a:lstStyle>
+            <a:lvl1pPr>
+              <a:defRPr sz="1600">
+                <a:solidFill>
+                  <a:srgbClr val="1B1B1B"/>
+                </a:solidFill>
+              </a:defRPr>
+            </a:lvl1pPr>
+          </a:lstStyle>
+          <a:p>
+            <a:pPr lvl="0"/>
+            <a:r>
+              <a:rPr lang="en-GB"/>
+              <a:t>Click to edit Master text styles</a:t>
+            </a:r>
+          </a:p>
+        </p:txBody>
+      </p:sp>
+      <p:sp>
+        <p:nvSpPr>
+          <p:cNvPr id="16" name="8. Text Box Placeholder (3)">
+            <a:extLst>
+              <a:ext uri="{FF2B5EF4-FFF2-40B4-BE49-F238E27FC236}">
+                <a16:creationId xmlns:a16="http://schemas.microsoft.com/office/drawing/2014/main" id="{D584B818-73B8-22FE-5635-36F576CEABCF}"/>
+              </a:ext>
+            </a:extLst>
+          </p:cNvPr>
+          <p:cNvSpPr>
+            <a:spLocks noGrp="1"/>
+          </p:cNvSpPr>
+          <p:nvPr>
+            <p:ph type="body" sz="quarter" idx="21" hasCustomPrompt="1"/>
+          </p:nvPr>
+        </p:nvSpPr>
+        <p:spPr>
+          <a:xfrm>
+            <a:off x="8713782" y="4400389"/>
+            <a:ext cx="2520475" cy="981075"/>
+          </a:xfrm>
+        </p:spPr>
+        <p:txBody>
+          <a:bodyPr>
+            <a:noAutofit/>
+          </a:bodyPr>
+          <a:lstStyle>
+            <a:lvl1pPr marL="0" indent="0">
+              <a:lnSpc>
+                <a:spcPct val="100000"/>
+              </a:lnSpc>
+              <a:buNone/>
+              <a:defRPr sz="1400">
+                <a:solidFill>
+                  <a:srgbClr val="1B1B1B"/>
+                </a:solidFill>
+              </a:defRPr>
+            </a:lvl1pPr>
+          </a:lstStyle>
+          <a:p>
+            <a:r>
+              <a:rPr lang="en-GB" dirty="0"/>
+              <a:t>Insert sub copy here.</a:t>
+            </a:r>
+          </a:p>
+        </p:txBody>
+      </p:sp>
+      <p:pic>
+        <p:nvPicPr>
+          <p:cNvPr id="5" name="Picture 4" descr="A black background with a black square&#10;&#10;Description automatically generated with medium confidence">
+            <a:extLst>
+              <a:ext uri="{FF2B5EF4-FFF2-40B4-BE49-F238E27FC236}">
+                <a16:creationId xmlns:a16="http://schemas.microsoft.com/office/drawing/2014/main" id="{36AC4827-D56E-785B-690B-73B8B175B654}"/>
+              </a:ext>
+            </a:extLst>
+          </p:cNvPr>
+          <p:cNvPicPr>
+            <a:picLocks noChangeAspect="1"/>
+          </p:cNvPicPr>
+          <p:nvPr/>
+        </p:nvPicPr>
+        <p:blipFill>
+          <a:blip r:embed="rId2" cstate="hqprint">
+            <a:extLst>
+              <a:ext uri="{28A0092B-C50C-407E-A947-70E740481C1C}">
+                <a14:useLocalDpi xmlns:a14="http://schemas.microsoft.com/office/drawing/2010/main"/>
+              </a:ext>
+            </a:extLst>
+          </a:blip>
+          <a:stretch>
+            <a:fillRect/>
+          </a:stretch>
+        </p:blipFill>
+        <p:spPr>
+          <a:xfrm>
+            <a:off x="406400" y="5827395"/>
+            <a:ext cx="1954059" cy="487304"/>
+          </a:xfrm>
+          <a:prstGeom prst="rect">
+            <a:avLst/>
+          </a:prstGeom>
+        </p:spPr>
+      </p:pic>
+    </p:spTree>
+    <p:extLst>
+      <p:ext uri="{BB962C8B-B14F-4D97-AF65-F5344CB8AC3E}">
+        <p14:creationId xmlns:p14="http://schemas.microsoft.com/office/powerpoint/2010/main" val="1946855131"/>
+      </p:ext>
+    </p:extLst>
+  </p:cSld>
+  <p:clrMapOvr>
+    <a:masterClrMapping/>
+  </p:clrMapOvr>
+  <p:extLst>
+    <p:ext uri="{DCECCB84-F9BA-43D5-87BE-67443E8EF086}">
+      <p15:sldGuideLst xmlns:p15="http://schemas.microsoft.com/office/powerpoint/2012/main">
+        <p15:guide id="1" orient="horz" pos="2160">
+          <p15:clr>
+            <a:srgbClr val="FBAE40"/>
+          </p15:clr>
+        </p15:guide>
+        <p15:guide id="2" pos="3840">
+          <p15:clr>
+            <a:srgbClr val="FBAE40"/>
+          </p15:clr>
+        </p15:guide>
+      </p15:sldGuideLst>
+    </p:ext>
+  </p:extLst>
+</p:sldLayout>
+</file>
+
+<file path=ppt/slideLayouts/slideLayout21.xml><?xml version="1.0" encoding="utf-8"?>
+<p:sldLayout xmlns:a="http://schemas.openxmlformats.org/drawingml/2006/main" xmlns:r="http://schemas.openxmlformats.org/officeDocument/2006/relationships" xmlns:p="http://schemas.openxmlformats.org/presentationml/2006/main" preserve="1" userDrawn="1">
+  <p:cSld name="2_Light Divider Slide - 3">
+    <p:bg>
+      <p:bgPr>
+        <a:solidFill>
+          <a:srgbClr val="F6F6F6"/>
+        </a:solidFill>
+        <a:effectLst/>
+      </p:bgPr>
+    </p:bg>
+    <p:spTree>
+      <p:nvGrpSpPr>
+        <p:cNvPr id="1" name=""/>
+        <p:cNvGrpSpPr/>
+        <p:nvPr/>
+      </p:nvGrpSpPr>
+      <p:grpSpPr>
+        <a:xfrm>
+          <a:off x="0" y="0"/>
+          <a:ext cx="0" cy="0"/>
+          <a:chOff x="0" y="0"/>
+          <a:chExt cx="0" cy="0"/>
+        </a:xfrm>
+      </p:grpSpPr>
+      <p:sp>
+        <p:nvSpPr>
+          <p:cNvPr id="24" name="Picture Placeholder 23">
+            <a:extLst>
+              <a:ext uri="{FF2B5EF4-FFF2-40B4-BE49-F238E27FC236}">
+                <a16:creationId xmlns:a16="http://schemas.microsoft.com/office/drawing/2014/main" id="{B9A254AA-18E4-9DAC-4282-5464EB9B859F}"/>
+              </a:ext>
+            </a:extLst>
+          </p:cNvPr>
+          <p:cNvSpPr>
+            <a:spLocks noGrp="1"/>
+          </p:cNvSpPr>
+          <p:nvPr>
+            <p:ph type="pic" sz="quarter" idx="12"/>
+          </p:nvPr>
+        </p:nvSpPr>
+        <p:spPr>
+          <a:xfrm>
+            <a:off x="-11151" y="0"/>
+            <a:ext cx="5827131" cy="6858000"/>
+          </a:xfrm>
+          <a:custGeom>
+            <a:avLst/>
+            <a:gdLst>
+              <a:gd name="connsiteX0" fmla="*/ 11151 w 5827131"/>
+              <a:gd name="connsiteY0" fmla="*/ 0 h 6858000"/>
+              <a:gd name="connsiteX1" fmla="*/ 28558 w 5827131"/>
+              <a:gd name="connsiteY1" fmla="*/ 0 h 6858000"/>
+              <a:gd name="connsiteX2" fmla="*/ 5080039 w 5827131"/>
+              <a:gd name="connsiteY2" fmla="*/ 0 h 6858000"/>
+              <a:gd name="connsiteX3" fmla="*/ 5792826 w 5827131"/>
+              <a:gd name="connsiteY3" fmla="*/ 0 h 6858000"/>
+              <a:gd name="connsiteX4" fmla="*/ 5157788 w 5827131"/>
+              <a:gd name="connsiteY4" fmla="*/ 3796113 h 6858000"/>
+              <a:gd name="connsiteX5" fmla="*/ 5827131 w 5827131"/>
+              <a:gd name="connsiteY5" fmla="*/ 6858000 h 6858000"/>
+              <a:gd name="connsiteX6" fmla="*/ 5080039 w 5827131"/>
+              <a:gd name="connsiteY6" fmla="*/ 6858000 h 6858000"/>
+              <a:gd name="connsiteX7" fmla="*/ 1779734 w 5827131"/>
+              <a:gd name="connsiteY7" fmla="*/ 6858000 h 6858000"/>
+              <a:gd name="connsiteX8" fmla="*/ 11151 w 5827131"/>
+              <a:gd name="connsiteY8" fmla="*/ 6858000 h 6858000"/>
+              <a:gd name="connsiteX9" fmla="*/ 11151 w 5827131"/>
+              <a:gd name="connsiteY9" fmla="*/ 6853666 h 6858000"/>
+              <a:gd name="connsiteX10" fmla="*/ 0 w 5827131"/>
+              <a:gd name="connsiteY10" fmla="*/ 6853638 h 6858000"/>
+              <a:gd name="connsiteX11" fmla="*/ 11151 w 5827131"/>
+              <a:gd name="connsiteY11" fmla="*/ 4177508 h 6858000"/>
+            </a:gdLst>
+            <a:ahLst/>
+            <a:cxnLst>
+              <a:cxn ang="0">
+                <a:pos x="connsiteX0" y="connsiteY0"/>
+              </a:cxn>
+              <a:cxn ang="0">
+                <a:pos x="connsiteX1" y="connsiteY1"/>
+              </a:cxn>
+              <a:cxn ang="0">
+                <a:pos x="connsiteX2" y="connsiteY2"/>
+              </a:cxn>
+              <a:cxn ang="0">
+                <a:pos x="connsiteX3" y="connsiteY3"/>
+              </a:cxn>
+              <a:cxn ang="0">
+                <a:pos x="connsiteX4" y="connsiteY4"/>
+              </a:cxn>
+              <a:cxn ang="0">
+                <a:pos x="connsiteX5" y="connsiteY5"/>
+              </a:cxn>
+              <a:cxn ang="0">
+                <a:pos x="connsiteX6" y="connsiteY6"/>
+              </a:cxn>
+              <a:cxn ang="0">
+                <a:pos x="connsiteX7" y="connsiteY7"/>
+              </a:cxn>
+              <a:cxn ang="0">
+                <a:pos x="connsiteX8" y="connsiteY8"/>
+              </a:cxn>
+              <a:cxn ang="0">
+                <a:pos x="connsiteX9" y="connsiteY9"/>
+              </a:cxn>
+              <a:cxn ang="0">
+                <a:pos x="connsiteX10" y="connsiteY10"/>
+              </a:cxn>
+              <a:cxn ang="0">
+                <a:pos x="connsiteX11" y="connsiteY11"/>
+              </a:cxn>
+            </a:cxnLst>
+            <a:rect l="l" t="t" r="r" b="b"/>
+            <a:pathLst>
+              <a:path w="5827131" h="6858000">
+                <a:moveTo>
+                  <a:pt x="11151" y="0"/>
+                </a:moveTo>
+                <a:lnTo>
+                  <a:pt x="28558" y="0"/>
+                </a:lnTo>
+                <a:lnTo>
+                  <a:pt x="5080039" y="0"/>
+                </a:lnTo>
+                <a:lnTo>
+                  <a:pt x="5792826" y="0"/>
+                </a:lnTo>
+                <a:lnTo>
+                  <a:pt x="5157788" y="3796113"/>
+                </a:lnTo>
+                <a:lnTo>
+                  <a:pt x="5827131" y="6858000"/>
+                </a:lnTo>
+                <a:lnTo>
+                  <a:pt x="5080039" y="6858000"/>
+                </a:lnTo>
+                <a:lnTo>
+                  <a:pt x="1779734" y="6858000"/>
+                </a:lnTo>
+                <a:lnTo>
+                  <a:pt x="11151" y="6858000"/>
+                </a:lnTo>
+                <a:lnTo>
+                  <a:pt x="11151" y="6853666"/>
+                </a:lnTo>
+                <a:lnTo>
+                  <a:pt x="0" y="6853638"/>
+                </a:lnTo>
+                <a:lnTo>
+                  <a:pt x="11151" y="4177508"/>
+                </a:lnTo>
+                <a:close/>
+              </a:path>
+            </a:pathLst>
+          </a:custGeom>
+        </p:spPr>
+        <p:txBody>
+          <a:bodyPr wrap="square">
+            <a:noAutofit/>
+          </a:bodyPr>
+          <a:lstStyle/>
+          <a:p>
+            <a:r>
+              <a:rPr lang="en-GB"/>
+              <a:t>Click icon to add picture</a:t>
+            </a:r>
+            <a:endParaRPr lang="en-US"/>
+          </a:p>
+        </p:txBody>
+      </p:sp>
+      <p:pic>
+        <p:nvPicPr>
+          <p:cNvPr id="3" name="Picture 2" descr="A black background with a black square&#10;&#10;Description automatically generated with medium confidence">
+            <a:extLst>
+              <a:ext uri="{FF2B5EF4-FFF2-40B4-BE49-F238E27FC236}">
+                <a16:creationId xmlns:a16="http://schemas.microsoft.com/office/drawing/2014/main" id="{68B87D74-DF91-5D9B-2ADA-143B3D15D390}"/>
+              </a:ext>
+            </a:extLst>
+          </p:cNvPr>
+          <p:cNvPicPr>
+            <a:picLocks noChangeAspect="1"/>
+          </p:cNvPicPr>
+          <p:nvPr userDrawn="1"/>
+        </p:nvPicPr>
+        <p:blipFill>
+          <a:blip r:embed="rId2" cstate="hqprint">
+            <a:extLst>
+              <a:ext uri="{28A0092B-C50C-407E-A947-70E740481C1C}">
+                <a14:useLocalDpi xmlns:a14="http://schemas.microsoft.com/office/drawing/2010/main"/>
+              </a:ext>
+            </a:extLst>
+          </a:blip>
+          <a:stretch>
+            <a:fillRect/>
+          </a:stretch>
+        </p:blipFill>
+        <p:spPr>
+          <a:xfrm>
+            <a:off x="6407652" y="5827395"/>
+            <a:ext cx="1954059" cy="487304"/>
+          </a:xfrm>
+          <a:prstGeom prst="rect">
+            <a:avLst/>
+          </a:prstGeom>
+        </p:spPr>
+      </p:pic>
+      <p:sp>
+        <p:nvSpPr>
+          <p:cNvPr id="6" name="2. Subtitle Placeholder">
+            <a:extLst>
+              <a:ext uri="{FF2B5EF4-FFF2-40B4-BE49-F238E27FC236}">
+                <a16:creationId xmlns:a16="http://schemas.microsoft.com/office/drawing/2014/main" id="{47DD63DB-696E-1F57-4651-369A131C6B24}"/>
+              </a:ext>
+            </a:extLst>
+          </p:cNvPr>
+          <p:cNvSpPr>
+            <a:spLocks noGrp="1"/>
+          </p:cNvSpPr>
+          <p:nvPr>
+            <p:ph type="subTitle" idx="1" hasCustomPrompt="1"/>
+          </p:nvPr>
+        </p:nvSpPr>
+        <p:spPr>
+          <a:xfrm>
+            <a:off x="6096000" y="1569436"/>
+            <a:ext cx="5518130" cy="3872223"/>
+          </a:xfrm>
+          <a:prstGeom prst="rect">
+            <a:avLst/>
+          </a:prstGeom>
+        </p:spPr>
+        <p:txBody>
+          <a:bodyPr>
+            <a:normAutofit/>
+          </a:bodyPr>
+          <a:lstStyle>
+            <a:lvl1pPr marL="0" indent="0" algn="l">
+              <a:lnSpc>
+                <a:spcPct val="100000"/>
+              </a:lnSpc>
+              <a:spcBef>
+                <a:spcPts val="0"/>
+              </a:spcBef>
+              <a:buNone/>
+              <a:defRPr sz="2000">
+                <a:solidFill>
+                  <a:srgbClr val="1B1B1B"/>
+                </a:solidFill>
+              </a:defRPr>
+            </a:lvl1pPr>
+            <a:lvl2pPr marL="457200" indent="0" algn="ctr">
+              <a:buNone/>
+              <a:defRPr sz="2000"/>
+            </a:lvl2pPr>
+            <a:lvl3pPr marL="914400" indent="0" algn="ctr">
+              <a:buNone/>
+              <a:defRPr sz="1800"/>
+            </a:lvl3pPr>
+            <a:lvl4pPr marL="1371600" indent="0" algn="ctr">
+              <a:buNone/>
+              <a:defRPr sz="1600"/>
+            </a:lvl4pPr>
+            <a:lvl5pPr marL="1828800" indent="0" algn="ctr">
+              <a:buNone/>
+              <a:defRPr sz="1600"/>
+            </a:lvl5pPr>
+            <a:lvl6pPr marL="2286000" indent="0" algn="ctr">
+              <a:buNone/>
+              <a:defRPr sz="1600"/>
+            </a:lvl6pPr>
+            <a:lvl7pPr marL="2743200" indent="0" algn="ctr">
+              <a:buNone/>
+              <a:defRPr sz="1600"/>
+            </a:lvl7pPr>
+            <a:lvl8pPr marL="3200400" indent="0" algn="ctr">
+              <a:buNone/>
+              <a:defRPr sz="1600"/>
+            </a:lvl8pPr>
+            <a:lvl9pPr marL="3657600" indent="0" algn="ctr">
+              <a:buNone/>
+              <a:defRPr sz="1600"/>
+            </a:lvl9pPr>
+          </a:lstStyle>
+          <a:p>
+            <a:r>
+              <a:rPr lang="en-GB" dirty="0"/>
+              <a:t>Insert sub copy here.</a:t>
+            </a:r>
+            <a:endParaRPr lang="en-US" dirty="0"/>
+          </a:p>
+        </p:txBody>
+      </p:sp>
+      <p:sp>
+        <p:nvSpPr>
+          <p:cNvPr id="7" name="2. Title Placeholder">
+            <a:extLst>
+              <a:ext uri="{FF2B5EF4-FFF2-40B4-BE49-F238E27FC236}">
+                <a16:creationId xmlns:a16="http://schemas.microsoft.com/office/drawing/2014/main" id="{A4CA4673-AD06-EB19-133A-E588BE05FE8E}"/>
+              </a:ext>
+            </a:extLst>
+          </p:cNvPr>
+          <p:cNvSpPr>
+            <a:spLocks noGrp="1"/>
+          </p:cNvSpPr>
+          <p:nvPr>
+            <p:ph type="title" hasCustomPrompt="1"/>
+          </p:nvPr>
+        </p:nvSpPr>
+        <p:spPr>
+          <a:xfrm>
+            <a:off x="6096000" y="543301"/>
+            <a:ext cx="5518130" cy="534529"/>
+          </a:xfrm>
+          <a:prstGeom prst="rect">
+            <a:avLst/>
+          </a:prstGeom>
+        </p:spPr>
+        <p:txBody>
+          <a:bodyPr vert="horz" lIns="91440" tIns="45720" rIns="91440" bIns="45720" rtlCol="0" anchor="ctr">
+            <a:noAutofit/>
+          </a:bodyPr>
+          <a:lstStyle>
+            <a:lvl1pPr>
+              <a:defRPr>
+                <a:solidFill>
+                  <a:srgbClr val="1B1B1B"/>
+                </a:solidFill>
+              </a:defRPr>
+            </a:lvl1pPr>
+          </a:lstStyle>
+          <a:p>
+            <a:r>
+              <a:rPr lang="en-GB" dirty="0"/>
+              <a:t>Insert headline here.</a:t>
+            </a:r>
+            <a:endParaRPr lang="en-US" dirty="0"/>
+          </a:p>
+        </p:txBody>
+      </p:sp>
+    </p:spTree>
+    <p:extLst>
+      <p:ext uri="{BB962C8B-B14F-4D97-AF65-F5344CB8AC3E}">
+        <p14:creationId xmlns:p14="http://schemas.microsoft.com/office/powerpoint/2010/main" val="3327317839"/>
+      </p:ext>
+    </p:extLst>
+  </p:cSld>
+  <p:clrMapOvr>
+    <a:masterClrMapping/>
+  </p:clrMapOvr>
+</p:sldLayout>
+</file>
+
+<file path=ppt/slideLayouts/slideLayout22.xml><?xml version="1.0" encoding="utf-8"?>
+<p:sldLayout xmlns:a="http://schemas.openxmlformats.org/drawingml/2006/main" xmlns:r="http://schemas.openxmlformats.org/officeDocument/2006/relationships" xmlns:p="http://schemas.openxmlformats.org/presentationml/2006/main" preserve="1" userDrawn="1">
+  <p:cSld name="1_Light Divider Slide - 2">
+    <p:bg>
+      <p:bgPr>
+        <a:solidFill>
+          <a:srgbClr val="FAFAFA"/>
+        </a:solidFill>
+        <a:effectLst/>
+      </p:bgPr>
+    </p:bg>
+    <p:spTree>
+      <p:nvGrpSpPr>
+        <p:cNvPr id="1" name=""/>
+        <p:cNvGrpSpPr/>
+        <p:nvPr/>
+      </p:nvGrpSpPr>
+      <p:grpSpPr>
+        <a:xfrm>
+          <a:off x="0" y="0"/>
+          <a:ext cx="0" cy="0"/>
+          <a:chOff x="0" y="0"/>
+          <a:chExt cx="0" cy="0"/>
+        </a:xfrm>
+      </p:grpSpPr>
+      <p:sp>
+        <p:nvSpPr>
+          <p:cNvPr id="14" name="Picture Placeholder 13">
+            <a:extLst>
+              <a:ext uri="{FF2B5EF4-FFF2-40B4-BE49-F238E27FC236}">
+                <a16:creationId xmlns:a16="http://schemas.microsoft.com/office/drawing/2014/main" id="{889D52B5-AEBA-52C6-1468-CF5F3A19510F}"/>
+              </a:ext>
+            </a:extLst>
+          </p:cNvPr>
+          <p:cNvSpPr>
+            <a:spLocks noGrp="1"/>
+          </p:cNvSpPr>
+          <p:nvPr>
+            <p:ph type="pic" sz="quarter" idx="12"/>
+          </p:nvPr>
+        </p:nvSpPr>
+        <p:spPr>
+          <a:xfrm>
+            <a:off x="6369051" y="0"/>
+            <a:ext cx="5822949" cy="6858000"/>
+          </a:xfrm>
+          <a:custGeom>
+            <a:avLst/>
+            <a:gdLst>
+              <a:gd name="connsiteX0" fmla="*/ 0 w 5822949"/>
+              <a:gd name="connsiteY0" fmla="*/ 0 h 6858000"/>
+              <a:gd name="connsiteX1" fmla="*/ 5822949 w 5822949"/>
+              <a:gd name="connsiteY1" fmla="*/ 0 h 6858000"/>
+              <a:gd name="connsiteX2" fmla="*/ 5822949 w 5822949"/>
+              <a:gd name="connsiteY2" fmla="*/ 6858000 h 6858000"/>
+              <a:gd name="connsiteX3" fmla="*/ 22923 w 5822949"/>
+              <a:gd name="connsiteY3" fmla="*/ 6858000 h 6858000"/>
+              <a:gd name="connsiteX4" fmla="*/ 539749 w 5822949"/>
+              <a:gd name="connsiteY4" fmla="*/ 2540000 h 6858000"/>
+            </a:gdLst>
+            <a:ahLst/>
+            <a:cxnLst>
+              <a:cxn ang="0">
+                <a:pos x="connsiteX0" y="connsiteY0"/>
+              </a:cxn>
+              <a:cxn ang="0">
+                <a:pos x="connsiteX1" y="connsiteY1"/>
+              </a:cxn>
+              <a:cxn ang="0">
+                <a:pos x="connsiteX2" y="connsiteY2"/>
+              </a:cxn>
+              <a:cxn ang="0">
+                <a:pos x="connsiteX3" y="connsiteY3"/>
+              </a:cxn>
+              <a:cxn ang="0">
+                <a:pos x="connsiteX4" y="connsiteY4"/>
+              </a:cxn>
+            </a:cxnLst>
+            <a:rect l="l" t="t" r="r" b="b"/>
+            <a:pathLst>
+              <a:path w="5822949" h="6858000">
+                <a:moveTo>
+                  <a:pt x="0" y="0"/>
+                </a:moveTo>
+                <a:lnTo>
+                  <a:pt x="5822949" y="0"/>
+                </a:lnTo>
+                <a:lnTo>
+                  <a:pt x="5822949" y="6858000"/>
+                </a:lnTo>
+                <a:lnTo>
+                  <a:pt x="22923" y="6858000"/>
+                </a:lnTo>
+                <a:lnTo>
+                  <a:pt x="539749" y="2540000"/>
+                </a:lnTo>
+                <a:close/>
+              </a:path>
+            </a:pathLst>
+          </a:custGeom>
+        </p:spPr>
+        <p:txBody>
+          <a:bodyPr wrap="square">
+            <a:noAutofit/>
+          </a:bodyPr>
+          <a:lstStyle/>
+          <a:p>
+            <a:r>
+              <a:rPr lang="en-GB"/>
+              <a:t>Click icon to add picture</a:t>
+            </a:r>
+            <a:endParaRPr lang="en-US" dirty="0"/>
+          </a:p>
+        </p:txBody>
+      </p:sp>
+      <p:pic>
+        <p:nvPicPr>
+          <p:cNvPr id="21" name="Picture 20" descr="A black background with a black square&#10;&#10;Description automatically generated with medium confidence">
+            <a:extLst>
+              <a:ext uri="{FF2B5EF4-FFF2-40B4-BE49-F238E27FC236}">
+                <a16:creationId xmlns:a16="http://schemas.microsoft.com/office/drawing/2014/main" id="{9C3E2A1D-39AA-138E-44FD-FE23A72C4C3E}"/>
+              </a:ext>
+            </a:extLst>
+          </p:cNvPr>
+          <p:cNvPicPr>
+            <a:picLocks noChangeAspect="1"/>
+          </p:cNvPicPr>
+          <p:nvPr userDrawn="1"/>
+        </p:nvPicPr>
+        <p:blipFill>
+          <a:blip r:embed="rId2" cstate="hqprint">
+            <a:extLst>
+              <a:ext uri="{28A0092B-C50C-407E-A947-70E740481C1C}">
+                <a14:useLocalDpi xmlns:a14="http://schemas.microsoft.com/office/drawing/2010/main"/>
+              </a:ext>
+            </a:extLst>
+          </a:blip>
+          <a:stretch>
+            <a:fillRect/>
+          </a:stretch>
+        </p:blipFill>
+        <p:spPr>
+          <a:xfrm>
+            <a:off x="406400" y="5827395"/>
+            <a:ext cx="1954059" cy="487304"/>
+          </a:xfrm>
+          <a:prstGeom prst="rect">
+            <a:avLst/>
+          </a:prstGeom>
+        </p:spPr>
+      </p:pic>
+      <p:sp>
+        <p:nvSpPr>
+          <p:cNvPr id="4" name="2. Subtitle Placeholder">
+            <a:extLst>
+              <a:ext uri="{FF2B5EF4-FFF2-40B4-BE49-F238E27FC236}">
+                <a16:creationId xmlns:a16="http://schemas.microsoft.com/office/drawing/2014/main" id="{C21A126F-4ECE-2EEA-33D2-07789BCE748F}"/>
+              </a:ext>
+            </a:extLst>
+          </p:cNvPr>
+          <p:cNvSpPr>
+            <a:spLocks noGrp="1"/>
+          </p:cNvSpPr>
+          <p:nvPr>
+            <p:ph type="subTitle" idx="1" hasCustomPrompt="1"/>
+          </p:nvPr>
+        </p:nvSpPr>
+        <p:spPr>
+          <a:xfrm>
+            <a:off x="502920" y="1463565"/>
+            <a:ext cx="5518130" cy="3872223"/>
+          </a:xfrm>
+          <a:prstGeom prst="rect">
+            <a:avLst/>
+          </a:prstGeom>
+        </p:spPr>
+        <p:txBody>
+          <a:bodyPr>
+            <a:normAutofit/>
+          </a:bodyPr>
+          <a:lstStyle>
+            <a:lvl1pPr marL="0" indent="0" algn="l">
+              <a:lnSpc>
+                <a:spcPct val="100000"/>
+              </a:lnSpc>
+              <a:spcBef>
+                <a:spcPts val="0"/>
+              </a:spcBef>
+              <a:buNone/>
+              <a:defRPr sz="2000">
+                <a:solidFill>
+                  <a:srgbClr val="1B1B1B"/>
+                </a:solidFill>
+              </a:defRPr>
+            </a:lvl1pPr>
+            <a:lvl2pPr marL="457200" indent="0" algn="ctr">
+              <a:buNone/>
+              <a:defRPr sz="2000"/>
+            </a:lvl2pPr>
+            <a:lvl3pPr marL="914400" indent="0" algn="ctr">
+              <a:buNone/>
+              <a:defRPr sz="1800"/>
+            </a:lvl3pPr>
+            <a:lvl4pPr marL="1371600" indent="0" algn="ctr">
+              <a:buNone/>
+              <a:defRPr sz="1600"/>
+            </a:lvl4pPr>
+            <a:lvl5pPr marL="1828800" indent="0" algn="ctr">
+              <a:buNone/>
+              <a:defRPr sz="1600"/>
+            </a:lvl5pPr>
+            <a:lvl6pPr marL="2286000" indent="0" algn="ctr">
+              <a:buNone/>
+              <a:defRPr sz="1600"/>
+            </a:lvl6pPr>
+            <a:lvl7pPr marL="2743200" indent="0" algn="ctr">
+              <a:buNone/>
+              <a:defRPr sz="1600"/>
+            </a:lvl7pPr>
+            <a:lvl8pPr marL="3200400" indent="0" algn="ctr">
+              <a:buNone/>
+              <a:defRPr sz="1600"/>
+            </a:lvl8pPr>
+            <a:lvl9pPr marL="3657600" indent="0" algn="ctr">
+              <a:buNone/>
+              <a:defRPr sz="1600"/>
+            </a:lvl9pPr>
+          </a:lstStyle>
+          <a:p>
+            <a:r>
+              <a:rPr lang="en-GB" dirty="0"/>
+              <a:t>Insert sub copy here.</a:t>
+            </a:r>
+            <a:endParaRPr lang="en-US" dirty="0"/>
+          </a:p>
+        </p:txBody>
+      </p:sp>
+      <p:sp>
+        <p:nvSpPr>
+          <p:cNvPr id="5" name="2. Title Placeholder">
+            <a:extLst>
+              <a:ext uri="{FF2B5EF4-FFF2-40B4-BE49-F238E27FC236}">
+                <a16:creationId xmlns:a16="http://schemas.microsoft.com/office/drawing/2014/main" id="{1DAC948A-6C66-F264-73D7-E98B9486DF5D}"/>
+              </a:ext>
+            </a:extLst>
+          </p:cNvPr>
+          <p:cNvSpPr>
+            <a:spLocks noGrp="1"/>
+          </p:cNvSpPr>
+          <p:nvPr>
+            <p:ph type="title" hasCustomPrompt="1"/>
+          </p:nvPr>
+        </p:nvSpPr>
+        <p:spPr>
+          <a:xfrm>
+            <a:off x="502920" y="437430"/>
+            <a:ext cx="5518130" cy="534529"/>
+          </a:xfrm>
+          <a:prstGeom prst="rect">
+            <a:avLst/>
+          </a:prstGeom>
+        </p:spPr>
+        <p:txBody>
+          <a:bodyPr vert="horz" lIns="91440" tIns="45720" rIns="91440" bIns="45720" rtlCol="0" anchor="ctr">
+            <a:noAutofit/>
+          </a:bodyPr>
+          <a:lstStyle>
+            <a:lvl1pPr>
+              <a:defRPr>
+                <a:solidFill>
+                  <a:srgbClr val="1B1B1B"/>
+                </a:solidFill>
+              </a:defRPr>
+            </a:lvl1pPr>
+          </a:lstStyle>
+          <a:p>
+            <a:r>
+              <a:rPr lang="en-GB" dirty="0"/>
+              <a:t>Insert headline here.</a:t>
+            </a:r>
+            <a:endParaRPr lang="en-US" dirty="0"/>
+          </a:p>
+        </p:txBody>
+      </p:sp>
+    </p:spTree>
+    <p:extLst>
+      <p:ext uri="{BB962C8B-B14F-4D97-AF65-F5344CB8AC3E}">
+        <p14:creationId xmlns:p14="http://schemas.microsoft.com/office/powerpoint/2010/main" val="59645096"/>
+      </p:ext>
+    </p:extLst>
+  </p:cSld>
+  <p:clrMapOvr>
+    <a:masterClrMapping/>
+  </p:clrMapOvr>
+</p:sldLayout>
+</file>
+
+<file path=ppt/slideLayouts/slideLayout23.xml><?xml version="1.0" encoding="utf-8"?>
+<p:sldLayout xmlns:a="http://schemas.openxmlformats.org/drawingml/2006/main" xmlns:r="http://schemas.openxmlformats.org/officeDocument/2006/relationships" xmlns:p="http://schemas.openxmlformats.org/presentationml/2006/main" preserve="1">
+  <p:cSld name="Light Divider Slide - 1">
+    <p:bg>
+      <p:bgPr>
+        <a:solidFill>
+          <a:srgbClr val="FAFAFA"/>
+        </a:solidFill>
+        <a:effectLst/>
+      </p:bgPr>
+    </p:bg>
+    <p:spTree>
+      <p:nvGrpSpPr>
+        <p:cNvPr id="1" name=""/>
+        <p:cNvGrpSpPr/>
+        <p:nvPr/>
+      </p:nvGrpSpPr>
+      <p:grpSpPr>
+        <a:xfrm>
+          <a:off x="0" y="0"/>
+          <a:ext cx="0" cy="0"/>
+          <a:chOff x="0" y="0"/>
+          <a:chExt cx="0" cy="0"/>
+        </a:xfrm>
+      </p:grpSpPr>
+      <p:sp>
+        <p:nvSpPr>
+          <p:cNvPr id="2" name="1. Title Placeholder">
+            <a:extLst>
+              <a:ext uri="{FF2B5EF4-FFF2-40B4-BE49-F238E27FC236}">
+                <a16:creationId xmlns:a16="http://schemas.microsoft.com/office/drawing/2014/main" id="{4D8642A1-7E6D-B42F-7749-8DC80C6DEDA2}"/>
+              </a:ext>
+            </a:extLst>
+          </p:cNvPr>
+          <p:cNvSpPr>
+            <a:spLocks noGrp="1"/>
+          </p:cNvSpPr>
+          <p:nvPr>
+            <p:ph type="ctrTitle" hasCustomPrompt="1"/>
+          </p:nvPr>
+        </p:nvSpPr>
+        <p:spPr>
+          <a:xfrm>
+            <a:off x="406400" y="754224"/>
+            <a:ext cx="6520180" cy="976045"/>
+          </a:xfrm>
+          <a:prstGeom prst="rect">
+            <a:avLst/>
+          </a:prstGeom>
+        </p:spPr>
+        <p:txBody>
+          <a:bodyPr anchor="b"/>
+          <a:lstStyle>
+            <a:lvl1pPr algn="l">
+              <a:lnSpc>
+                <a:spcPts val="5400"/>
+              </a:lnSpc>
+              <a:defRPr sz="6000">
+                <a:solidFill>
+                  <a:srgbClr val="1B1B1B"/>
+                </a:solidFill>
+              </a:defRPr>
+            </a:lvl1pPr>
+          </a:lstStyle>
+          <a:p>
+            <a:r>
+              <a:rPr lang="en-GB" dirty="0"/>
+              <a:t>Insert headline here.</a:t>
+            </a:r>
+            <a:endParaRPr lang="en-US" dirty="0"/>
+          </a:p>
+        </p:txBody>
+      </p:sp>
+      <p:sp>
+        <p:nvSpPr>
+          <p:cNvPr id="4" name="2. Subtitle Placeholder">
+            <a:extLst>
+              <a:ext uri="{FF2B5EF4-FFF2-40B4-BE49-F238E27FC236}">
+                <a16:creationId xmlns:a16="http://schemas.microsoft.com/office/drawing/2014/main" id="{798414E1-64D1-96D6-D06F-F94F3202CC59}"/>
+              </a:ext>
+            </a:extLst>
+          </p:cNvPr>
+          <p:cNvSpPr>
+            <a:spLocks noGrp="1"/>
+          </p:cNvSpPr>
+          <p:nvPr>
+            <p:ph type="subTitle" idx="1" hasCustomPrompt="1"/>
+          </p:nvPr>
+        </p:nvSpPr>
+        <p:spPr>
+          <a:xfrm>
+            <a:off x="406400" y="2059593"/>
+            <a:ext cx="6353996" cy="1369407"/>
+          </a:xfrm>
+          <a:prstGeom prst="rect">
+            <a:avLst/>
+          </a:prstGeom>
+        </p:spPr>
+        <p:txBody>
+          <a:bodyPr>
+            <a:normAutofit/>
+          </a:bodyPr>
+          <a:lstStyle>
+            <a:lvl1pPr marL="0" indent="0" algn="l">
+              <a:lnSpc>
+                <a:spcPct val="100000"/>
+              </a:lnSpc>
+              <a:spcBef>
+                <a:spcPts val="0"/>
+              </a:spcBef>
+              <a:buNone/>
+              <a:defRPr sz="2000">
+                <a:solidFill>
+                  <a:srgbClr val="1B1B1B"/>
+                </a:solidFill>
+              </a:defRPr>
+            </a:lvl1pPr>
+            <a:lvl2pPr marL="457200" indent="0" algn="ctr">
+              <a:buNone/>
+              <a:defRPr sz="2000"/>
+            </a:lvl2pPr>
+            <a:lvl3pPr marL="914400" indent="0" algn="ctr">
+              <a:buNone/>
+              <a:defRPr sz="1800"/>
+            </a:lvl3pPr>
+            <a:lvl4pPr marL="1371600" indent="0" algn="ctr">
+              <a:buNone/>
+              <a:defRPr sz="1600"/>
+            </a:lvl4pPr>
+            <a:lvl5pPr marL="1828800" indent="0" algn="ctr">
+              <a:buNone/>
+              <a:defRPr sz="1600"/>
+            </a:lvl5pPr>
+            <a:lvl6pPr marL="2286000" indent="0" algn="ctr">
+              <a:buNone/>
+              <a:defRPr sz="1600"/>
+            </a:lvl6pPr>
+            <a:lvl7pPr marL="2743200" indent="0" algn="ctr">
+              <a:buNone/>
+              <a:defRPr sz="1600"/>
+            </a:lvl7pPr>
+            <a:lvl8pPr marL="3200400" indent="0" algn="ctr">
+              <a:buNone/>
+              <a:defRPr sz="1600"/>
+            </a:lvl8pPr>
+            <a:lvl9pPr marL="3657600" indent="0" algn="ctr">
+              <a:buNone/>
+              <a:defRPr sz="1600"/>
+            </a:lvl9pPr>
+          </a:lstStyle>
+          <a:p>
+            <a:r>
+              <a:rPr lang="en-GB" dirty="0"/>
+              <a:t>Insert sub copy here.</a:t>
+            </a:r>
+            <a:endParaRPr lang="en-US" dirty="0"/>
+          </a:p>
+        </p:txBody>
+      </p:sp>
+      <p:sp>
+        <p:nvSpPr>
+          <p:cNvPr id="5" name="3. Picture Placeholder">
+            <a:extLst>
+              <a:ext uri="{FF2B5EF4-FFF2-40B4-BE49-F238E27FC236}">
+                <a16:creationId xmlns:a16="http://schemas.microsoft.com/office/drawing/2014/main" id="{C4BE638E-576F-FF68-6661-2065A7520713}"/>
+              </a:ext>
+            </a:extLst>
+          </p:cNvPr>
+          <p:cNvSpPr>
+            <a:spLocks noGrp="1"/>
+          </p:cNvSpPr>
+          <p:nvPr>
+            <p:ph type="pic" sz="quarter" idx="10"/>
+          </p:nvPr>
+        </p:nvSpPr>
+        <p:spPr>
+          <a:xfrm>
+            <a:off x="0" y="3852863"/>
+            <a:ext cx="12192000" cy="3005137"/>
+          </a:xfrm>
+        </p:spPr>
+        <p:txBody>
+          <a:bodyPr/>
+          <a:lstStyle>
+            <a:lvl1pPr>
+              <a:defRPr>
+                <a:solidFill>
+                  <a:srgbClr val="1B1B1B"/>
+                </a:solidFill>
+              </a:defRPr>
+            </a:lvl1pPr>
+          </a:lstStyle>
+          <a:p>
+            <a:r>
+              <a:rPr lang="en-GB"/>
+              <a:t>Click icon to add picture</a:t>
+            </a:r>
+            <a:endParaRPr lang="en-US" dirty="0"/>
+          </a:p>
+        </p:txBody>
+      </p:sp>
+      <p:pic>
+        <p:nvPicPr>
+          <p:cNvPr id="6" name="Picture 5" descr="A black background with a black square&#10;&#10;Description automatically generated with medium confidence">
+            <a:extLst>
+              <a:ext uri="{FF2B5EF4-FFF2-40B4-BE49-F238E27FC236}">
+                <a16:creationId xmlns:a16="http://schemas.microsoft.com/office/drawing/2014/main" id="{9E76A172-0120-5491-60E8-988074C1EB70}"/>
+              </a:ext>
+            </a:extLst>
+          </p:cNvPr>
+          <p:cNvPicPr>
+            <a:picLocks noChangeAspect="1"/>
+          </p:cNvPicPr>
+          <p:nvPr/>
+        </p:nvPicPr>
+        <p:blipFill>
+          <a:blip r:embed="rId2" cstate="hqprint">
+            <a:extLst>
+              <a:ext uri="{28A0092B-C50C-407E-A947-70E740481C1C}">
+                <a14:useLocalDpi xmlns:a14="http://schemas.microsoft.com/office/drawing/2010/main"/>
+              </a:ext>
+            </a:extLst>
+          </a:blip>
+          <a:stretch>
+            <a:fillRect/>
+          </a:stretch>
+        </p:blipFill>
+        <p:spPr>
+          <a:xfrm>
+            <a:off x="9735021" y="754942"/>
+            <a:ext cx="1954059" cy="487304"/>
+          </a:xfrm>
+          <a:prstGeom prst="rect">
+            <a:avLst/>
+          </a:prstGeom>
+        </p:spPr>
+      </p:pic>
+    </p:spTree>
+    <p:extLst>
+      <p:ext uri="{BB962C8B-B14F-4D97-AF65-F5344CB8AC3E}">
+        <p14:creationId xmlns:p14="http://schemas.microsoft.com/office/powerpoint/2010/main" val="3848209982"/>
+      </p:ext>
+    </p:extLst>
+  </p:cSld>
+  <p:clrMapOvr>
+    <a:overrideClrMapping bg1="lt1" tx1="dk1" bg2="lt2" tx2="dk2" accent1="accent1" accent2="accent2" accent3="accent3" accent4="accent4" accent5="accent5" accent6="accent6" hlink="hlink" folHlink="folHlink"/>
+  </p:clrMapOvr>
+</p:sldLayout>
+</file>
+
+<file path=ppt/slideLayouts/slideLayout24.xml><?xml version="1.0" encoding="utf-8"?>
+<p:sldLayout xmlns:a="http://schemas.openxmlformats.org/drawingml/2006/main" xmlns:r="http://schemas.openxmlformats.org/officeDocument/2006/relationships" xmlns:p="http://schemas.openxmlformats.org/presentationml/2006/main" preserve="1">
+  <p:cSld name="Light Divider Slide - 2">
+    <p:bg>
+      <p:bgPr>
+        <a:solidFill>
+          <a:srgbClr val="FAFAFA"/>
+        </a:solidFill>
+        <a:effectLst/>
+      </p:bgPr>
+    </p:bg>
+    <p:spTree>
+      <p:nvGrpSpPr>
+        <p:cNvPr id="1" name=""/>
+        <p:cNvGrpSpPr/>
+        <p:nvPr/>
+      </p:nvGrpSpPr>
+      <p:grpSpPr>
+        <a:xfrm>
+          <a:off x="0" y="0"/>
+          <a:ext cx="0" cy="0"/>
+          <a:chOff x="0" y="0"/>
+          <a:chExt cx="0" cy="0"/>
+        </a:xfrm>
+      </p:grpSpPr>
+      <p:sp>
+        <p:nvSpPr>
+          <p:cNvPr id="6" name="1. Title Placeholder">
+            <a:extLst>
+              <a:ext uri="{FF2B5EF4-FFF2-40B4-BE49-F238E27FC236}">
+                <a16:creationId xmlns:a16="http://schemas.microsoft.com/office/drawing/2014/main" id="{DC759DBE-3BA0-9E84-5596-2AD69AA128D4}"/>
+              </a:ext>
+            </a:extLst>
+          </p:cNvPr>
+          <p:cNvSpPr>
+            <a:spLocks noGrp="1"/>
+          </p:cNvSpPr>
+          <p:nvPr>
+            <p:ph type="ctrTitle" hasCustomPrompt="1"/>
+          </p:nvPr>
+        </p:nvSpPr>
+        <p:spPr>
+          <a:xfrm>
+            <a:off x="406400" y="1603450"/>
+            <a:ext cx="5377951" cy="1680537"/>
+          </a:xfrm>
+          <a:prstGeom prst="rect">
+            <a:avLst/>
+          </a:prstGeom>
+        </p:spPr>
+        <p:txBody>
+          <a:bodyPr anchor="b"/>
+          <a:lstStyle>
+            <a:lvl1pPr algn="l">
+              <a:lnSpc>
+                <a:spcPts val="5400"/>
+              </a:lnSpc>
+              <a:defRPr sz="6000">
+                <a:solidFill>
+                  <a:srgbClr val="1B1B1B"/>
+                </a:solidFill>
+              </a:defRPr>
+            </a:lvl1pPr>
+          </a:lstStyle>
+          <a:p>
+            <a:r>
+              <a:rPr lang="en-GB" dirty="0"/>
+              <a:t>Insert </a:t>
+            </a:r>
+            <a:br>
+              <a:rPr lang="en-GB" dirty="0"/>
+            </a:br>
+            <a:r>
+              <a:rPr lang="en-GB" dirty="0"/>
+              <a:t>headline here.</a:t>
+            </a:r>
+            <a:endParaRPr lang="en-US" dirty="0"/>
+          </a:p>
+        </p:txBody>
+      </p:sp>
+      <p:sp>
+        <p:nvSpPr>
+          <p:cNvPr id="7" name="2. Subtitle Placeholder">
+            <a:extLst>
+              <a:ext uri="{FF2B5EF4-FFF2-40B4-BE49-F238E27FC236}">
+                <a16:creationId xmlns:a16="http://schemas.microsoft.com/office/drawing/2014/main" id="{02A192BC-C9DB-F0AB-B1DE-03D15E5A8739}"/>
+              </a:ext>
+            </a:extLst>
+          </p:cNvPr>
+          <p:cNvSpPr>
+            <a:spLocks noGrp="1"/>
+          </p:cNvSpPr>
+          <p:nvPr>
+            <p:ph type="subTitle" idx="1" hasCustomPrompt="1"/>
+          </p:nvPr>
+        </p:nvSpPr>
+        <p:spPr>
+          <a:xfrm>
+            <a:off x="406400" y="3707702"/>
+            <a:ext cx="5377951" cy="1655762"/>
+          </a:xfrm>
+          <a:prstGeom prst="rect">
+            <a:avLst/>
+          </a:prstGeom>
+        </p:spPr>
+        <p:txBody>
+          <a:bodyPr>
+            <a:normAutofit/>
+          </a:bodyPr>
+          <a:lstStyle>
+            <a:lvl1pPr marL="0" indent="0" algn="l">
+              <a:lnSpc>
+                <a:spcPct val="100000"/>
+              </a:lnSpc>
+              <a:spcBef>
+                <a:spcPts val="0"/>
+              </a:spcBef>
+              <a:buNone/>
+              <a:defRPr sz="2000">
+                <a:solidFill>
+                  <a:srgbClr val="1B1B1B"/>
+                </a:solidFill>
+              </a:defRPr>
+            </a:lvl1pPr>
+            <a:lvl2pPr marL="457200" indent="0" algn="ctr">
+              <a:buNone/>
+              <a:defRPr sz="2000"/>
+            </a:lvl2pPr>
+            <a:lvl3pPr marL="914400" indent="0" algn="ctr">
+              <a:buNone/>
+              <a:defRPr sz="1800"/>
+            </a:lvl3pPr>
+            <a:lvl4pPr marL="1371600" indent="0" algn="ctr">
+              <a:buNone/>
+              <a:defRPr sz="1600"/>
+            </a:lvl4pPr>
+            <a:lvl5pPr marL="1828800" indent="0" algn="ctr">
+              <a:buNone/>
+              <a:defRPr sz="1600"/>
+            </a:lvl5pPr>
+            <a:lvl6pPr marL="2286000" indent="0" algn="ctr">
+              <a:buNone/>
+              <a:defRPr sz="1600"/>
+            </a:lvl6pPr>
+            <a:lvl7pPr marL="2743200" indent="0" algn="ctr">
+              <a:buNone/>
+              <a:defRPr sz="1600"/>
+            </a:lvl7pPr>
+            <a:lvl8pPr marL="3200400" indent="0" algn="ctr">
+              <a:buNone/>
+              <a:defRPr sz="1600"/>
+            </a:lvl8pPr>
+            <a:lvl9pPr marL="3657600" indent="0" algn="ctr">
+              <a:buNone/>
+              <a:defRPr sz="1600"/>
+            </a:lvl9pPr>
+          </a:lstStyle>
+          <a:p>
+            <a:r>
+              <a:rPr lang="en-GB" dirty="0"/>
+              <a:t>Insert sub copy here.</a:t>
+            </a:r>
+            <a:endParaRPr lang="en-US" dirty="0"/>
+          </a:p>
+        </p:txBody>
+      </p:sp>
+      <p:sp>
+        <p:nvSpPr>
+          <p:cNvPr id="5" name="3. Picture Placeholder">
+            <a:extLst>
+              <a:ext uri="{FF2B5EF4-FFF2-40B4-BE49-F238E27FC236}">
+                <a16:creationId xmlns:a16="http://schemas.microsoft.com/office/drawing/2014/main" id="{C4BE638E-576F-FF68-6661-2065A7520713}"/>
+              </a:ext>
+            </a:extLst>
+          </p:cNvPr>
+          <p:cNvSpPr>
+            <a:spLocks noGrp="1"/>
+          </p:cNvSpPr>
+          <p:nvPr>
+            <p:ph type="pic" sz="quarter" idx="10"/>
+          </p:nvPr>
+        </p:nvSpPr>
+        <p:spPr>
+          <a:xfrm>
+            <a:off x="6407650" y="1"/>
+            <a:ext cx="5784349" cy="6858000"/>
+          </a:xfrm>
+        </p:spPr>
+        <p:txBody>
+          <a:bodyPr/>
+          <a:lstStyle>
+            <a:lvl1pPr>
+              <a:defRPr>
+                <a:solidFill>
+                  <a:srgbClr val="1B1B1B"/>
+                </a:solidFill>
+              </a:defRPr>
+            </a:lvl1pPr>
+          </a:lstStyle>
+          <a:p>
+            <a:r>
+              <a:rPr lang="en-GB"/>
+              <a:t>Click icon to add picture</a:t>
+            </a:r>
+            <a:endParaRPr lang="en-US"/>
+          </a:p>
+        </p:txBody>
+      </p:sp>
+      <p:pic>
+        <p:nvPicPr>
+          <p:cNvPr id="2" name="Picture 1" descr="A black background with a black square&#10;&#10;Description automatically generated with medium confidence">
+            <a:extLst>
+              <a:ext uri="{FF2B5EF4-FFF2-40B4-BE49-F238E27FC236}">
+                <a16:creationId xmlns:a16="http://schemas.microsoft.com/office/drawing/2014/main" id="{1C28641C-5551-16DE-84DF-E1489E73B09D}"/>
+              </a:ext>
+            </a:extLst>
+          </p:cNvPr>
+          <p:cNvPicPr>
+            <a:picLocks noChangeAspect="1"/>
+          </p:cNvPicPr>
+          <p:nvPr/>
+        </p:nvPicPr>
+        <p:blipFill>
+          <a:blip r:embed="rId2" cstate="hqprint">
+            <a:extLst>
+              <a:ext uri="{28A0092B-C50C-407E-A947-70E740481C1C}">
+                <a14:useLocalDpi xmlns:a14="http://schemas.microsoft.com/office/drawing/2010/main"/>
+              </a:ext>
+            </a:extLst>
+          </a:blip>
+          <a:stretch>
+            <a:fillRect/>
+          </a:stretch>
+        </p:blipFill>
+        <p:spPr>
+          <a:xfrm>
+            <a:off x="406400" y="5827395"/>
+            <a:ext cx="1954059" cy="487304"/>
+          </a:xfrm>
+          <a:prstGeom prst="rect">
+            <a:avLst/>
+          </a:prstGeom>
+        </p:spPr>
+      </p:pic>
+    </p:spTree>
+    <p:extLst>
+      <p:ext uri="{BB962C8B-B14F-4D97-AF65-F5344CB8AC3E}">
+        <p14:creationId xmlns:p14="http://schemas.microsoft.com/office/powerpoint/2010/main" val="3361085698"/>
+      </p:ext>
+    </p:extLst>
+  </p:cSld>
+  <p:clrMapOvr>
+    <a:masterClrMapping/>
+  </p:clrMapOvr>
+</p:sldLayout>
+</file>
+
+<file path=ppt/slideLayouts/slideLayout25.xml><?xml version="1.0" encoding="utf-8"?>
+<p:sldLayout xmlns:a="http://schemas.openxmlformats.org/drawingml/2006/main" xmlns:r="http://schemas.openxmlformats.org/officeDocument/2006/relationships" xmlns:p="http://schemas.openxmlformats.org/presentationml/2006/main" preserve="1">
+  <p:cSld name="Light Divider Slide - 3">
+    <p:bg>
+      <p:bgPr>
+        <a:solidFill>
+          <a:srgbClr val="FAFAFA"/>
+        </a:solidFill>
+        <a:effectLst/>
+      </p:bgPr>
+    </p:bg>
+    <p:spTree>
+      <p:nvGrpSpPr>
+        <p:cNvPr id="1" name=""/>
+        <p:cNvGrpSpPr/>
+        <p:nvPr/>
+      </p:nvGrpSpPr>
+      <p:grpSpPr>
+        <a:xfrm>
+          <a:off x="0" y="0"/>
+          <a:ext cx="0" cy="0"/>
+          <a:chOff x="0" y="0"/>
+          <a:chExt cx="0" cy="0"/>
+        </a:xfrm>
+      </p:grpSpPr>
+      <p:sp>
+        <p:nvSpPr>
+          <p:cNvPr id="3" name="1. Title Placeholder">
+            <a:extLst>
+              <a:ext uri="{FF2B5EF4-FFF2-40B4-BE49-F238E27FC236}">
+                <a16:creationId xmlns:a16="http://schemas.microsoft.com/office/drawing/2014/main" id="{B7F235D6-4347-D7AC-BFE0-1EA4849BA5F6}"/>
+              </a:ext>
+            </a:extLst>
+          </p:cNvPr>
+          <p:cNvSpPr>
+            <a:spLocks noGrp="1"/>
+          </p:cNvSpPr>
+          <p:nvPr>
+            <p:ph type="ctrTitle" hasCustomPrompt="1"/>
+          </p:nvPr>
+        </p:nvSpPr>
+        <p:spPr>
+          <a:xfrm>
+            <a:off x="6407653" y="1603450"/>
+            <a:ext cx="5377951" cy="1680537"/>
+          </a:xfrm>
+          <a:prstGeom prst="rect">
+            <a:avLst/>
+          </a:prstGeom>
+        </p:spPr>
+        <p:txBody>
+          <a:bodyPr anchor="b"/>
+          <a:lstStyle>
+            <a:lvl1pPr algn="l">
+              <a:lnSpc>
+                <a:spcPts val="5400"/>
+              </a:lnSpc>
+              <a:defRPr sz="6000">
+                <a:solidFill>
+                  <a:srgbClr val="1B1B1B"/>
+                </a:solidFill>
+              </a:defRPr>
+            </a:lvl1pPr>
+          </a:lstStyle>
+          <a:p>
+            <a:r>
+              <a:rPr lang="en-GB" dirty="0"/>
+              <a:t>Insert </a:t>
+            </a:r>
+            <a:br>
+              <a:rPr lang="en-GB" dirty="0"/>
+            </a:br>
+            <a:r>
+              <a:rPr lang="en-GB" dirty="0"/>
+              <a:t>title here.</a:t>
+            </a:r>
+            <a:endParaRPr lang="en-US" dirty="0"/>
+          </a:p>
+        </p:txBody>
+      </p:sp>
+      <p:sp>
+        <p:nvSpPr>
+          <p:cNvPr id="8" name="2. Subtitle Placeholder">
+            <a:extLst>
+              <a:ext uri="{FF2B5EF4-FFF2-40B4-BE49-F238E27FC236}">
+                <a16:creationId xmlns:a16="http://schemas.microsoft.com/office/drawing/2014/main" id="{F1BF5AB1-F146-83EF-D63E-DD9EA52569A8}"/>
+              </a:ext>
+            </a:extLst>
+          </p:cNvPr>
+          <p:cNvSpPr>
+            <a:spLocks noGrp="1"/>
+          </p:cNvSpPr>
+          <p:nvPr>
+            <p:ph type="subTitle" idx="1" hasCustomPrompt="1"/>
+          </p:nvPr>
+        </p:nvSpPr>
+        <p:spPr>
+          <a:xfrm>
+            <a:off x="6407653" y="3707702"/>
+            <a:ext cx="5377951" cy="1655762"/>
+          </a:xfrm>
+          <a:prstGeom prst="rect">
+            <a:avLst/>
+          </a:prstGeom>
+        </p:spPr>
+        <p:txBody>
+          <a:bodyPr>
+            <a:normAutofit/>
+          </a:bodyPr>
+          <a:lstStyle>
+            <a:lvl1pPr marL="0" indent="0" algn="l">
+              <a:lnSpc>
+                <a:spcPct val="100000"/>
+              </a:lnSpc>
+              <a:spcBef>
+                <a:spcPts val="0"/>
+              </a:spcBef>
+              <a:buNone/>
+              <a:defRPr sz="2000">
+                <a:solidFill>
+                  <a:srgbClr val="1B1B1B"/>
+                </a:solidFill>
+              </a:defRPr>
+            </a:lvl1pPr>
+            <a:lvl2pPr marL="457200" indent="0" algn="ctr">
+              <a:buNone/>
+              <a:defRPr sz="2000"/>
+            </a:lvl2pPr>
+            <a:lvl3pPr marL="914400" indent="0" algn="ctr">
+              <a:buNone/>
+              <a:defRPr sz="1800"/>
+            </a:lvl3pPr>
+            <a:lvl4pPr marL="1371600" indent="0" algn="ctr">
+              <a:buNone/>
+              <a:defRPr sz="1600"/>
+            </a:lvl4pPr>
+            <a:lvl5pPr marL="1828800" indent="0" algn="ctr">
+              <a:buNone/>
+              <a:defRPr sz="1600"/>
+            </a:lvl5pPr>
+            <a:lvl6pPr marL="2286000" indent="0" algn="ctr">
+              <a:buNone/>
+              <a:defRPr sz="1600"/>
+            </a:lvl6pPr>
+            <a:lvl7pPr marL="2743200" indent="0" algn="ctr">
+              <a:buNone/>
+              <a:defRPr sz="1600"/>
+            </a:lvl7pPr>
+            <a:lvl8pPr marL="3200400" indent="0" algn="ctr">
+              <a:buNone/>
+              <a:defRPr sz="1600"/>
+            </a:lvl8pPr>
+            <a:lvl9pPr marL="3657600" indent="0" algn="ctr">
+              <a:buNone/>
+              <a:defRPr sz="1600"/>
+            </a:lvl9pPr>
+          </a:lstStyle>
+          <a:p>
+            <a:r>
+              <a:rPr lang="en-GB" dirty="0"/>
+              <a:t>Insert sub copy here.</a:t>
+            </a:r>
+            <a:endParaRPr lang="en-US" dirty="0"/>
+          </a:p>
+        </p:txBody>
+      </p:sp>
+      <p:sp>
+        <p:nvSpPr>
+          <p:cNvPr id="5" name="3. Picture Placeholder">
+            <a:extLst>
+              <a:ext uri="{FF2B5EF4-FFF2-40B4-BE49-F238E27FC236}">
+                <a16:creationId xmlns:a16="http://schemas.microsoft.com/office/drawing/2014/main" id="{C4BE638E-576F-FF68-6661-2065A7520713}"/>
+              </a:ext>
+            </a:extLst>
+          </p:cNvPr>
+          <p:cNvSpPr>
+            <a:spLocks noGrp="1"/>
+          </p:cNvSpPr>
+          <p:nvPr>
+            <p:ph type="pic" sz="quarter" idx="10"/>
+          </p:nvPr>
+        </p:nvSpPr>
+        <p:spPr>
+          <a:xfrm>
+            <a:off x="0" y="1"/>
+            <a:ext cx="5784349" cy="6858000"/>
+          </a:xfrm>
+        </p:spPr>
+        <p:txBody>
+          <a:bodyPr/>
+          <a:lstStyle>
+            <a:lvl1pPr>
+              <a:defRPr>
+                <a:solidFill>
+                  <a:srgbClr val="1B1B1B"/>
+                </a:solidFill>
+              </a:defRPr>
+            </a:lvl1pPr>
+          </a:lstStyle>
+          <a:p>
+            <a:r>
+              <a:rPr lang="en-GB"/>
+              <a:t>Click icon to add picture</a:t>
+            </a:r>
+            <a:endParaRPr lang="en-US" dirty="0"/>
+          </a:p>
+        </p:txBody>
+      </p:sp>
+      <p:pic>
+        <p:nvPicPr>
+          <p:cNvPr id="4" name="Picture 3" descr="A black background with a black square&#10;&#10;Description automatically generated with medium confidence">
+            <a:extLst>
+              <a:ext uri="{FF2B5EF4-FFF2-40B4-BE49-F238E27FC236}">
+                <a16:creationId xmlns:a16="http://schemas.microsoft.com/office/drawing/2014/main" id="{F6280A6D-54DF-5817-E29B-8DF1551D1CDC}"/>
+              </a:ext>
+            </a:extLst>
+          </p:cNvPr>
+          <p:cNvPicPr>
+            <a:picLocks noChangeAspect="1"/>
+          </p:cNvPicPr>
+          <p:nvPr/>
+        </p:nvPicPr>
+        <p:blipFill>
+          <a:blip r:embed="rId2" cstate="hqprint">
+            <a:extLst>
+              <a:ext uri="{28A0092B-C50C-407E-A947-70E740481C1C}">
+                <a14:useLocalDpi xmlns:a14="http://schemas.microsoft.com/office/drawing/2010/main"/>
+              </a:ext>
+            </a:extLst>
+          </a:blip>
+          <a:stretch>
+            <a:fillRect/>
+          </a:stretch>
+        </p:blipFill>
+        <p:spPr>
+          <a:xfrm>
+            <a:off x="6407652" y="5827395"/>
+            <a:ext cx="1954059" cy="487304"/>
+          </a:xfrm>
+          <a:prstGeom prst="rect">
+            <a:avLst/>
+          </a:prstGeom>
+        </p:spPr>
+      </p:pic>
+    </p:spTree>
+    <p:extLst>
+      <p:ext uri="{BB962C8B-B14F-4D97-AF65-F5344CB8AC3E}">
+        <p14:creationId xmlns:p14="http://schemas.microsoft.com/office/powerpoint/2010/main" val="1435868114"/>
+      </p:ext>
+    </p:extLst>
+  </p:cSld>
+  <p:clrMapOvr>
+    <a:masterClrMapping/>
+  </p:clrMapOvr>
+</p:sldLayout>
+</file>
+
+<file path=ppt/slideLayouts/slideLayout26.xml><?xml version="1.0" encoding="utf-8"?>
+<p:sldLayout xmlns:a="http://schemas.openxmlformats.org/drawingml/2006/main" xmlns:r="http://schemas.openxmlformats.org/officeDocument/2006/relationships" xmlns:p="http://schemas.openxmlformats.org/presentationml/2006/main" userDrawn="1">
+  <p:cSld name="Dark Divider Slide - 3">
+    <p:bg>
+      <p:bgPr>
+        <a:solidFill>
+          <a:srgbClr val="1B1B1B"/>
+        </a:solidFill>
+        <a:effectLst/>
+      </p:bgPr>
+    </p:bg>
+    <p:spTree>
+      <p:nvGrpSpPr>
+        <p:cNvPr id="1" name=""/>
+        <p:cNvGrpSpPr/>
+        <p:nvPr/>
+      </p:nvGrpSpPr>
+      <p:grpSpPr>
+        <a:xfrm>
+          <a:off x="0" y="0"/>
+          <a:ext cx="0" cy="0"/>
+          <a:chOff x="0" y="0"/>
+          <a:chExt cx="0" cy="0"/>
+        </a:xfrm>
+      </p:grpSpPr>
+      <p:sp>
+        <p:nvSpPr>
+          <p:cNvPr id="3" name="1. Title Placeholder">
+            <a:extLst>
+              <a:ext uri="{FF2B5EF4-FFF2-40B4-BE49-F238E27FC236}">
+                <a16:creationId xmlns:a16="http://schemas.microsoft.com/office/drawing/2014/main" id="{B7F235D6-4347-D7AC-BFE0-1EA4849BA5F6}"/>
+              </a:ext>
+            </a:extLst>
+          </p:cNvPr>
+          <p:cNvSpPr>
+            <a:spLocks noGrp="1"/>
+          </p:cNvSpPr>
+          <p:nvPr>
+            <p:ph type="ctrTitle" hasCustomPrompt="1"/>
+          </p:nvPr>
+        </p:nvSpPr>
+        <p:spPr>
+          <a:xfrm>
+            <a:off x="6407653" y="1603450"/>
+            <a:ext cx="5377951" cy="1680537"/>
+          </a:xfrm>
+          <a:prstGeom prst="rect">
+            <a:avLst/>
+          </a:prstGeom>
+        </p:spPr>
+        <p:txBody>
+          <a:bodyPr anchor="b"/>
+          <a:lstStyle>
+            <a:lvl1pPr algn="l">
+              <a:lnSpc>
+                <a:spcPts val="5400"/>
+              </a:lnSpc>
+              <a:defRPr sz="6000">
+                <a:solidFill>
+                  <a:srgbClr val="FAFAFA"/>
+                </a:solidFill>
+              </a:defRPr>
+            </a:lvl1pPr>
+          </a:lstStyle>
+          <a:p>
+            <a:r>
+              <a:rPr lang="en-GB" dirty="0"/>
+              <a:t>Insert </a:t>
+            </a:r>
+            <a:br>
+              <a:rPr lang="en-GB" dirty="0"/>
+            </a:br>
+            <a:r>
+              <a:rPr lang="en-GB" dirty="0"/>
+              <a:t>headline here.</a:t>
+            </a:r>
+            <a:endParaRPr lang="en-US" dirty="0"/>
+          </a:p>
+        </p:txBody>
+      </p:sp>
+      <p:sp>
+        <p:nvSpPr>
+          <p:cNvPr id="5" name="3. Picture Placeholder">
+            <a:extLst>
+              <a:ext uri="{FF2B5EF4-FFF2-40B4-BE49-F238E27FC236}">
+                <a16:creationId xmlns:a16="http://schemas.microsoft.com/office/drawing/2014/main" id="{C4BE638E-576F-FF68-6661-2065A7520713}"/>
+              </a:ext>
+            </a:extLst>
+          </p:cNvPr>
+          <p:cNvSpPr>
+            <a:spLocks noGrp="1"/>
+          </p:cNvSpPr>
+          <p:nvPr>
+            <p:ph type="pic" sz="quarter" idx="10"/>
+          </p:nvPr>
+        </p:nvSpPr>
+        <p:spPr>
+          <a:xfrm>
+            <a:off x="0" y="1"/>
+            <a:ext cx="5784349" cy="6858000"/>
+          </a:xfrm>
+        </p:spPr>
+        <p:txBody>
+          <a:bodyPr/>
+          <a:lstStyle>
+            <a:lvl1pPr>
+              <a:defRPr>
+                <a:solidFill>
+                  <a:srgbClr val="FAFAFA"/>
+                </a:solidFill>
+              </a:defRPr>
+            </a:lvl1pPr>
+          </a:lstStyle>
+          <a:p>
+            <a:r>
+              <a:rPr lang="en-GB"/>
+              <a:t>Click icon to add picture</a:t>
+            </a:r>
+            <a:endParaRPr lang="en-US"/>
+          </a:p>
+        </p:txBody>
+      </p:sp>
+      <p:pic>
+        <p:nvPicPr>
+          <p:cNvPr id="4" name="Picture 3" descr="A black and white sign with white text&#10;&#10;Description automatically generated">
+            <a:extLst>
+              <a:ext uri="{FF2B5EF4-FFF2-40B4-BE49-F238E27FC236}">
+                <a16:creationId xmlns:a16="http://schemas.microsoft.com/office/drawing/2014/main" id="{8A1843D6-ECE1-FAEC-49F7-0B0805BCED05}"/>
+              </a:ext>
+            </a:extLst>
+          </p:cNvPr>
+          <p:cNvPicPr>
+            <a:picLocks noChangeAspect="1"/>
+          </p:cNvPicPr>
+          <p:nvPr/>
+        </p:nvPicPr>
+        <p:blipFill>
+          <a:blip r:embed="rId2" cstate="hqprint">
+            <a:extLst>
+              <a:ext uri="{28A0092B-C50C-407E-A947-70E740481C1C}">
+                <a14:useLocalDpi xmlns:a14="http://schemas.microsoft.com/office/drawing/2010/main"/>
+              </a:ext>
+            </a:extLst>
+          </a:blip>
+          <a:stretch>
+            <a:fillRect/>
+          </a:stretch>
+        </p:blipFill>
+        <p:spPr>
+          <a:xfrm>
+            <a:off x="6407653" y="5822539"/>
+            <a:ext cx="1953808" cy="497017"/>
+          </a:xfrm>
+          <a:prstGeom prst="rect">
+            <a:avLst/>
+          </a:prstGeom>
+        </p:spPr>
+      </p:pic>
+      <p:sp>
+        <p:nvSpPr>
+          <p:cNvPr id="6" name="2. Subtitle Placeholder">
+            <a:extLst>
+              <a:ext uri="{FF2B5EF4-FFF2-40B4-BE49-F238E27FC236}">
+                <a16:creationId xmlns:a16="http://schemas.microsoft.com/office/drawing/2014/main" id="{1660A225-FE6D-C34F-7BE6-B5ACE68771F7}"/>
+              </a:ext>
+            </a:extLst>
+          </p:cNvPr>
+          <p:cNvSpPr>
+            <a:spLocks noGrp="1"/>
+          </p:cNvSpPr>
+          <p:nvPr>
+            <p:ph type="subTitle" idx="1" hasCustomPrompt="1"/>
+          </p:nvPr>
+        </p:nvSpPr>
+        <p:spPr>
+          <a:xfrm>
+            <a:off x="6407653" y="3707702"/>
+            <a:ext cx="5377951" cy="1655762"/>
+          </a:xfrm>
+          <a:prstGeom prst="rect">
+            <a:avLst/>
+          </a:prstGeom>
+        </p:spPr>
+        <p:txBody>
+          <a:bodyPr>
+            <a:normAutofit/>
+          </a:bodyPr>
+          <a:lstStyle>
+            <a:lvl1pPr marL="0" indent="0" algn="l">
+              <a:lnSpc>
+                <a:spcPct val="100000"/>
+              </a:lnSpc>
+              <a:spcBef>
+                <a:spcPts val="0"/>
+              </a:spcBef>
+              <a:buNone/>
+              <a:defRPr sz="2000">
+                <a:solidFill>
+                  <a:schemeClr val="bg1"/>
+                </a:solidFill>
+              </a:defRPr>
+            </a:lvl1pPr>
+            <a:lvl2pPr marL="457200" indent="0" algn="ctr">
+              <a:buNone/>
+              <a:defRPr sz="2000"/>
+            </a:lvl2pPr>
+            <a:lvl3pPr marL="914400" indent="0" algn="ctr">
+              <a:buNone/>
+              <a:defRPr sz="1800"/>
+            </a:lvl3pPr>
+            <a:lvl4pPr marL="1371600" indent="0" algn="ctr">
+              <a:buNone/>
+              <a:defRPr sz="1600"/>
+            </a:lvl4pPr>
+            <a:lvl5pPr marL="1828800" indent="0" algn="ctr">
+              <a:buNone/>
+              <a:defRPr sz="1600"/>
+            </a:lvl5pPr>
+            <a:lvl6pPr marL="2286000" indent="0" algn="ctr">
+              <a:buNone/>
+              <a:defRPr sz="1600"/>
+            </a:lvl6pPr>
+            <a:lvl7pPr marL="2743200" indent="0" algn="ctr">
+              <a:buNone/>
+              <a:defRPr sz="1600"/>
+            </a:lvl7pPr>
+            <a:lvl8pPr marL="3200400" indent="0" algn="ctr">
+              <a:buNone/>
+              <a:defRPr sz="1600"/>
+            </a:lvl8pPr>
+            <a:lvl9pPr marL="3657600" indent="0" algn="ctr">
+              <a:buNone/>
+              <a:defRPr sz="1600"/>
+            </a:lvl9pPr>
+          </a:lstStyle>
+          <a:p>
+            <a:r>
+              <a:rPr lang="en-GB" dirty="0"/>
+              <a:t>Insert sub copy here.</a:t>
+            </a:r>
+            <a:endParaRPr lang="en-US" dirty="0"/>
+          </a:p>
+        </p:txBody>
+      </p:sp>
+    </p:spTree>
+    <p:extLst>
+      <p:ext uri="{BB962C8B-B14F-4D97-AF65-F5344CB8AC3E}">
+        <p14:creationId xmlns:p14="http://schemas.microsoft.com/office/powerpoint/2010/main" val="3994187330"/>
+      </p:ext>
+    </p:extLst>
+  </p:cSld>
+  <p:clrMapOvr>
+    <a:masterClrMapping/>
+  </p:clrMapOvr>
+</p:sldLayout>
+</file>
+
+<file path=ppt/slideLayouts/slideLayout27.xml><?xml version="1.0" encoding="utf-8"?>
+<p:sldLayout xmlns:a="http://schemas.openxmlformats.org/drawingml/2006/main" xmlns:r="http://schemas.openxmlformats.org/officeDocument/2006/relationships" xmlns:p="http://schemas.openxmlformats.org/presentationml/2006/main" userDrawn="1">
+  <p:cSld name="Dark Divider Slide - 2">
+    <p:bg>
+      <p:bgPr>
+        <a:solidFill>
+          <a:srgbClr val="1B1B1B"/>
+        </a:solidFill>
+        <a:effectLst/>
+      </p:bgPr>
+    </p:bg>
+    <p:spTree>
+      <p:nvGrpSpPr>
+        <p:cNvPr id="1" name=""/>
+        <p:cNvGrpSpPr/>
+        <p:nvPr/>
+      </p:nvGrpSpPr>
+      <p:grpSpPr>
+        <a:xfrm>
+          <a:off x="0" y="0"/>
+          <a:ext cx="0" cy="0"/>
+          <a:chOff x="0" y="0"/>
+          <a:chExt cx="0" cy="0"/>
+        </a:xfrm>
+      </p:grpSpPr>
+      <p:sp>
+        <p:nvSpPr>
+          <p:cNvPr id="5" name="3. Picture Placeholder">
+            <a:extLst>
+              <a:ext uri="{FF2B5EF4-FFF2-40B4-BE49-F238E27FC236}">
+                <a16:creationId xmlns:a16="http://schemas.microsoft.com/office/drawing/2014/main" id="{C4BE638E-576F-FF68-6661-2065A7520713}"/>
+              </a:ext>
+            </a:extLst>
+          </p:cNvPr>
+          <p:cNvSpPr>
+            <a:spLocks noGrp="1"/>
+          </p:cNvSpPr>
+          <p:nvPr>
+            <p:ph type="pic" sz="quarter" idx="10"/>
+          </p:nvPr>
+        </p:nvSpPr>
+        <p:spPr>
+          <a:xfrm>
+            <a:off x="6407650" y="1"/>
+            <a:ext cx="5784349" cy="6858000"/>
+          </a:xfrm>
+        </p:spPr>
+        <p:txBody>
+          <a:bodyPr/>
+          <a:lstStyle>
+            <a:lvl1pPr>
+              <a:defRPr>
+                <a:solidFill>
+                  <a:srgbClr val="FAFAFA"/>
+                </a:solidFill>
+              </a:defRPr>
+            </a:lvl1pPr>
+          </a:lstStyle>
+          <a:p>
+            <a:r>
+              <a:rPr lang="en-GB"/>
+              <a:t>Click icon to add picture</a:t>
+            </a:r>
+            <a:endParaRPr lang="en-US" dirty="0"/>
+          </a:p>
+        </p:txBody>
+      </p:sp>
+      <p:sp>
+        <p:nvSpPr>
+          <p:cNvPr id="3" name="1. Title Placeholder">
+            <a:extLst>
+              <a:ext uri="{FF2B5EF4-FFF2-40B4-BE49-F238E27FC236}">
+                <a16:creationId xmlns:a16="http://schemas.microsoft.com/office/drawing/2014/main" id="{B7F235D6-4347-D7AC-BFE0-1EA4849BA5F6}"/>
+              </a:ext>
+            </a:extLst>
+          </p:cNvPr>
+          <p:cNvSpPr>
+            <a:spLocks noGrp="1"/>
+          </p:cNvSpPr>
+          <p:nvPr>
+            <p:ph type="ctrTitle" hasCustomPrompt="1"/>
+          </p:nvPr>
+        </p:nvSpPr>
+        <p:spPr>
+          <a:xfrm>
+            <a:off x="406400" y="1603450"/>
+            <a:ext cx="5377951" cy="1680537"/>
+          </a:xfrm>
+          <a:prstGeom prst="rect">
+            <a:avLst/>
+          </a:prstGeom>
+        </p:spPr>
+        <p:txBody>
+          <a:bodyPr anchor="b"/>
+          <a:lstStyle>
+            <a:lvl1pPr algn="l">
+              <a:lnSpc>
+                <a:spcPts val="5400"/>
+              </a:lnSpc>
+              <a:defRPr sz="6000">
+                <a:solidFill>
+                  <a:srgbClr val="FAFAFA"/>
+                </a:solidFill>
+              </a:defRPr>
+            </a:lvl1pPr>
+          </a:lstStyle>
+          <a:p>
+            <a:r>
+              <a:rPr lang="en-GB" dirty="0"/>
+              <a:t>Insert </a:t>
+            </a:r>
+            <a:br>
+              <a:rPr lang="en-GB" dirty="0"/>
+            </a:br>
+            <a:r>
+              <a:rPr lang="en-GB" dirty="0"/>
+              <a:t>headline here.</a:t>
+            </a:r>
+            <a:endParaRPr lang="en-US" dirty="0"/>
+          </a:p>
+        </p:txBody>
+      </p:sp>
+      <p:pic>
+        <p:nvPicPr>
+          <p:cNvPr id="2" name="Picture 1" descr="A black and white sign with white text&#10;&#10;Description automatically generated">
+            <a:extLst>
+              <a:ext uri="{FF2B5EF4-FFF2-40B4-BE49-F238E27FC236}">
+                <a16:creationId xmlns:a16="http://schemas.microsoft.com/office/drawing/2014/main" id="{A08E24DA-E0F6-39B3-A8F3-68CC58F45DFD}"/>
+              </a:ext>
+            </a:extLst>
+          </p:cNvPr>
+          <p:cNvPicPr>
+            <a:picLocks noChangeAspect="1"/>
+          </p:cNvPicPr>
+          <p:nvPr/>
+        </p:nvPicPr>
+        <p:blipFill>
+          <a:blip r:embed="rId2" cstate="hqprint">
+            <a:extLst>
+              <a:ext uri="{28A0092B-C50C-407E-A947-70E740481C1C}">
+                <a14:useLocalDpi xmlns:a14="http://schemas.microsoft.com/office/drawing/2010/main"/>
+              </a:ext>
+            </a:extLst>
+          </a:blip>
+          <a:stretch>
+            <a:fillRect/>
+          </a:stretch>
+        </p:blipFill>
+        <p:spPr>
+          <a:xfrm>
+            <a:off x="406400" y="5822539"/>
+            <a:ext cx="1953808" cy="497017"/>
+          </a:xfrm>
+          <a:prstGeom prst="rect">
+            <a:avLst/>
+          </a:prstGeom>
+        </p:spPr>
+      </p:pic>
+      <p:sp>
+        <p:nvSpPr>
+          <p:cNvPr id="4" name="2. Subtitle Placeholder">
+            <a:extLst>
+              <a:ext uri="{FF2B5EF4-FFF2-40B4-BE49-F238E27FC236}">
+                <a16:creationId xmlns:a16="http://schemas.microsoft.com/office/drawing/2014/main" id="{4D08B0F8-A772-D5DC-A249-B09F62A06486}"/>
+              </a:ext>
+            </a:extLst>
+          </p:cNvPr>
+          <p:cNvSpPr>
+            <a:spLocks noGrp="1"/>
+          </p:cNvSpPr>
+          <p:nvPr>
+            <p:ph type="subTitle" idx="1" hasCustomPrompt="1"/>
+          </p:nvPr>
+        </p:nvSpPr>
+        <p:spPr>
+          <a:xfrm>
+            <a:off x="406400" y="3707702"/>
+            <a:ext cx="5377951" cy="1655762"/>
+          </a:xfrm>
+          <a:prstGeom prst="rect">
+            <a:avLst/>
+          </a:prstGeom>
+        </p:spPr>
+        <p:txBody>
+          <a:bodyPr>
+            <a:normAutofit/>
+          </a:bodyPr>
+          <a:lstStyle>
+            <a:lvl1pPr marL="0" indent="0" algn="l">
+              <a:lnSpc>
+                <a:spcPct val="100000"/>
+              </a:lnSpc>
+              <a:spcBef>
+                <a:spcPts val="0"/>
+              </a:spcBef>
+              <a:buNone/>
+              <a:defRPr sz="2000">
+                <a:solidFill>
+                  <a:schemeClr val="bg1"/>
+                </a:solidFill>
+              </a:defRPr>
+            </a:lvl1pPr>
+            <a:lvl2pPr marL="457200" indent="0" algn="ctr">
+              <a:buNone/>
+              <a:defRPr sz="2000"/>
+            </a:lvl2pPr>
+            <a:lvl3pPr marL="914400" indent="0" algn="ctr">
+              <a:buNone/>
+              <a:defRPr sz="1800"/>
+            </a:lvl3pPr>
+            <a:lvl4pPr marL="1371600" indent="0" algn="ctr">
+              <a:buNone/>
+              <a:defRPr sz="1600"/>
+            </a:lvl4pPr>
+            <a:lvl5pPr marL="1828800" indent="0" algn="ctr">
+              <a:buNone/>
+              <a:defRPr sz="1600"/>
+            </a:lvl5pPr>
+            <a:lvl6pPr marL="2286000" indent="0" algn="ctr">
+              <a:buNone/>
+              <a:defRPr sz="1600"/>
+            </a:lvl6pPr>
+            <a:lvl7pPr marL="2743200" indent="0" algn="ctr">
+              <a:buNone/>
+              <a:defRPr sz="1600"/>
+            </a:lvl7pPr>
+            <a:lvl8pPr marL="3200400" indent="0" algn="ctr">
+              <a:buNone/>
+              <a:defRPr sz="1600"/>
+            </a:lvl8pPr>
+            <a:lvl9pPr marL="3657600" indent="0" algn="ctr">
+              <a:buNone/>
+              <a:defRPr sz="1600"/>
+            </a:lvl9pPr>
+          </a:lstStyle>
+          <a:p>
+            <a:r>
+              <a:rPr lang="en-GB" dirty="0"/>
+              <a:t>Insert sub copy here.</a:t>
+            </a:r>
+            <a:endParaRPr lang="en-US" dirty="0"/>
+          </a:p>
+        </p:txBody>
+      </p:sp>
+    </p:spTree>
+    <p:extLst>
+      <p:ext uri="{BB962C8B-B14F-4D97-AF65-F5344CB8AC3E}">
+        <p14:creationId xmlns:p14="http://schemas.microsoft.com/office/powerpoint/2010/main" val="2192065119"/>
+      </p:ext>
+    </p:extLst>
+  </p:cSld>
+  <p:clrMapOvr>
+    <a:masterClrMapping/>
+  </p:clrMapOvr>
+</p:sldLayout>
+</file>
+
+<file path=ppt/slideLayouts/slideLayout28.xml><?xml version="1.0" encoding="utf-8"?>
+<p:sldLayout xmlns:a="http://schemas.openxmlformats.org/drawingml/2006/main" xmlns:r="http://schemas.openxmlformats.org/officeDocument/2006/relationships" xmlns:p="http://schemas.openxmlformats.org/presentationml/2006/main" userDrawn="1">
+  <p:cSld name="Dark Divider Slide - 1">
+    <p:bg>
+      <p:bgPr>
+        <a:solidFill>
+          <a:srgbClr val="1B1B1B"/>
+        </a:solidFill>
+        <a:effectLst/>
+      </p:bgPr>
+    </p:bg>
+    <p:spTree>
+      <p:nvGrpSpPr>
+        <p:cNvPr id="1" name=""/>
+        <p:cNvGrpSpPr/>
+        <p:nvPr/>
+      </p:nvGrpSpPr>
+      <p:grpSpPr>
+        <a:xfrm>
+          <a:off x="0" y="0"/>
+          <a:ext cx="0" cy="0"/>
+          <a:chOff x="0" y="0"/>
+          <a:chExt cx="0" cy="0"/>
+        </a:xfrm>
+      </p:grpSpPr>
+      <p:sp>
+        <p:nvSpPr>
+          <p:cNvPr id="3" name="1. Title Placeholder">
+            <a:extLst>
+              <a:ext uri="{FF2B5EF4-FFF2-40B4-BE49-F238E27FC236}">
+                <a16:creationId xmlns:a16="http://schemas.microsoft.com/office/drawing/2014/main" id="{B7F235D6-4347-D7AC-BFE0-1EA4849BA5F6}"/>
+              </a:ext>
+            </a:extLst>
+          </p:cNvPr>
+          <p:cNvSpPr>
+            <a:spLocks noGrp="1"/>
+          </p:cNvSpPr>
+          <p:nvPr>
+            <p:ph type="ctrTitle" hasCustomPrompt="1"/>
+          </p:nvPr>
+        </p:nvSpPr>
+        <p:spPr>
+          <a:xfrm>
+            <a:off x="406400" y="617736"/>
+            <a:ext cx="6353996" cy="1505895"/>
+          </a:xfrm>
+          <a:prstGeom prst="rect">
+            <a:avLst/>
+          </a:prstGeom>
+        </p:spPr>
+        <p:txBody>
+          <a:bodyPr anchor="b"/>
+          <a:lstStyle>
+            <a:lvl1pPr algn="l">
+              <a:lnSpc>
+                <a:spcPts val="5400"/>
+              </a:lnSpc>
+              <a:defRPr sz="6000">
+                <a:solidFill>
+                  <a:srgbClr val="FAFAFA"/>
+                </a:solidFill>
+              </a:defRPr>
+            </a:lvl1pPr>
+          </a:lstStyle>
+          <a:p>
+            <a:r>
+              <a:rPr lang="en-GB" dirty="0"/>
+              <a:t>Insert </a:t>
+            </a:r>
+            <a:br>
+              <a:rPr lang="en-GB" dirty="0"/>
+            </a:br>
+            <a:r>
+              <a:rPr lang="en-GB" dirty="0"/>
+              <a:t>headline here.</a:t>
+            </a:r>
+            <a:endParaRPr lang="en-US" dirty="0"/>
+          </a:p>
+        </p:txBody>
+      </p:sp>
+      <p:sp>
+        <p:nvSpPr>
+          <p:cNvPr id="5" name="3. Picture Placeholder">
+            <a:extLst>
+              <a:ext uri="{FF2B5EF4-FFF2-40B4-BE49-F238E27FC236}">
+                <a16:creationId xmlns:a16="http://schemas.microsoft.com/office/drawing/2014/main" id="{C4BE638E-576F-FF68-6661-2065A7520713}"/>
+              </a:ext>
+            </a:extLst>
+          </p:cNvPr>
+          <p:cNvSpPr>
+            <a:spLocks noGrp="1"/>
+          </p:cNvSpPr>
+          <p:nvPr>
+            <p:ph type="pic" sz="quarter" idx="10"/>
+          </p:nvPr>
+        </p:nvSpPr>
+        <p:spPr>
+          <a:xfrm>
+            <a:off x="0" y="3852863"/>
+            <a:ext cx="12192000" cy="3005137"/>
+          </a:xfrm>
+        </p:spPr>
+        <p:txBody>
+          <a:bodyPr/>
+          <a:lstStyle>
+            <a:lvl1pPr>
+              <a:defRPr>
+                <a:solidFill>
+                  <a:srgbClr val="FAFAFA"/>
+                </a:solidFill>
+              </a:defRPr>
+            </a:lvl1pPr>
+          </a:lstStyle>
+          <a:p>
+            <a:r>
+              <a:rPr lang="en-GB"/>
+              <a:t>Click icon to add picture</a:t>
+            </a:r>
+            <a:endParaRPr lang="en-US" dirty="0"/>
+          </a:p>
+        </p:txBody>
+      </p:sp>
+      <p:pic>
+        <p:nvPicPr>
+          <p:cNvPr id="4" name="Picture 3" descr="A black and white sign with white text&#10;&#10;Description automatically generated">
+            <a:extLst>
+              <a:ext uri="{FF2B5EF4-FFF2-40B4-BE49-F238E27FC236}">
+                <a16:creationId xmlns:a16="http://schemas.microsoft.com/office/drawing/2014/main" id="{B60C4C52-9135-6A73-6513-3DC666671DAB}"/>
+              </a:ext>
+            </a:extLst>
+          </p:cNvPr>
+          <p:cNvPicPr>
+            <a:picLocks noChangeAspect="1"/>
+          </p:cNvPicPr>
+          <p:nvPr/>
+        </p:nvPicPr>
+        <p:blipFill>
+          <a:blip r:embed="rId2" cstate="hqprint">
+            <a:extLst>
+              <a:ext uri="{28A0092B-C50C-407E-A947-70E740481C1C}">
+                <a14:useLocalDpi xmlns:a14="http://schemas.microsoft.com/office/drawing/2010/main"/>
+              </a:ext>
+            </a:extLst>
+          </a:blip>
+          <a:stretch>
+            <a:fillRect/>
+          </a:stretch>
+        </p:blipFill>
+        <p:spPr>
+          <a:xfrm>
+            <a:off x="9735021" y="617736"/>
+            <a:ext cx="1953808" cy="497017"/>
+          </a:xfrm>
+          <a:prstGeom prst="rect">
+            <a:avLst/>
+          </a:prstGeom>
+        </p:spPr>
+      </p:pic>
+      <p:sp>
+        <p:nvSpPr>
+          <p:cNvPr id="6" name="2. Subtitle Placeholder">
+            <a:extLst>
+              <a:ext uri="{FF2B5EF4-FFF2-40B4-BE49-F238E27FC236}">
+                <a16:creationId xmlns:a16="http://schemas.microsoft.com/office/drawing/2014/main" id="{45F6EDF8-CE70-0D70-2DBA-A1956B6C0B35}"/>
+              </a:ext>
+            </a:extLst>
+          </p:cNvPr>
+          <p:cNvSpPr>
+            <a:spLocks noGrp="1"/>
+          </p:cNvSpPr>
+          <p:nvPr>
+            <p:ph type="subTitle" idx="1" hasCustomPrompt="1"/>
+          </p:nvPr>
+        </p:nvSpPr>
+        <p:spPr>
+          <a:xfrm>
+            <a:off x="406400" y="2211993"/>
+            <a:ext cx="6353996" cy="1369407"/>
+          </a:xfrm>
+          <a:prstGeom prst="rect">
+            <a:avLst/>
+          </a:prstGeom>
+        </p:spPr>
+        <p:txBody>
+          <a:bodyPr>
+            <a:normAutofit/>
+          </a:bodyPr>
+          <a:lstStyle>
+            <a:lvl1pPr marL="0" indent="0" algn="l">
+              <a:lnSpc>
+                <a:spcPct val="100000"/>
+              </a:lnSpc>
+              <a:spcBef>
+                <a:spcPts val="0"/>
+              </a:spcBef>
+              <a:buNone/>
+              <a:defRPr sz="2000">
+                <a:solidFill>
+                  <a:schemeClr val="bg1"/>
+                </a:solidFill>
+              </a:defRPr>
+            </a:lvl1pPr>
+            <a:lvl2pPr marL="457200" indent="0" algn="ctr">
+              <a:buNone/>
+              <a:defRPr sz="2000"/>
+            </a:lvl2pPr>
+            <a:lvl3pPr marL="914400" indent="0" algn="ctr">
+              <a:buNone/>
+              <a:defRPr sz="1800"/>
+            </a:lvl3pPr>
+            <a:lvl4pPr marL="1371600" indent="0" algn="ctr">
+              <a:buNone/>
+              <a:defRPr sz="1600"/>
+            </a:lvl4pPr>
+            <a:lvl5pPr marL="1828800" indent="0" algn="ctr">
+              <a:buNone/>
+              <a:defRPr sz="1600"/>
+            </a:lvl5pPr>
+            <a:lvl6pPr marL="2286000" indent="0" algn="ctr">
+              <a:buNone/>
+              <a:defRPr sz="1600"/>
+            </a:lvl6pPr>
+            <a:lvl7pPr marL="2743200" indent="0" algn="ctr">
+              <a:buNone/>
+              <a:defRPr sz="1600"/>
+            </a:lvl7pPr>
+            <a:lvl8pPr marL="3200400" indent="0" algn="ctr">
+              <a:buNone/>
+              <a:defRPr sz="1600"/>
+            </a:lvl8pPr>
+            <a:lvl9pPr marL="3657600" indent="0" algn="ctr">
+              <a:buNone/>
+              <a:defRPr sz="1600"/>
+            </a:lvl9pPr>
+          </a:lstStyle>
+          <a:p>
+            <a:r>
+              <a:rPr lang="en-GB" dirty="0"/>
+              <a:t>Insert sub copy here.</a:t>
+            </a:r>
+            <a:endParaRPr lang="en-US" dirty="0"/>
+          </a:p>
+        </p:txBody>
+      </p:sp>
+    </p:spTree>
+    <p:extLst>
+      <p:ext uri="{BB962C8B-B14F-4D97-AF65-F5344CB8AC3E}">
+        <p14:creationId xmlns:p14="http://schemas.microsoft.com/office/powerpoint/2010/main" val="1497779644"/>
       </p:ext>
     </p:extLst>
   </p:cSld>
@@ -1397,7 +6425,7 @@
           <a:p>
             <a:fld id="{CEEBFD85-82E7-47E4-885E-AE80971B230E}" type="datetimeFigureOut">
               <a:rPr lang="en-GB" smtClean="0"/>
-              <a:t>29/01/2026</a:t>
+              <a:t>03/03/2026</a:t>
             </a:fld>
             <a:endParaRPr lang="en-GB"/>
           </a:p>
@@ -1662,7 +6690,7 @@
           <a:p>
             <a:fld id="{CEEBFD85-82E7-47E4-885E-AE80971B230E}" type="datetimeFigureOut">
               <a:rPr lang="en-GB" smtClean="0"/>
-              <a:t>29/01/2026</a:t>
+              <a:t>03/03/2026</a:t>
             </a:fld>
             <a:endParaRPr lang="en-GB"/>
           </a:p>
@@ -2074,7 +7102,7 @@
           <a:p>
             <a:fld id="{CEEBFD85-82E7-47E4-885E-AE80971B230E}" type="datetimeFigureOut">
               <a:rPr lang="en-GB" smtClean="0"/>
-              <a:t>29/01/2026</a:t>
+              <a:t>03/03/2026</a:t>
             </a:fld>
             <a:endParaRPr lang="en-GB"/>
           </a:p>
@@ -2215,7 +7243,7 @@
           <a:p>
             <a:fld id="{CEEBFD85-82E7-47E4-885E-AE80971B230E}" type="datetimeFigureOut">
               <a:rPr lang="en-GB" smtClean="0"/>
-              <a:t>29/01/2026</a:t>
+              <a:t>03/03/2026</a:t>
             </a:fld>
             <a:endParaRPr lang="en-GB"/>
           </a:p>
@@ -2328,7 +7356,7 @@
           <a:p>
             <a:fld id="{CEEBFD85-82E7-47E4-885E-AE80971B230E}" type="datetimeFigureOut">
               <a:rPr lang="en-GB" smtClean="0"/>
-              <a:t>29/01/2026</a:t>
+              <a:t>03/03/2026</a:t>
             </a:fld>
             <a:endParaRPr lang="en-GB"/>
           </a:p>
@@ -2639,7 +7667,7 @@
           <a:p>
             <a:fld id="{CEEBFD85-82E7-47E4-885E-AE80971B230E}" type="datetimeFigureOut">
               <a:rPr lang="en-GB" smtClean="0"/>
-              <a:t>29/01/2026</a:t>
+              <a:t>03/03/2026</a:t>
             </a:fld>
             <a:endParaRPr lang="en-GB"/>
           </a:p>
@@ -2927,7 +7955,7 @@
           <a:p>
             <a:fld id="{CEEBFD85-82E7-47E4-885E-AE80971B230E}" type="datetimeFigureOut">
               <a:rPr lang="en-GB" smtClean="0"/>
-              <a:t>29/01/2026</a:t>
+              <a:t>03/03/2026</a:t>
             </a:fld>
             <a:endParaRPr lang="en-GB"/>
           </a:p>
@@ -3168,7 +8196,7 @@
           <a:p>
             <a:fld id="{CEEBFD85-82E7-47E4-885E-AE80971B230E}" type="datetimeFigureOut">
               <a:rPr lang="en-GB" smtClean="0"/>
-              <a:t>29/01/2026</a:t>
+              <a:t>03/03/2026</a:t>
             </a:fld>
             <a:endParaRPr lang="en-GB"/>
           </a:p>
@@ -3568,6 +8596,448 @@
 </p:sldMaster>
 </file>
 
+<file path=ppt/slideMasters/slideMaster2.xml><?xml version="1.0" encoding="utf-8"?>
+<p:sldMaster xmlns:a="http://schemas.openxmlformats.org/drawingml/2006/main" xmlns:r="http://schemas.openxmlformats.org/officeDocument/2006/relationships" xmlns:p="http://schemas.openxmlformats.org/presentationml/2006/main">
+  <p:cSld>
+    <p:bg>
+      <p:bgPr>
+        <a:solidFill>
+          <a:srgbClr val="FAFAFA"/>
+        </a:solidFill>
+        <a:effectLst/>
+      </p:bgPr>
+    </p:bg>
+    <p:spTree>
+      <p:nvGrpSpPr>
+        <p:cNvPr id="1" name=""/>
+        <p:cNvGrpSpPr/>
+        <p:nvPr/>
+      </p:nvGrpSpPr>
+      <p:grpSpPr>
+        <a:xfrm>
+          <a:off x="0" y="0"/>
+          <a:ext cx="0" cy="0"/>
+          <a:chOff x="0" y="0"/>
+          <a:chExt cx="0" cy="0"/>
+        </a:xfrm>
+      </p:grpSpPr>
+      <p:sp>
+        <p:nvSpPr>
+          <p:cNvPr id="2" name="Title Placeholder 1">
+            <a:extLst>
+              <a:ext uri="{FF2B5EF4-FFF2-40B4-BE49-F238E27FC236}">
+                <a16:creationId xmlns:a16="http://schemas.microsoft.com/office/drawing/2014/main" id="{BC4C08AA-2148-527A-BB20-1D271A404421}"/>
+              </a:ext>
+            </a:extLst>
+          </p:cNvPr>
+          <p:cNvSpPr>
+            <a:spLocks noGrp="1"/>
+          </p:cNvSpPr>
+          <p:nvPr>
+            <p:ph type="title"/>
+          </p:nvPr>
+        </p:nvSpPr>
+        <p:spPr>
+          <a:xfrm>
+            <a:off x="502920" y="437430"/>
+            <a:ext cx="10515600" cy="478155"/>
+          </a:xfrm>
+          <a:prstGeom prst="rect">
+            <a:avLst/>
+          </a:prstGeom>
+        </p:spPr>
+        <p:txBody>
+          <a:bodyPr vert="horz" lIns="91440" tIns="45720" rIns="91440" bIns="45720" rtlCol="0" anchor="ctr">
+            <a:noAutofit/>
+          </a:bodyPr>
+          <a:lstStyle/>
+          <a:p>
+            <a:r>
+              <a:rPr lang="en-GB"/>
+              <a:t>Click to edit Master title style</a:t>
+            </a:r>
+            <a:endParaRPr lang="en-US" dirty="0"/>
+          </a:p>
+        </p:txBody>
+      </p:sp>
+      <p:sp>
+        <p:nvSpPr>
+          <p:cNvPr id="3" name="Text Placeholder 2">
+            <a:extLst>
+              <a:ext uri="{FF2B5EF4-FFF2-40B4-BE49-F238E27FC236}">
+                <a16:creationId xmlns:a16="http://schemas.microsoft.com/office/drawing/2014/main" id="{C69797B6-4643-3710-FBDF-B4E98217FBDB}"/>
+              </a:ext>
+            </a:extLst>
+          </p:cNvPr>
+          <p:cNvSpPr>
+            <a:spLocks noGrp="1"/>
+          </p:cNvSpPr>
+          <p:nvPr>
+            <p:ph type="body" idx="1"/>
+          </p:nvPr>
+        </p:nvSpPr>
+        <p:spPr>
+          <a:xfrm>
+            <a:off x="502920" y="1347469"/>
+            <a:ext cx="10515600" cy="4829494"/>
+          </a:xfrm>
+          <a:prstGeom prst="rect">
+            <a:avLst/>
+          </a:prstGeom>
+        </p:spPr>
+        <p:txBody>
+          <a:bodyPr vert="horz" lIns="91440" tIns="45720" rIns="91440" bIns="45720" rtlCol="0">
+            <a:normAutofit/>
+          </a:bodyPr>
+          <a:lstStyle/>
+          <a:p>
+            <a:pPr lvl="0"/>
+            <a:r>
+              <a:rPr lang="en-GB"/>
+              <a:t>Click to edit Master text styles</a:t>
+            </a:r>
+          </a:p>
+          <a:p>
+            <a:pPr lvl="1"/>
+            <a:r>
+              <a:rPr lang="en-GB"/>
+              <a:t>Second level</a:t>
+            </a:r>
+          </a:p>
+          <a:p>
+            <a:pPr lvl="2"/>
+            <a:r>
+              <a:rPr lang="en-GB"/>
+              <a:t>Third level</a:t>
+            </a:r>
+          </a:p>
+          <a:p>
+            <a:pPr lvl="3"/>
+            <a:r>
+              <a:rPr lang="en-GB"/>
+              <a:t>Fourth level</a:t>
+            </a:r>
+          </a:p>
+          <a:p>
+            <a:pPr lvl="4"/>
+            <a:r>
+              <a:rPr lang="en-GB"/>
+              <a:t>Fifth level</a:t>
+            </a:r>
+            <a:endParaRPr lang="en-US"/>
+          </a:p>
+        </p:txBody>
+      </p:sp>
+    </p:spTree>
+    <p:extLst>
+      <p:ext uri="{BB962C8B-B14F-4D97-AF65-F5344CB8AC3E}">
+        <p14:creationId xmlns:p14="http://schemas.microsoft.com/office/powerpoint/2010/main" val="3107132558"/>
+      </p:ext>
+    </p:extLst>
+  </p:cSld>
+  <p:clrMap bg1="lt1" tx1="dk1" bg2="lt2" tx2="dk2" accent1="accent1" accent2="accent2" accent3="accent3" accent4="accent4" accent5="accent5" accent6="accent6" hlink="hlink" folHlink="folHlink"/>
+  <p:sldLayoutIdLst>
+    <p:sldLayoutId id="2147483661" r:id="rId1"/>
+    <p:sldLayoutId id="2147483662" r:id="rId2"/>
+    <p:sldLayoutId id="2147483663" r:id="rId3"/>
+    <p:sldLayoutId id="2147483664" r:id="rId4"/>
+    <p:sldLayoutId id="2147483665" r:id="rId5"/>
+    <p:sldLayoutId id="2147483666" r:id="rId6"/>
+    <p:sldLayoutId id="2147483667" r:id="rId7"/>
+    <p:sldLayoutId id="2147483668" r:id="rId8"/>
+    <p:sldLayoutId id="2147483669" r:id="rId9"/>
+    <p:sldLayoutId id="2147483670" r:id="rId10"/>
+    <p:sldLayoutId id="2147483671" r:id="rId11"/>
+    <p:sldLayoutId id="2147483672" r:id="rId12"/>
+    <p:sldLayoutId id="2147483673" r:id="rId13"/>
+    <p:sldLayoutId id="2147483674" r:id="rId14"/>
+    <p:sldLayoutId id="2147483675" r:id="rId15"/>
+    <p:sldLayoutId id="2147483676" r:id="rId16"/>
+    <p:sldLayoutId id="2147483677" r:id="rId17"/>
+  </p:sldLayoutIdLst>
+  <p:txStyles>
+    <p:titleStyle>
+      <a:lvl1pPr algn="l" defTabSz="914400" rtl="0" eaLnBrk="1" latinLnBrk="0" hangingPunct="1">
+        <a:lnSpc>
+          <a:spcPct val="90000"/>
+        </a:lnSpc>
+        <a:spcBef>
+          <a:spcPct val="0"/>
+        </a:spcBef>
+        <a:buNone/>
+        <a:defRPr sz="4000" kern="1200">
+          <a:solidFill>
+            <a:srgbClr val="1B1B1B"/>
+          </a:solidFill>
+          <a:latin typeface="Times New Roman" panose="02020603050405020304" pitchFamily="18" charset="0"/>
+          <a:ea typeface="+mj-ea"/>
+          <a:cs typeface="Times New Roman" panose="02020603050405020304" pitchFamily="18" charset="0"/>
+        </a:defRPr>
+      </a:lvl1pPr>
+    </p:titleStyle>
+    <p:bodyStyle>
+      <a:lvl1pPr marL="0" indent="0" algn="l" defTabSz="914400" rtl="0" eaLnBrk="1" latinLnBrk="0" hangingPunct="1">
+        <a:lnSpc>
+          <a:spcPct val="90000"/>
+        </a:lnSpc>
+        <a:spcBef>
+          <a:spcPts val="1000"/>
+        </a:spcBef>
+        <a:buFont typeface="Arial" panose="020B0604020202020204" pitchFamily="34" charset="0"/>
+        <a:buNone/>
+        <a:defRPr sz="2400" kern="1200">
+          <a:solidFill>
+            <a:srgbClr val="1B1B1B"/>
+          </a:solidFill>
+          <a:latin typeface="Arial" panose="020B0604020202020204" pitchFamily="34" charset="0"/>
+          <a:ea typeface="+mn-ea"/>
+          <a:cs typeface="Arial" panose="020B0604020202020204" pitchFamily="34" charset="0"/>
+        </a:defRPr>
+      </a:lvl1pPr>
+      <a:lvl2pPr marL="457200" indent="0" algn="l" defTabSz="914400" rtl="0" eaLnBrk="1" latinLnBrk="0" hangingPunct="1">
+        <a:lnSpc>
+          <a:spcPct val="90000"/>
+        </a:lnSpc>
+        <a:spcBef>
+          <a:spcPts val="500"/>
+        </a:spcBef>
+        <a:buFont typeface="Arial" panose="020B0604020202020204" pitchFamily="34" charset="0"/>
+        <a:buNone/>
+        <a:defRPr sz="2000" kern="1200">
+          <a:solidFill>
+            <a:srgbClr val="1B1B1B"/>
+          </a:solidFill>
+          <a:latin typeface="Arial" panose="020B0604020202020204" pitchFamily="34" charset="0"/>
+          <a:ea typeface="+mn-ea"/>
+          <a:cs typeface="Arial" panose="020B0604020202020204" pitchFamily="34" charset="0"/>
+        </a:defRPr>
+      </a:lvl2pPr>
+      <a:lvl3pPr marL="914400" indent="0" algn="l" defTabSz="914400" rtl="0" eaLnBrk="1" latinLnBrk="0" hangingPunct="1">
+        <a:lnSpc>
+          <a:spcPct val="90000"/>
+        </a:lnSpc>
+        <a:spcBef>
+          <a:spcPts val="500"/>
+        </a:spcBef>
+        <a:buFont typeface="Arial" panose="020B0604020202020204" pitchFamily="34" charset="0"/>
+        <a:buNone/>
+        <a:defRPr sz="1800" kern="1200">
+          <a:solidFill>
+            <a:srgbClr val="1B1B1B"/>
+          </a:solidFill>
+          <a:latin typeface="Arial" panose="020B0604020202020204" pitchFamily="34" charset="0"/>
+          <a:ea typeface="+mn-ea"/>
+          <a:cs typeface="Arial" panose="020B0604020202020204" pitchFamily="34" charset="0"/>
+        </a:defRPr>
+      </a:lvl3pPr>
+      <a:lvl4pPr marL="1371600" indent="0" algn="l" defTabSz="914400" rtl="0" eaLnBrk="1" latinLnBrk="0" hangingPunct="1">
+        <a:lnSpc>
+          <a:spcPct val="90000"/>
+        </a:lnSpc>
+        <a:spcBef>
+          <a:spcPts val="500"/>
+        </a:spcBef>
+        <a:buFont typeface="Arial" panose="020B0604020202020204" pitchFamily="34" charset="0"/>
+        <a:buNone/>
+        <a:defRPr sz="1600" kern="1200">
+          <a:solidFill>
+            <a:srgbClr val="1B1B1B"/>
+          </a:solidFill>
+          <a:latin typeface="Arial" panose="020B0604020202020204" pitchFamily="34" charset="0"/>
+          <a:ea typeface="+mn-ea"/>
+          <a:cs typeface="Arial" panose="020B0604020202020204" pitchFamily="34" charset="0"/>
+        </a:defRPr>
+      </a:lvl4pPr>
+      <a:lvl5pPr marL="1828800" indent="0" algn="l" defTabSz="914400" rtl="0" eaLnBrk="1" latinLnBrk="0" hangingPunct="1">
+        <a:lnSpc>
+          <a:spcPct val="90000"/>
+        </a:lnSpc>
+        <a:spcBef>
+          <a:spcPts val="500"/>
+        </a:spcBef>
+        <a:buFont typeface="Arial" panose="020B0604020202020204" pitchFamily="34" charset="0"/>
+        <a:buNone/>
+        <a:defRPr sz="1600" kern="1200">
+          <a:solidFill>
+            <a:srgbClr val="1B1B1B"/>
+          </a:solidFill>
+          <a:latin typeface="Arial" panose="020B0604020202020204" pitchFamily="34" charset="0"/>
+          <a:ea typeface="+mn-ea"/>
+          <a:cs typeface="Arial" panose="020B0604020202020204" pitchFamily="34" charset="0"/>
+        </a:defRPr>
+      </a:lvl5pPr>
+      <a:lvl6pPr marL="2514600" indent="-228600" algn="l" defTabSz="914400" rtl="0" eaLnBrk="1" latinLnBrk="0" hangingPunct="1">
+        <a:lnSpc>
+          <a:spcPct val="90000"/>
+        </a:lnSpc>
+        <a:spcBef>
+          <a:spcPts val="500"/>
+        </a:spcBef>
+        <a:buFont typeface="Arial" panose="020B0604020202020204" pitchFamily="34" charset="0"/>
+        <a:buChar char="•"/>
+        <a:defRPr sz="1800" kern="1200">
+          <a:solidFill>
+            <a:schemeClr val="tx1"/>
+          </a:solidFill>
+          <a:latin typeface="+mn-lt"/>
+          <a:ea typeface="+mn-ea"/>
+          <a:cs typeface="+mn-cs"/>
+        </a:defRPr>
+      </a:lvl6pPr>
+      <a:lvl7pPr marL="2971800" indent="-228600" algn="l" defTabSz="914400" rtl="0" eaLnBrk="1" latinLnBrk="0" hangingPunct="1">
+        <a:lnSpc>
+          <a:spcPct val="90000"/>
+        </a:lnSpc>
+        <a:spcBef>
+          <a:spcPts val="500"/>
+        </a:spcBef>
+        <a:buFont typeface="Arial" panose="020B0604020202020204" pitchFamily="34" charset="0"/>
+        <a:buChar char="•"/>
+        <a:defRPr sz="1800" kern="1200">
+          <a:solidFill>
+            <a:schemeClr val="tx1"/>
+          </a:solidFill>
+          <a:latin typeface="+mn-lt"/>
+          <a:ea typeface="+mn-ea"/>
+          <a:cs typeface="+mn-cs"/>
+        </a:defRPr>
+      </a:lvl7pPr>
+      <a:lvl8pPr marL="3429000" indent="-228600" algn="l" defTabSz="914400" rtl="0" eaLnBrk="1" latinLnBrk="0" hangingPunct="1">
+        <a:lnSpc>
+          <a:spcPct val="90000"/>
+        </a:lnSpc>
+        <a:spcBef>
+          <a:spcPts val="500"/>
+        </a:spcBef>
+        <a:buFont typeface="Arial" panose="020B0604020202020204" pitchFamily="34" charset="0"/>
+        <a:buChar char="•"/>
+        <a:defRPr sz="1800" kern="1200">
+          <a:solidFill>
+            <a:schemeClr val="tx1"/>
+          </a:solidFill>
+          <a:latin typeface="+mn-lt"/>
+          <a:ea typeface="+mn-ea"/>
+          <a:cs typeface="+mn-cs"/>
+        </a:defRPr>
+      </a:lvl8pPr>
+      <a:lvl9pPr marL="3886200" indent="-228600" algn="l" defTabSz="914400" rtl="0" eaLnBrk="1" latinLnBrk="0" hangingPunct="1">
+        <a:lnSpc>
+          <a:spcPct val="90000"/>
+        </a:lnSpc>
+        <a:spcBef>
+          <a:spcPts val="500"/>
+        </a:spcBef>
+        <a:buFont typeface="Arial" panose="020B0604020202020204" pitchFamily="34" charset="0"/>
+        <a:buChar char="•"/>
+        <a:defRPr sz="1800" kern="1200">
+          <a:solidFill>
+            <a:schemeClr val="tx1"/>
+          </a:solidFill>
+          <a:latin typeface="+mn-lt"/>
+          <a:ea typeface="+mn-ea"/>
+          <a:cs typeface="+mn-cs"/>
+        </a:defRPr>
+      </a:lvl9pPr>
+    </p:bodyStyle>
+    <p:otherStyle>
+      <a:defPPr>
+        <a:defRPr lang="en-US"/>
+      </a:defPPr>
+      <a:lvl1pPr marL="0" algn="l" defTabSz="914400" rtl="0" eaLnBrk="1" latinLnBrk="0" hangingPunct="1">
+        <a:defRPr sz="1800" kern="1200">
+          <a:solidFill>
+            <a:schemeClr val="tx1"/>
+          </a:solidFill>
+          <a:latin typeface="+mn-lt"/>
+          <a:ea typeface="+mn-ea"/>
+          <a:cs typeface="+mn-cs"/>
+        </a:defRPr>
+      </a:lvl1pPr>
+      <a:lvl2pPr marL="457200" algn="l" defTabSz="914400" rtl="0" eaLnBrk="1" latinLnBrk="0" hangingPunct="1">
+        <a:defRPr sz="1800" kern="1200">
+          <a:solidFill>
+            <a:schemeClr val="tx1"/>
+          </a:solidFill>
+          <a:latin typeface="+mn-lt"/>
+          <a:ea typeface="+mn-ea"/>
+          <a:cs typeface="+mn-cs"/>
+        </a:defRPr>
+      </a:lvl2pPr>
+      <a:lvl3pPr marL="914400" algn="l" defTabSz="914400" rtl="0" eaLnBrk="1" latinLnBrk="0" hangingPunct="1">
+        <a:defRPr sz="1800" kern="1200">
+          <a:solidFill>
+            <a:schemeClr val="tx1"/>
+          </a:solidFill>
+          <a:latin typeface="+mn-lt"/>
+          <a:ea typeface="+mn-ea"/>
+          <a:cs typeface="+mn-cs"/>
+        </a:defRPr>
+      </a:lvl3pPr>
+      <a:lvl4pPr marL="1371600" algn="l" defTabSz="914400" rtl="0" eaLnBrk="1" latinLnBrk="0" hangingPunct="1">
+        <a:defRPr sz="1800" kern="1200">
+          <a:solidFill>
+            <a:schemeClr val="tx1"/>
+          </a:solidFill>
+          <a:latin typeface="+mn-lt"/>
+          <a:ea typeface="+mn-ea"/>
+          <a:cs typeface="+mn-cs"/>
+        </a:defRPr>
+      </a:lvl4pPr>
+      <a:lvl5pPr marL="1828800" algn="l" defTabSz="914400" rtl="0" eaLnBrk="1" latinLnBrk="0" hangingPunct="1">
+        <a:defRPr sz="1800" kern="1200">
+          <a:solidFill>
+            <a:schemeClr val="tx1"/>
+          </a:solidFill>
+          <a:latin typeface="+mn-lt"/>
+          <a:ea typeface="+mn-ea"/>
+          <a:cs typeface="+mn-cs"/>
+        </a:defRPr>
+      </a:lvl5pPr>
+      <a:lvl6pPr marL="2286000" algn="l" defTabSz="914400" rtl="0" eaLnBrk="1" latinLnBrk="0" hangingPunct="1">
+        <a:defRPr sz="1800" kern="1200">
+          <a:solidFill>
+            <a:schemeClr val="tx1"/>
+          </a:solidFill>
+          <a:latin typeface="+mn-lt"/>
+          <a:ea typeface="+mn-ea"/>
+          <a:cs typeface="+mn-cs"/>
+        </a:defRPr>
+      </a:lvl6pPr>
+      <a:lvl7pPr marL="2743200" algn="l" defTabSz="914400" rtl="0" eaLnBrk="1" latinLnBrk="0" hangingPunct="1">
+        <a:defRPr sz="1800" kern="1200">
+          <a:solidFill>
+            <a:schemeClr val="tx1"/>
+          </a:solidFill>
+          <a:latin typeface="+mn-lt"/>
+          <a:ea typeface="+mn-ea"/>
+          <a:cs typeface="+mn-cs"/>
+        </a:defRPr>
+      </a:lvl7pPr>
+      <a:lvl8pPr marL="3200400" algn="l" defTabSz="914400" rtl="0" eaLnBrk="1" latinLnBrk="0" hangingPunct="1">
+        <a:defRPr sz="1800" kern="1200">
+          <a:solidFill>
+            <a:schemeClr val="tx1"/>
+          </a:solidFill>
+          <a:latin typeface="+mn-lt"/>
+          <a:ea typeface="+mn-ea"/>
+          <a:cs typeface="+mn-cs"/>
+        </a:defRPr>
+      </a:lvl8pPr>
+      <a:lvl9pPr marL="3657600" algn="l" defTabSz="914400" rtl="0" eaLnBrk="1" latinLnBrk="0" hangingPunct="1">
+        <a:defRPr sz="1800" kern="1200">
+          <a:solidFill>
+            <a:schemeClr val="tx1"/>
+          </a:solidFill>
+          <a:latin typeface="+mn-lt"/>
+          <a:ea typeface="+mn-ea"/>
+          <a:cs typeface="+mn-cs"/>
+        </a:defRPr>
+      </a:lvl9pPr>
+    </p:otherStyle>
+  </p:txStyles>
+</p:sldMaster>
+</file>
+
 <file path=ppt/slides/slide1.xml><?xml version="1.0" encoding="utf-8"?>
 <p:sld xmlns:a="http://schemas.openxmlformats.org/drawingml/2006/main" xmlns:r="http://schemas.openxmlformats.org/officeDocument/2006/relationships" xmlns:p="http://schemas.openxmlformats.org/presentationml/2006/main">
   <p:cSld>
@@ -4990,6 +10460,247 @@
     <p:extLst>
       <p:ext uri="{BB962C8B-B14F-4D97-AF65-F5344CB8AC3E}">
         <p14:creationId xmlns:p14="http://schemas.microsoft.com/office/powerpoint/2010/main" val="3126166857"/>
+      </p:ext>
+    </p:extLst>
+  </p:cSld>
+  <p:clrMapOvr>
+    <a:masterClrMapping/>
+  </p:clrMapOvr>
+</p:sld>
+</file>
+
+<file path=ppt/slides/slide9.xml><?xml version="1.0" encoding="utf-8"?>
+<p:sld xmlns:a="http://schemas.openxmlformats.org/drawingml/2006/main" xmlns:r="http://schemas.openxmlformats.org/officeDocument/2006/relationships" xmlns:p="http://schemas.openxmlformats.org/presentationml/2006/main">
+  <p:cSld>
+    <p:spTree>
+      <p:nvGrpSpPr>
+        <p:cNvPr id="1" name=""/>
+        <p:cNvGrpSpPr/>
+        <p:nvPr/>
+      </p:nvGrpSpPr>
+      <p:grpSpPr>
+        <a:xfrm>
+          <a:off x="0" y="0"/>
+          <a:ext cx="0" cy="0"/>
+          <a:chOff x="0" y="0"/>
+          <a:chExt cx="0" cy="0"/>
+        </a:xfrm>
+      </p:grpSpPr>
+      <p:sp>
+        <p:nvSpPr>
+          <p:cNvPr id="2" name="Title 1">
+            <a:extLst>
+              <a:ext uri="{FF2B5EF4-FFF2-40B4-BE49-F238E27FC236}">
+                <a16:creationId xmlns:a16="http://schemas.microsoft.com/office/drawing/2014/main" id="{F7357C48-2C50-5587-5B64-24F7CE236783}"/>
+              </a:ext>
+            </a:extLst>
+          </p:cNvPr>
+          <p:cNvSpPr>
+            <a:spLocks noGrp="1"/>
+          </p:cNvSpPr>
+          <p:nvPr>
+            <p:ph type="title"/>
+          </p:nvPr>
+        </p:nvSpPr>
+        <p:spPr/>
+        <p:txBody>
+          <a:bodyPr/>
+          <a:lstStyle/>
+          <a:p>
+            <a:r>
+              <a:rPr lang="en-GB" dirty="0"/>
+              <a:t>2026 IT Needs of Active Research Survey</a:t>
+            </a:r>
+          </a:p>
+        </p:txBody>
+      </p:sp>
+      <p:sp>
+        <p:nvSpPr>
+          <p:cNvPr id="3" name="Content Placeholder 2">
+            <a:extLst>
+              <a:ext uri="{FF2B5EF4-FFF2-40B4-BE49-F238E27FC236}">
+                <a16:creationId xmlns:a16="http://schemas.microsoft.com/office/drawing/2014/main" id="{AE939116-DBB8-4101-FC45-CEDC7FD29B29}"/>
+              </a:ext>
+            </a:extLst>
+          </p:cNvPr>
+          <p:cNvSpPr>
+            <a:spLocks noGrp="1"/>
+          </p:cNvSpPr>
+          <p:nvPr>
+            <p:ph sz="half" idx="1"/>
+          </p:nvPr>
+        </p:nvSpPr>
+        <p:spPr>
+          <a:xfrm>
+            <a:off x="502921" y="1310641"/>
+            <a:ext cx="7175693" cy="4378960"/>
+          </a:xfrm>
+        </p:spPr>
+        <p:txBody>
+          <a:bodyPr>
+            <a:normAutofit/>
+          </a:bodyPr>
+          <a:lstStyle/>
+          <a:p>
+            <a:pPr marL="342900" indent="-342900">
+              <a:buFont typeface="Arial" panose="020B0604020202020204" pitchFamily="34" charset="0"/>
+              <a:buChar char="•"/>
+            </a:pPr>
+            <a:r>
+              <a:rPr lang="en-GB" sz="2200" dirty="0"/>
+              <a:t>Survey going live Monday 23 February for 4 weeks </a:t>
+            </a:r>
+          </a:p>
+          <a:p>
+            <a:pPr marL="800100" lvl="1" indent="-342900">
+              <a:buFont typeface="Arial" panose="020B0604020202020204" pitchFamily="34" charset="0"/>
+              <a:buChar char="•"/>
+            </a:pPr>
+            <a:r>
+              <a:rPr lang="en-GB" sz="1600" dirty="0"/>
+              <a:t>Being sent to all research staff via new mailing list</a:t>
+            </a:r>
+          </a:p>
+          <a:p>
+            <a:pPr marL="800100" lvl="1" indent="-342900">
+              <a:buFont typeface="Arial" panose="020B0604020202020204" pitchFamily="34" charset="0"/>
+              <a:buChar char="•"/>
+            </a:pPr>
+            <a:r>
+              <a:rPr lang="en-GB" sz="1600" dirty="0"/>
+              <a:t>PGR Leads being asked to send out to PGRs</a:t>
+            </a:r>
+          </a:p>
+          <a:p>
+            <a:pPr marL="342900" indent="-342900">
+              <a:buFont typeface="Arial" panose="020B0604020202020204" pitchFamily="34" charset="0"/>
+              <a:buChar char="•"/>
+            </a:pPr>
+            <a:r>
+              <a:rPr lang="en-GB" sz="2000" dirty="0"/>
+              <a:t>Your opportunity to shape the future of research computing at </a:t>
+            </a:r>
+            <a:r>
+              <a:rPr lang="en-GB" sz="2000" dirty="0" err="1"/>
+              <a:t>UoB</a:t>
+            </a:r>
+            <a:r>
+              <a:rPr lang="en-GB" sz="2000" dirty="0"/>
+              <a:t>!</a:t>
+            </a:r>
+          </a:p>
+          <a:p>
+            <a:pPr marL="800100" lvl="1" indent="-342900">
+              <a:buFont typeface="Arial" panose="020B0604020202020204" pitchFamily="34" charset="0"/>
+              <a:buChar char="•"/>
+            </a:pPr>
+            <a:r>
+              <a:rPr lang="en-GB" sz="1600" dirty="0">
+                <a:hlinkClick r:id="rId2"/>
+              </a:rPr>
+              <a:t>Received 5 years of funding for extra training based on 2024 results</a:t>
+            </a:r>
+            <a:endParaRPr lang="en-GB" sz="1600" dirty="0"/>
+          </a:p>
+          <a:p>
+            <a:pPr marL="342900" indent="-342900">
+              <a:buFont typeface="Arial" panose="020B0604020202020204" pitchFamily="34" charset="0"/>
+              <a:buChar char="•"/>
+            </a:pPr>
+            <a:r>
+              <a:rPr lang="en-GB" sz="2000" dirty="0"/>
+              <a:t>Survey link</a:t>
+            </a:r>
+          </a:p>
+          <a:p>
+            <a:pPr marL="800100" lvl="1" indent="-342900">
+              <a:buFont typeface="Arial" panose="020B0604020202020204" pitchFamily="34" charset="0"/>
+              <a:buChar char="•"/>
+            </a:pPr>
+            <a:r>
+              <a:rPr lang="en-GB" sz="1600" dirty="0">
+                <a:hlinkClick r:id="rId3"/>
+              </a:rPr>
+              <a:t>https://app.onlinesurveys.jisc.ac.uk/s/bham/2026-it-needs-of-active-research</a:t>
+            </a:r>
+            <a:r>
+              <a:rPr lang="en-GB" sz="1600" dirty="0"/>
+              <a:t> </a:t>
+            </a:r>
+          </a:p>
+          <a:p>
+            <a:pPr marL="342900" indent="-342900">
+              <a:buFont typeface="Arial" panose="020B0604020202020204" pitchFamily="34" charset="0"/>
+              <a:buChar char="•"/>
+            </a:pPr>
+            <a:endParaRPr lang="en-GB" dirty="0"/>
+          </a:p>
+        </p:txBody>
+      </p:sp>
+      <p:pic>
+        <p:nvPicPr>
+          <p:cNvPr id="5" name="Picture 4" descr="A qr code on a white background&#10;&#10;AI-generated content may be incorrect.">
+            <a:extLst>
+              <a:ext uri="{FF2B5EF4-FFF2-40B4-BE49-F238E27FC236}">
+                <a16:creationId xmlns:a16="http://schemas.microsoft.com/office/drawing/2014/main" id="{6DBA7F14-E730-26A9-97F8-8BB8A20B684D}"/>
+              </a:ext>
+            </a:extLst>
+          </p:cNvPr>
+          <p:cNvPicPr>
+            <a:picLocks noChangeAspect="1"/>
+          </p:cNvPicPr>
+          <p:nvPr/>
+        </p:nvPicPr>
+        <p:blipFill>
+          <a:blip r:embed="rId4"/>
+          <a:stretch>
+            <a:fillRect/>
+          </a:stretch>
+        </p:blipFill>
+        <p:spPr>
+          <a:xfrm>
+            <a:off x="8146366" y="1080871"/>
+            <a:ext cx="3706836" cy="3706836"/>
+          </a:xfrm>
+          <a:prstGeom prst="rect">
+            <a:avLst/>
+          </a:prstGeom>
+        </p:spPr>
+      </p:pic>
+      <p:pic>
+        <p:nvPicPr>
+          <p:cNvPr id="6" name="Picture 5" descr="A white background with black text&#10;&#10;AI-generated content may be incorrect.">
+            <a:extLst>
+              <a:ext uri="{FF2B5EF4-FFF2-40B4-BE49-F238E27FC236}">
+                <a16:creationId xmlns:a16="http://schemas.microsoft.com/office/drawing/2014/main" id="{0F15C397-8423-6956-2F43-5D393BE0AE99}"/>
+              </a:ext>
+            </a:extLst>
+          </p:cNvPr>
+          <p:cNvPicPr>
+            <a:picLocks noChangeAspect="1"/>
+          </p:cNvPicPr>
+          <p:nvPr/>
+        </p:nvPicPr>
+        <p:blipFill>
+          <a:blip r:embed="rId5"/>
+          <a:stretch>
+            <a:fillRect/>
+          </a:stretch>
+        </p:blipFill>
+        <p:spPr>
+          <a:xfrm>
+            <a:off x="8146366" y="4753708"/>
+            <a:ext cx="3706836" cy="2085095"/>
+          </a:xfrm>
+          <a:prstGeom prst="rect">
+            <a:avLst/>
+          </a:prstGeom>
+        </p:spPr>
+      </p:pic>
+    </p:spTree>
+    <p:extLst>
+      <p:ext uri="{BB962C8B-B14F-4D97-AF65-F5344CB8AC3E}">
+        <p14:creationId xmlns:p14="http://schemas.microsoft.com/office/powerpoint/2010/main" val="25058625"/>
       </p:ext>
     </p:extLst>
   </p:cSld>
@@ -5312,4 +11023,299 @@
     </a:ext>
   </a:extLst>
 </a:theme>
+</file>
+
+<file path=ppt/theme/theme2.xml><?xml version="1.0" encoding="utf-8"?>
+<a:theme xmlns:a="http://schemas.openxmlformats.org/drawingml/2006/main" name="UOB">
+  <a:themeElements>
+    <a:clrScheme name="Custom 2">
+      <a:dk1>
+        <a:srgbClr val="000000"/>
+      </a:dk1>
+      <a:lt1>
+        <a:srgbClr val="FFFFFF"/>
+      </a:lt1>
+      <a:dk2>
+        <a:srgbClr val="C59A00"/>
+      </a:dk2>
+      <a:lt2>
+        <a:srgbClr val="C20019"/>
+      </a:lt2>
+      <a:accent1>
+        <a:srgbClr val="007838"/>
+      </a:accent1>
+      <a:accent2>
+        <a:srgbClr val="00788E"/>
+      </a:accent2>
+      <a:accent3>
+        <a:srgbClr val="0057BF"/>
+      </a:accent3>
+      <a:accent4>
+        <a:srgbClr val="501D83"/>
+      </a:accent4>
+      <a:accent5>
+        <a:srgbClr val="DB0061"/>
+      </a:accent5>
+      <a:accent6>
+        <a:srgbClr val="CF4527"/>
+      </a:accent6>
+      <a:hlink>
+        <a:srgbClr val="0057BF"/>
+      </a:hlink>
+      <a:folHlink>
+        <a:srgbClr val="0057BF"/>
+      </a:folHlink>
+    </a:clrScheme>
+    <a:fontScheme name="Office">
+      <a:majorFont>
+        <a:latin typeface="Calibri Light" panose="020F0302020204030204"/>
+        <a:ea typeface=""/>
+        <a:cs typeface=""/>
+        <a:font script="Jpan" typeface="游ゴシック Light"/>
+        <a:font script="Hang" typeface="맑은 고딕"/>
+        <a:font script="Hans" typeface="等线 Light"/>
+        <a:font script="Hant" typeface="新細明體"/>
+        <a:font script="Arab" typeface="Times New Roman"/>
+        <a:font script="Hebr" typeface="Times New Roman"/>
+        <a:font script="Thai" typeface="Angsana New"/>
+        <a:font script="Ethi" typeface="Nyala"/>
+        <a:font script="Beng" typeface="Vrinda"/>
+        <a:font script="Gujr" typeface="Shruti"/>
+        <a:font script="Khmr" typeface="MoolBoran"/>
+        <a:font script="Knda" typeface="Tunga"/>
+        <a:font script="Guru" typeface="Raavi"/>
+        <a:font script="Cans" typeface="Euphemia"/>
+        <a:font script="Cher" typeface="Plantagenet Cherokee"/>
+        <a:font script="Yiii" typeface="Microsoft Yi Baiti"/>
+        <a:font script="Tibt" typeface="Microsoft Himalaya"/>
+        <a:font script="Thaa" typeface="MV Boli"/>
+        <a:font script="Deva" typeface="Mangal"/>
+        <a:font script="Telu" typeface="Gautami"/>
+        <a:font script="Taml" typeface="Latha"/>
+        <a:font script="Syrc" typeface="Estrangelo Edessa"/>
+        <a:font script="Orya" typeface="Kalinga"/>
+        <a:font script="Mlym" typeface="Kartika"/>
+        <a:font script="Laoo" typeface="DokChampa"/>
+        <a:font script="Sinh" typeface="Iskoola Pota"/>
+        <a:font script="Mong" typeface="Mongolian Baiti"/>
+        <a:font script="Viet" typeface="Times New Roman"/>
+        <a:font script="Uigh" typeface="Microsoft Uighur"/>
+        <a:font script="Geor" typeface="Sylfaen"/>
+        <a:font script="Armn" typeface="Arial"/>
+        <a:font script="Bugi" typeface="Leelawadee UI"/>
+        <a:font script="Bopo" typeface="Microsoft JhengHei"/>
+        <a:font script="Java" typeface="Javanese Text"/>
+        <a:font script="Lisu" typeface="Segoe UI"/>
+        <a:font script="Mymr" typeface="Myanmar Text"/>
+        <a:font script="Nkoo" typeface="Ebrima"/>
+        <a:font script="Olck" typeface="Nirmala UI"/>
+        <a:font script="Osma" typeface="Ebrima"/>
+        <a:font script="Phag" typeface="Phagspa"/>
+        <a:font script="Syrn" typeface="Estrangelo Edessa"/>
+        <a:font script="Syrj" typeface="Estrangelo Edessa"/>
+        <a:font script="Syre" typeface="Estrangelo Edessa"/>
+        <a:font script="Sora" typeface="Nirmala UI"/>
+        <a:font script="Tale" typeface="Microsoft Tai Le"/>
+        <a:font script="Talu" typeface="Microsoft New Tai Lue"/>
+        <a:font script="Tfng" typeface="Ebrima"/>
+      </a:majorFont>
+      <a:minorFont>
+        <a:latin typeface="Calibri" panose="020F0502020204030204"/>
+        <a:ea typeface=""/>
+        <a:cs typeface=""/>
+        <a:font script="Jpan" typeface="游ゴシック"/>
+        <a:font script="Hang" typeface="맑은 고딕"/>
+        <a:font script="Hans" typeface="等线"/>
+        <a:font script="Hant" typeface="新細明體"/>
+        <a:font script="Arab" typeface="Arial"/>
+        <a:font script="Hebr" typeface="Arial"/>
+        <a:font script="Thai" typeface="Cordia New"/>
+        <a:font script="Ethi" typeface="Nyala"/>
+        <a:font script="Beng" typeface="Vrinda"/>
+        <a:font script="Gujr" typeface="Shruti"/>
+        <a:font script="Khmr" typeface="DaunPenh"/>
+        <a:font script="Knda" typeface="Tunga"/>
+        <a:font script="Guru" typeface="Raavi"/>
+        <a:font script="Cans" typeface="Euphemia"/>
+        <a:font script="Cher" typeface="Plantagenet Cherokee"/>
+        <a:font script="Yiii" typeface="Microsoft Yi Baiti"/>
+        <a:font script="Tibt" typeface="Microsoft Himalaya"/>
+        <a:font script="Thaa" typeface="MV Boli"/>
+        <a:font script="Deva" typeface="Mangal"/>
+        <a:font script="Telu" typeface="Gautami"/>
+        <a:font script="Taml" typeface="Latha"/>
+        <a:font script="Syrc" typeface="Estrangelo Edessa"/>
+        <a:font script="Orya" typeface="Kalinga"/>
+        <a:font script="Mlym" typeface="Kartika"/>
+        <a:font script="Laoo" typeface="DokChampa"/>
+        <a:font script="Sinh" typeface="Iskoola Pota"/>
+        <a:font script="Mong" typeface="Mongolian Baiti"/>
+        <a:font script="Viet" typeface="Arial"/>
+        <a:font script="Uigh" typeface="Microsoft Uighur"/>
+        <a:font script="Geor" typeface="Sylfaen"/>
+        <a:font script="Armn" typeface="Arial"/>
+        <a:font script="Bugi" typeface="Leelawadee UI"/>
+        <a:font script="Bopo" typeface="Microsoft JhengHei"/>
+        <a:font script="Java" typeface="Javanese Text"/>
+        <a:font script="Lisu" typeface="Segoe UI"/>
+        <a:font script="Mymr" typeface="Myanmar Text"/>
+        <a:font script="Nkoo" typeface="Ebrima"/>
+        <a:font script="Olck" typeface="Nirmala UI"/>
+        <a:font script="Osma" typeface="Ebrima"/>
+        <a:font script="Phag" typeface="Phagspa"/>
+        <a:font script="Syrn" typeface="Estrangelo Edessa"/>
+        <a:font script="Syrj" typeface="Estrangelo Edessa"/>
+        <a:font script="Syre" typeface="Estrangelo Edessa"/>
+        <a:font script="Sora" typeface="Nirmala UI"/>
+        <a:font script="Tale" typeface="Microsoft Tai Le"/>
+        <a:font script="Talu" typeface="Microsoft New Tai Lue"/>
+        <a:font script="Tfng" typeface="Ebrima"/>
+      </a:minorFont>
+    </a:fontScheme>
+    <a:fmtScheme name="Office">
+      <a:fillStyleLst>
+        <a:solidFill>
+          <a:schemeClr val="phClr"/>
+        </a:solidFill>
+        <a:gradFill rotWithShape="1">
+          <a:gsLst>
+            <a:gs pos="0">
+              <a:schemeClr val="phClr">
+                <a:lumMod val="110000"/>
+                <a:satMod val="105000"/>
+                <a:tint val="67000"/>
+              </a:schemeClr>
+            </a:gs>
+            <a:gs pos="50000">
+              <a:schemeClr val="phClr">
+                <a:lumMod val="105000"/>
+                <a:satMod val="103000"/>
+                <a:tint val="73000"/>
+              </a:schemeClr>
+            </a:gs>
+            <a:gs pos="100000">
+              <a:schemeClr val="phClr">
+                <a:lumMod val="105000"/>
+                <a:satMod val="109000"/>
+                <a:tint val="81000"/>
+              </a:schemeClr>
+            </a:gs>
+          </a:gsLst>
+          <a:lin ang="5400000" scaled="0"/>
+        </a:gradFill>
+        <a:gradFill rotWithShape="1">
+          <a:gsLst>
+            <a:gs pos="0">
+              <a:schemeClr val="phClr">
+                <a:satMod val="103000"/>
+                <a:lumMod val="102000"/>
+                <a:tint val="94000"/>
+              </a:schemeClr>
+            </a:gs>
+            <a:gs pos="50000">
+              <a:schemeClr val="phClr">
+                <a:satMod val="110000"/>
+                <a:lumMod val="100000"/>
+                <a:shade val="100000"/>
+              </a:schemeClr>
+            </a:gs>
+            <a:gs pos="100000">
+              <a:schemeClr val="phClr">
+                <a:lumMod val="99000"/>
+                <a:satMod val="120000"/>
+                <a:shade val="78000"/>
+              </a:schemeClr>
+            </a:gs>
+          </a:gsLst>
+          <a:lin ang="5400000" scaled="0"/>
+        </a:gradFill>
+      </a:fillStyleLst>
+      <a:lnStyleLst>
+        <a:ln w="6350" cap="flat" cmpd="sng" algn="ctr">
+          <a:solidFill>
+            <a:schemeClr val="phClr"/>
+          </a:solidFill>
+          <a:prstDash val="solid"/>
+          <a:miter lim="800000"/>
+        </a:ln>
+        <a:ln w="12700" cap="flat" cmpd="sng" algn="ctr">
+          <a:solidFill>
+            <a:schemeClr val="phClr"/>
+          </a:solidFill>
+          <a:prstDash val="solid"/>
+          <a:miter lim="800000"/>
+        </a:ln>
+        <a:ln w="19050" cap="flat" cmpd="sng" algn="ctr">
+          <a:solidFill>
+            <a:schemeClr val="phClr"/>
+          </a:solidFill>
+          <a:prstDash val="solid"/>
+          <a:miter lim="800000"/>
+        </a:ln>
+      </a:lnStyleLst>
+      <a:effectStyleLst>
+        <a:effectStyle>
+          <a:effectLst/>
+        </a:effectStyle>
+        <a:effectStyle>
+          <a:effectLst/>
+        </a:effectStyle>
+        <a:effectStyle>
+          <a:effectLst>
+            <a:outerShdw blurRad="57150" dist="19050" dir="5400000" algn="ctr" rotWithShape="0">
+              <a:srgbClr val="000000">
+                <a:alpha val="63000"/>
+              </a:srgbClr>
+            </a:outerShdw>
+          </a:effectLst>
+        </a:effectStyle>
+      </a:effectStyleLst>
+      <a:bgFillStyleLst>
+        <a:solidFill>
+          <a:schemeClr val="phClr"/>
+        </a:solidFill>
+        <a:solidFill>
+          <a:schemeClr val="phClr">
+            <a:tint val="95000"/>
+            <a:satMod val="170000"/>
+          </a:schemeClr>
+        </a:solidFill>
+        <a:gradFill rotWithShape="1">
+          <a:gsLst>
+            <a:gs pos="0">
+              <a:schemeClr val="phClr">
+                <a:tint val="93000"/>
+                <a:satMod val="150000"/>
+                <a:shade val="98000"/>
+                <a:lumMod val="102000"/>
+              </a:schemeClr>
+            </a:gs>
+            <a:gs pos="50000">
+              <a:schemeClr val="phClr">
+                <a:tint val="98000"/>
+                <a:satMod val="130000"/>
+                <a:shade val="90000"/>
+                <a:lumMod val="103000"/>
+              </a:schemeClr>
+            </a:gs>
+            <a:gs pos="100000">
+              <a:schemeClr val="phClr">
+                <a:shade val="63000"/>
+                <a:satMod val="120000"/>
+              </a:schemeClr>
+            </a:gs>
+          </a:gsLst>
+          <a:lin ang="5400000" scaled="0"/>
+        </a:gradFill>
+      </a:bgFillStyleLst>
+    </a:fmtScheme>
+  </a:themeElements>
+  <a:objectDefaults/>
+  <a:extraClrSchemeLst/>
+  <a:extLst>
+    <a:ext uri="{05A4C25C-085E-4340-85A3-A5531E510DB2}">
+      <thm15:themeFamily xmlns:thm15="http://schemas.microsoft.com/office/thememl/2012/main" name="Birmingham PPT 2026" id="{86EC31B4-B75D-434C-BEBB-768DD4211533}" vid="{B6E7CFB6-7E16-774A-90EA-9BA93C73CD74}"/>
+    </a:ext>
+  </a:extLst>
+</a:theme>
 </file>
--- a/instructors/Web Scraping with Python.pptx
+++ b/instructors/Web Scraping with Python.pptx
@@ -14,7 +14,8 @@
     <p:sldId id="266" r:id="rId8"/>
     <p:sldId id="267" r:id="rId9"/>
     <p:sldId id="264" r:id="rId10"/>
-    <p:sldId id="257" r:id="rId11"/>
+    <p:sldId id="268" r:id="rId11"/>
+    <p:sldId id="257" r:id="rId12"/>
   </p:sldIdLst>
   <p:sldSz cx="12192000" cy="6858000"/>
   <p:notesSz cx="6858000" cy="9144000"/>
@@ -9184,6 +9185,247 @@
 </p:sld>
 </file>
 
+<file path=ppt/slides/slide10.xml><?xml version="1.0" encoding="utf-8"?>
+<p:sld xmlns:a="http://schemas.openxmlformats.org/drawingml/2006/main" xmlns:r="http://schemas.openxmlformats.org/officeDocument/2006/relationships" xmlns:p="http://schemas.openxmlformats.org/presentationml/2006/main">
+  <p:cSld>
+    <p:spTree>
+      <p:nvGrpSpPr>
+        <p:cNvPr id="1" name=""/>
+        <p:cNvGrpSpPr/>
+        <p:nvPr/>
+      </p:nvGrpSpPr>
+      <p:grpSpPr>
+        <a:xfrm>
+          <a:off x="0" y="0"/>
+          <a:ext cx="0" cy="0"/>
+          <a:chOff x="0" y="0"/>
+          <a:chExt cx="0" cy="0"/>
+        </a:xfrm>
+      </p:grpSpPr>
+      <p:sp>
+        <p:nvSpPr>
+          <p:cNvPr id="2" name="Title 1">
+            <a:extLst>
+              <a:ext uri="{FF2B5EF4-FFF2-40B4-BE49-F238E27FC236}">
+                <a16:creationId xmlns:a16="http://schemas.microsoft.com/office/drawing/2014/main" id="{F7357C48-2C50-5587-5B64-24F7CE236783}"/>
+              </a:ext>
+            </a:extLst>
+          </p:cNvPr>
+          <p:cNvSpPr>
+            <a:spLocks noGrp="1"/>
+          </p:cNvSpPr>
+          <p:nvPr>
+            <p:ph type="title"/>
+          </p:nvPr>
+        </p:nvSpPr>
+        <p:spPr/>
+        <p:txBody>
+          <a:bodyPr/>
+          <a:lstStyle/>
+          <a:p>
+            <a:r>
+              <a:rPr lang="en-GB" dirty="0"/>
+              <a:t>2026 IT Needs of Active Research Survey</a:t>
+            </a:r>
+          </a:p>
+        </p:txBody>
+      </p:sp>
+      <p:sp>
+        <p:nvSpPr>
+          <p:cNvPr id="3" name="Content Placeholder 2">
+            <a:extLst>
+              <a:ext uri="{FF2B5EF4-FFF2-40B4-BE49-F238E27FC236}">
+                <a16:creationId xmlns:a16="http://schemas.microsoft.com/office/drawing/2014/main" id="{AE939116-DBB8-4101-FC45-CEDC7FD29B29}"/>
+              </a:ext>
+            </a:extLst>
+          </p:cNvPr>
+          <p:cNvSpPr>
+            <a:spLocks noGrp="1"/>
+          </p:cNvSpPr>
+          <p:nvPr>
+            <p:ph sz="half" idx="1"/>
+          </p:nvPr>
+        </p:nvSpPr>
+        <p:spPr>
+          <a:xfrm>
+            <a:off x="502921" y="1310641"/>
+            <a:ext cx="7175693" cy="4378960"/>
+          </a:xfrm>
+        </p:spPr>
+        <p:txBody>
+          <a:bodyPr>
+            <a:normAutofit/>
+          </a:bodyPr>
+          <a:lstStyle/>
+          <a:p>
+            <a:pPr marL="342900" indent="-342900">
+              <a:buFont typeface="Arial" panose="020B0604020202020204" pitchFamily="34" charset="0"/>
+              <a:buChar char="•"/>
+            </a:pPr>
+            <a:r>
+              <a:rPr lang="en-GB" sz="2200" dirty="0"/>
+              <a:t>Survey going live Monday 23 February for 4 weeks </a:t>
+            </a:r>
+          </a:p>
+          <a:p>
+            <a:pPr marL="800100" lvl="1" indent="-342900">
+              <a:buFont typeface="Arial" panose="020B0604020202020204" pitchFamily="34" charset="0"/>
+              <a:buChar char="•"/>
+            </a:pPr>
+            <a:r>
+              <a:rPr lang="en-GB" sz="1600" dirty="0"/>
+              <a:t>Being sent to all research staff via new mailing list</a:t>
+            </a:r>
+          </a:p>
+          <a:p>
+            <a:pPr marL="800100" lvl="1" indent="-342900">
+              <a:buFont typeface="Arial" panose="020B0604020202020204" pitchFamily="34" charset="0"/>
+              <a:buChar char="•"/>
+            </a:pPr>
+            <a:r>
+              <a:rPr lang="en-GB" sz="1600" dirty="0"/>
+              <a:t>PGR Leads being asked to send out to PGRs</a:t>
+            </a:r>
+          </a:p>
+          <a:p>
+            <a:pPr marL="342900" indent="-342900">
+              <a:buFont typeface="Arial" panose="020B0604020202020204" pitchFamily="34" charset="0"/>
+              <a:buChar char="•"/>
+            </a:pPr>
+            <a:r>
+              <a:rPr lang="en-GB" sz="2000" dirty="0"/>
+              <a:t>Your opportunity to shape the future of research computing at </a:t>
+            </a:r>
+            <a:r>
+              <a:rPr lang="en-GB" sz="2000" dirty="0" err="1"/>
+              <a:t>UoB</a:t>
+            </a:r>
+            <a:r>
+              <a:rPr lang="en-GB" sz="2000" dirty="0"/>
+              <a:t>!</a:t>
+            </a:r>
+          </a:p>
+          <a:p>
+            <a:pPr marL="800100" lvl="1" indent="-342900">
+              <a:buFont typeface="Arial" panose="020B0604020202020204" pitchFamily="34" charset="0"/>
+              <a:buChar char="•"/>
+            </a:pPr>
+            <a:r>
+              <a:rPr lang="en-GB" sz="1600" dirty="0">
+                <a:hlinkClick r:id="rId2"/>
+              </a:rPr>
+              <a:t>Received 5 years of funding for extra training based on 2024 results</a:t>
+            </a:r>
+            <a:endParaRPr lang="en-GB" sz="1600" dirty="0"/>
+          </a:p>
+          <a:p>
+            <a:pPr marL="342900" indent="-342900">
+              <a:buFont typeface="Arial" panose="020B0604020202020204" pitchFamily="34" charset="0"/>
+              <a:buChar char="•"/>
+            </a:pPr>
+            <a:r>
+              <a:rPr lang="en-GB" sz="2000" dirty="0"/>
+              <a:t>Survey link</a:t>
+            </a:r>
+          </a:p>
+          <a:p>
+            <a:pPr marL="800100" lvl="1" indent="-342900">
+              <a:buFont typeface="Arial" panose="020B0604020202020204" pitchFamily="34" charset="0"/>
+              <a:buChar char="•"/>
+            </a:pPr>
+            <a:r>
+              <a:rPr lang="en-GB" sz="1600" dirty="0">
+                <a:hlinkClick r:id="rId3"/>
+              </a:rPr>
+              <a:t>https://app.onlinesurveys.jisc.ac.uk/s/bham/2026-it-needs-of-active-research</a:t>
+            </a:r>
+            <a:r>
+              <a:rPr lang="en-GB" sz="1600" dirty="0"/>
+              <a:t> </a:t>
+            </a:r>
+          </a:p>
+          <a:p>
+            <a:pPr marL="342900" indent="-342900">
+              <a:buFont typeface="Arial" panose="020B0604020202020204" pitchFamily="34" charset="0"/>
+              <a:buChar char="•"/>
+            </a:pPr>
+            <a:endParaRPr lang="en-GB" dirty="0"/>
+          </a:p>
+        </p:txBody>
+      </p:sp>
+      <p:pic>
+        <p:nvPicPr>
+          <p:cNvPr id="5" name="Picture 4" descr="A qr code on a white background&#10;&#10;AI-generated content may be incorrect.">
+            <a:extLst>
+              <a:ext uri="{FF2B5EF4-FFF2-40B4-BE49-F238E27FC236}">
+                <a16:creationId xmlns:a16="http://schemas.microsoft.com/office/drawing/2014/main" id="{6DBA7F14-E730-26A9-97F8-8BB8A20B684D}"/>
+              </a:ext>
+            </a:extLst>
+          </p:cNvPr>
+          <p:cNvPicPr>
+            <a:picLocks noChangeAspect="1"/>
+          </p:cNvPicPr>
+          <p:nvPr/>
+        </p:nvPicPr>
+        <p:blipFill>
+          <a:blip r:embed="rId4"/>
+          <a:stretch>
+            <a:fillRect/>
+          </a:stretch>
+        </p:blipFill>
+        <p:spPr>
+          <a:xfrm>
+            <a:off x="8146366" y="1080871"/>
+            <a:ext cx="3706836" cy="3706836"/>
+          </a:xfrm>
+          <a:prstGeom prst="rect">
+            <a:avLst/>
+          </a:prstGeom>
+        </p:spPr>
+      </p:pic>
+      <p:pic>
+        <p:nvPicPr>
+          <p:cNvPr id="6" name="Picture 5" descr="A white background with black text&#10;&#10;AI-generated content may be incorrect.">
+            <a:extLst>
+              <a:ext uri="{FF2B5EF4-FFF2-40B4-BE49-F238E27FC236}">
+                <a16:creationId xmlns:a16="http://schemas.microsoft.com/office/drawing/2014/main" id="{0F15C397-8423-6956-2F43-5D393BE0AE99}"/>
+              </a:ext>
+            </a:extLst>
+          </p:cNvPr>
+          <p:cNvPicPr>
+            <a:picLocks noChangeAspect="1"/>
+          </p:cNvPicPr>
+          <p:nvPr/>
+        </p:nvPicPr>
+        <p:blipFill>
+          <a:blip r:embed="rId5"/>
+          <a:stretch>
+            <a:fillRect/>
+          </a:stretch>
+        </p:blipFill>
+        <p:spPr>
+          <a:xfrm>
+            <a:off x="8146366" y="4753708"/>
+            <a:ext cx="3706836" cy="2085095"/>
+          </a:xfrm>
+          <a:prstGeom prst="rect">
+            <a:avLst/>
+          </a:prstGeom>
+        </p:spPr>
+      </p:pic>
+    </p:spTree>
+    <p:extLst>
+      <p:ext uri="{BB962C8B-B14F-4D97-AF65-F5344CB8AC3E}">
+        <p14:creationId xmlns:p14="http://schemas.microsoft.com/office/powerpoint/2010/main" val="25058625"/>
+      </p:ext>
+    </p:extLst>
+  </p:cSld>
+  <p:clrMapOvr>
+    <a:masterClrMapping/>
+  </p:clrMapOvr>
+</p:sld>
+</file>
+
 <file path=ppt/slides/slide2.xml><?xml version="1.0" encoding="utf-8"?>
 <p:sld xmlns:a="http://schemas.openxmlformats.org/drawingml/2006/main" xmlns:r="http://schemas.openxmlformats.org/officeDocument/2006/relationships" xmlns:p="http://schemas.openxmlformats.org/presentationml/2006/main">
   <p:cSld>
@@ -10491,7 +10733,7 @@
           <p:cNvPr id="2" name="Title 1">
             <a:extLst>
               <a:ext uri="{FF2B5EF4-FFF2-40B4-BE49-F238E27FC236}">
-                <a16:creationId xmlns:a16="http://schemas.microsoft.com/office/drawing/2014/main" id="{F7357C48-2C50-5587-5B64-24F7CE236783}"/>
+                <a16:creationId xmlns:a16="http://schemas.microsoft.com/office/drawing/2014/main" id="{6AD8B16F-FB2A-64B7-86A0-7A073C8D2F65}"/>
               </a:ext>
             </a:extLst>
           </p:cNvPr>
@@ -10509,198 +10751,89 @@
           <a:p>
             <a:r>
               <a:rPr lang="en-GB" dirty="0"/>
-              <a:t>2026 IT Needs of Active Research Survey</a:t>
-            </a:r>
-          </a:p>
-        </p:txBody>
-      </p:sp>
-      <p:sp>
-        <p:nvSpPr>
-          <p:cNvPr id="3" name="Content Placeholder 2">
-            <a:extLst>
-              <a:ext uri="{FF2B5EF4-FFF2-40B4-BE49-F238E27FC236}">
-                <a16:creationId xmlns:a16="http://schemas.microsoft.com/office/drawing/2014/main" id="{AE939116-DBB8-4101-FC45-CEDC7FD29B29}"/>
-              </a:ext>
-            </a:extLst>
-          </p:cNvPr>
-          <p:cNvSpPr>
-            <a:spLocks noGrp="1"/>
-          </p:cNvSpPr>
-          <p:nvPr>
-            <p:ph sz="half" idx="1"/>
-          </p:nvPr>
-        </p:nvSpPr>
-        <p:spPr>
-          <a:xfrm>
-            <a:off x="502921" y="1310641"/>
-            <a:ext cx="7175693" cy="4378960"/>
-          </a:xfrm>
-        </p:spPr>
-        <p:txBody>
-          <a:bodyPr>
-            <a:normAutofit/>
-          </a:bodyPr>
-          <a:lstStyle/>
-          <a:p>
-            <a:pPr marL="342900" indent="-342900">
-              <a:buFont typeface="Arial" panose="020B0604020202020204" pitchFamily="34" charset="0"/>
-              <a:buChar char="•"/>
-            </a:pPr>
-            <a:r>
-              <a:rPr lang="en-GB" sz="2200" dirty="0"/>
-              <a:t>Survey going live Monday 23 February for 4 weeks </a:t>
-            </a:r>
-          </a:p>
-          <a:p>
-            <a:pPr marL="800100" lvl="1" indent="-342900">
-              <a:buFont typeface="Arial" panose="020B0604020202020204" pitchFamily="34" charset="0"/>
-              <a:buChar char="•"/>
-            </a:pPr>
-            <a:r>
-              <a:rPr lang="en-GB" sz="1600" dirty="0"/>
-              <a:t>Being sent to all research staff via new mailing list</a:t>
-            </a:r>
-          </a:p>
-          <a:p>
-            <a:pPr marL="800100" lvl="1" indent="-342900">
-              <a:buFont typeface="Arial" panose="020B0604020202020204" pitchFamily="34" charset="0"/>
-              <a:buChar char="•"/>
-            </a:pPr>
-            <a:r>
-              <a:rPr lang="en-GB" sz="1600" dirty="0"/>
-              <a:t>PGR Leads being asked to send out to PGRs</a:t>
-            </a:r>
-          </a:p>
-          <a:p>
-            <a:pPr marL="342900" indent="-342900">
-              <a:buFont typeface="Arial" panose="020B0604020202020204" pitchFamily="34" charset="0"/>
-              <a:buChar char="•"/>
-            </a:pPr>
-            <a:r>
-              <a:rPr lang="en-GB" sz="2000" dirty="0"/>
-              <a:t>Your opportunity to shape the future of research computing at </a:t>
-            </a:r>
-            <a:r>
-              <a:rPr lang="en-GB" sz="2000" dirty="0" err="1"/>
-              <a:t>UoB</a:t>
-            </a:r>
-            <a:r>
-              <a:rPr lang="en-GB" sz="2000" dirty="0"/>
-              <a:t>!</a:t>
-            </a:r>
-          </a:p>
-          <a:p>
-            <a:pPr marL="800100" lvl="1" indent="-342900">
-              <a:buFont typeface="Arial" panose="020B0604020202020204" pitchFamily="34" charset="0"/>
-              <a:buChar char="•"/>
-            </a:pPr>
-            <a:r>
-              <a:rPr lang="en-GB" sz="1600" dirty="0">
-                <a:hlinkClick r:id="rId2"/>
-              </a:rPr>
-              <a:t>Received 5 years of funding for extra training based on 2024 results</a:t>
-            </a:r>
-            <a:endParaRPr lang="en-GB" sz="1600" dirty="0"/>
-          </a:p>
-          <a:p>
-            <a:pPr marL="342900" indent="-342900">
-              <a:buFont typeface="Arial" panose="020B0604020202020204" pitchFamily="34" charset="0"/>
-              <a:buChar char="•"/>
-            </a:pPr>
-            <a:r>
-              <a:rPr lang="en-GB" sz="2000" dirty="0"/>
-              <a:t>Survey link</a:t>
-            </a:r>
-          </a:p>
-          <a:p>
-            <a:pPr marL="800100" lvl="1" indent="-342900">
-              <a:buFont typeface="Arial" panose="020B0604020202020204" pitchFamily="34" charset="0"/>
-              <a:buChar char="•"/>
-            </a:pPr>
-            <a:r>
-              <a:rPr lang="en-GB" sz="1600" dirty="0">
-                <a:hlinkClick r:id="rId3"/>
-              </a:rPr>
-              <a:t>https://app.onlinesurveys.jisc.ac.uk/s/bham/2026-it-needs-of-active-research</a:t>
-            </a:r>
-            <a:r>
-              <a:rPr lang="en-GB" sz="1600" dirty="0"/>
-              <a:t> </a:t>
-            </a:r>
-          </a:p>
-          <a:p>
-            <a:pPr marL="342900" indent="-342900">
-              <a:buFont typeface="Arial" panose="020B0604020202020204" pitchFamily="34" charset="0"/>
-              <a:buChar char="•"/>
-            </a:pPr>
-            <a:endParaRPr lang="en-GB" dirty="0"/>
+              <a:t>Please take a couple of minutes to fill in the feedback form</a:t>
+            </a:r>
           </a:p>
         </p:txBody>
       </p:sp>
       <p:pic>
         <p:nvPicPr>
-          <p:cNvPr id="5" name="Picture 4" descr="A qr code on a white background&#10;&#10;AI-generated content may be incorrect.">
-            <a:extLst>
-              <a:ext uri="{FF2B5EF4-FFF2-40B4-BE49-F238E27FC236}">
-                <a16:creationId xmlns:a16="http://schemas.microsoft.com/office/drawing/2014/main" id="{6DBA7F14-E730-26A9-97F8-8BB8A20B684D}"/>
+          <p:cNvPr id="5" name="Content Placeholder 4">
+            <a:extLst>
+              <a:ext uri="{FF2B5EF4-FFF2-40B4-BE49-F238E27FC236}">
+                <a16:creationId xmlns:a16="http://schemas.microsoft.com/office/drawing/2014/main" id="{A53BCEAE-15E7-B060-D9D0-D0F2D0CA4449}"/>
               </a:ext>
             </a:extLst>
           </p:cNvPr>
           <p:cNvPicPr>
-            <a:picLocks noChangeAspect="1"/>
+            <a:picLocks noGrp="1" noChangeAspect="1"/>
           </p:cNvPicPr>
-          <p:nvPr/>
+          <p:nvPr>
+            <p:ph idx="1"/>
+          </p:nvPr>
         </p:nvPicPr>
         <p:blipFill>
-          <a:blip r:embed="rId4"/>
+          <a:blip r:embed="rId2"/>
           <a:stretch>
             <a:fillRect/>
           </a:stretch>
         </p:blipFill>
         <p:spPr>
           <a:xfrm>
-            <a:off x="8146366" y="1080871"/>
-            <a:ext cx="3706836" cy="3706836"/>
+            <a:off x="7102443" y="1944497"/>
+            <a:ext cx="3615055" cy="3615055"/>
           </a:xfrm>
           <a:prstGeom prst="rect">
             <a:avLst/>
           </a:prstGeom>
         </p:spPr>
       </p:pic>
-      <p:pic>
-        <p:nvPicPr>
-          <p:cNvPr id="6" name="Picture 5" descr="A white background with black text&#10;&#10;AI-generated content may be incorrect.">
-            <a:extLst>
-              <a:ext uri="{FF2B5EF4-FFF2-40B4-BE49-F238E27FC236}">
-                <a16:creationId xmlns:a16="http://schemas.microsoft.com/office/drawing/2014/main" id="{0F15C397-8423-6956-2F43-5D393BE0AE99}"/>
-              </a:ext>
-            </a:extLst>
-          </p:cNvPr>
-          <p:cNvPicPr>
-            <a:picLocks noChangeAspect="1"/>
-          </p:cNvPicPr>
+      <p:sp>
+        <p:nvSpPr>
+          <p:cNvPr id="7" name="TextBox 6">
+            <a:extLst>
+              <a:ext uri="{FF2B5EF4-FFF2-40B4-BE49-F238E27FC236}">
+                <a16:creationId xmlns:a16="http://schemas.microsoft.com/office/drawing/2014/main" id="{BA5BD9E5-AEC1-2D3B-DC3B-314B1F03DC04}"/>
+              </a:ext>
+            </a:extLst>
+          </p:cNvPr>
+          <p:cNvSpPr txBox="1"/>
           <p:nvPr/>
-        </p:nvPicPr>
-        <p:blipFill>
-          <a:blip r:embed="rId5"/>
-          <a:stretch>
-            <a:fillRect/>
-          </a:stretch>
-        </p:blipFill>
-        <p:spPr>
-          <a:xfrm>
-            <a:off x="8146366" y="4753708"/>
-            <a:ext cx="3706836" cy="2085095"/>
+        </p:nvSpPr>
+        <p:spPr>
+          <a:xfrm>
+            <a:off x="1117854" y="3336525"/>
+            <a:ext cx="6094476" cy="830997"/>
           </a:xfrm>
           <a:prstGeom prst="rect">
             <a:avLst/>
           </a:prstGeom>
-        </p:spPr>
-      </p:pic>
+          <a:noFill/>
+        </p:spPr>
+        <p:txBody>
+          <a:bodyPr wrap="square">
+            <a:spAutoFit/>
+          </a:bodyPr>
+          <a:lstStyle/>
+          <a:p>
+            <a:r>
+              <a:rPr lang="en-GB" sz="2400" u="none" strike="noStrike" dirty="0">
+                <a:solidFill>
+                  <a:srgbClr val="1264A3"/>
+                </a:solidFill>
+                <a:effectLst/>
+                <a:hlinkClick r:id="rId3"/>
+              </a:rPr>
+              <a:t>Web Scraping with Python - 18 Mar 2026 - BEAR Training Feedback form – Fill out form</a:t>
+            </a:r>
+            <a:endParaRPr lang="en-GB" sz="2400" dirty="0"/>
+          </a:p>
+        </p:txBody>
+      </p:sp>
     </p:spTree>
     <p:extLst>
       <p:ext uri="{BB962C8B-B14F-4D97-AF65-F5344CB8AC3E}">
-        <p14:creationId xmlns:p14="http://schemas.microsoft.com/office/powerpoint/2010/main" val="25058625"/>
+        <p14:creationId xmlns:p14="http://schemas.microsoft.com/office/powerpoint/2010/main" val="3769151487"/>
       </p:ext>
     </p:extLst>
   </p:cSld>
